--- a/Slide-Decks/Chapter 5-9 Unity Project Labs.pptx
+++ b/Slide-Decks/Chapter 5-9 Unity Project Labs.pptx
@@ -8,11 +8,16 @@
     <p:sldId id="256" r:id="rId2"/>
     <p:sldId id="257" r:id="rId3"/>
     <p:sldId id="258" r:id="rId4"/>
-    <p:sldId id="259" r:id="rId5"/>
-    <p:sldId id="260" r:id="rId6"/>
-    <p:sldId id="261" r:id="rId7"/>
-    <p:sldId id="262" r:id="rId8"/>
-    <p:sldId id="263" r:id="rId9"/>
+    <p:sldId id="268" r:id="rId5"/>
+    <p:sldId id="259" r:id="rId6"/>
+    <p:sldId id="267" r:id="rId7"/>
+    <p:sldId id="260" r:id="rId8"/>
+    <p:sldId id="266" r:id="rId9"/>
+    <p:sldId id="261" r:id="rId10"/>
+    <p:sldId id="265" r:id="rId11"/>
+    <p:sldId id="262" r:id="rId12"/>
+    <p:sldId id="264" r:id="rId13"/>
+    <p:sldId id="263" r:id="rId14"/>
   </p:sldIdLst>
   <p:sldSz cx="12192000" cy="6858000"/>
   <p:notesSz cx="6858000" cy="9144000"/>
@@ -111,6 +116,11 @@
       </a:defRPr>
     </a:lvl9pPr>
   </p:defaultTextStyle>
+  <p:extLst>
+    <p:ext uri="{EFAFB233-063F-42B5-8137-9DF3F51BA10A}">
+      <p15:sldGuideLst xmlns:p15="http://schemas.microsoft.com/office/powerpoint/2012/main"/>
+    </p:ext>
+  </p:extLst>
 </p:presentation>
 </file>
 
@@ -4268,7 +4278,7 @@
                 </a:solidFill>
                 <a:latin typeface="Aptos" panose="020B0004020202020204" pitchFamily="34" charset="0"/>
               </a:rPr>
-              <a:t>Unity 2022.3.62f3  |  Source-first examples</a:t>
+              <a:t>Unity 2022.3.62f3  |  Openable projects with screenshots</a:t>
             </a:r>
           </a:p>
         </p:txBody>
@@ -4277,6 +4287,3607 @@
     <p:extLst>
       <p:ext uri="{BB962C8B-B14F-4D97-AF65-F5344CB8AC3E}">
         <p14:creationId xmlns:p14="http://schemas.microsoft.com/office/powerpoint/2010/main" val="1559541349"/>
+      </p:ext>
+    </p:extLst>
+  </p:cSld>
+  <p:clrMapOvr>
+    <a:masterClrMapping/>
+  </p:clrMapOvr>
+</p:sld>
+</file>
+
+<file path=ppt/slides/slide10.xml><?xml version="1.0" encoding="utf-8"?>
+<p:sld xmlns:a="http://schemas.openxmlformats.org/drawingml/2006/main" xmlns:r="http://schemas.openxmlformats.org/officeDocument/2006/relationships" xmlns:p="http://schemas.openxmlformats.org/presentationml/2006/main">
+  <p:cSld>
+    <p:spTree>
+      <p:nvGrpSpPr>
+        <p:cNvPr id="1" name=""/>
+        <p:cNvGrpSpPr/>
+        <p:nvPr/>
+      </p:nvGrpSpPr>
+      <p:grpSpPr>
+        <a:xfrm>
+          <a:off x="0" y="0"/>
+          <a:ext cx="0" cy="0"/>
+          <a:chOff x="0" y="0"/>
+          <a:chExt cx="0" cy="0"/>
+        </a:xfrm>
+      </p:grpSpPr>
+      <p:sp>
+        <p:nvSpPr>
+          <p:cNvPr id="2" name="Rectangle 1">
+            <a:extLst>
+              <a:ext uri="{FF2B5EF4-FFF2-40B4-BE49-F238E27FC236}">
+                <a16:creationId xmlns:a16="http://schemas.microsoft.com/office/drawing/2014/main" id="{4C5D3F19-9B0A-4545-9C1D-EED35A663B38}"/>
+              </a:ext>
+            </a:extLst>
+          </p:cNvPr>
+          <p:cNvSpPr/>
+          <p:nvPr/>
+        </p:nvSpPr>
+        <p:spPr>
+          <a:xfrm>
+            <a:off x="0" y="0"/>
+            <a:ext cx="12192000" cy="6858000"/>
+          </a:xfrm>
+          <a:prstGeom prst="rect">
+            <a:avLst/>
+          </a:prstGeom>
+          <a:solidFill>
+            <a:srgbClr val="F3F1E9"/>
+          </a:solidFill>
+          <a:ln w="19050" cap="flat" cmpd="sng" algn="ctr">
+            <a:noFill/>
+            <a:prstDash val="solid"/>
+            <a:miter lim="800000"/>
+          </a:ln>
+          <a:effectLst/>
+          <a:extLst>
+            <a:ext uri="{91240B29-F687-4F45-9708-019B960494DF}">
+              <a14:hiddenLine xmlns:a14="http://schemas.microsoft.com/office/drawing/2010/main" w="19050" cap="flat" cmpd="sng" algn="ctr">
+                <a:solidFill>
+                  <a:schemeClr val="accent1">
+                    <a:shade val="15000"/>
+                  </a:schemeClr>
+                </a:solidFill>
+                <a:prstDash val="solid"/>
+                <a:miter lim="800000"/>
+              </a14:hiddenLine>
+            </a:ext>
+          </a:extLst>
+        </p:spPr>
+        <p:style>
+          <a:lnRef idx="2">
+            <a:schemeClr val="accent1">
+              <a:shade val="15000"/>
+            </a:schemeClr>
+          </a:lnRef>
+          <a:fillRef idx="1">
+            <a:schemeClr val="accent1"/>
+          </a:fillRef>
+          <a:effectRef idx="0">
+            <a:schemeClr val="accent1"/>
+          </a:effectRef>
+          <a:fontRef idx="minor">
+            <a:schemeClr val="lt1"/>
+          </a:fontRef>
+        </p:style>
+        <p:txBody>
+          <a:bodyPr rtlCol="0" anchor="ctr"/>
+          <a:lstStyle/>
+          <a:p>
+            <a:pPr algn="ctr"/>
+            <a:endParaRPr lang="en-US"/>
+          </a:p>
+        </p:txBody>
+      </p:sp>
+      <p:sp>
+        <p:nvSpPr>
+          <p:cNvPr id="3" name="Rectangle 2">
+            <a:extLst>
+              <a:ext uri="{FF2B5EF4-FFF2-40B4-BE49-F238E27FC236}">
+                <a16:creationId xmlns:a16="http://schemas.microsoft.com/office/drawing/2014/main" id="{E12186CA-BFE5-09CA-3B4C-A8BDF00E259D}"/>
+              </a:ext>
+            </a:extLst>
+          </p:cNvPr>
+          <p:cNvSpPr/>
+          <p:nvPr/>
+        </p:nvSpPr>
+        <p:spPr>
+          <a:xfrm>
+            <a:off x="0" y="0"/>
+            <a:ext cx="177800" cy="6858000"/>
+          </a:xfrm>
+          <a:prstGeom prst="rect">
+            <a:avLst/>
+          </a:prstGeom>
+          <a:solidFill>
+            <a:srgbClr val="348775"/>
+          </a:solidFill>
+          <a:ln w="19050" cap="flat" cmpd="sng" algn="ctr">
+            <a:noFill/>
+            <a:prstDash val="solid"/>
+            <a:miter lim="800000"/>
+          </a:ln>
+          <a:effectLst/>
+          <a:extLst>
+            <a:ext uri="{91240B29-F687-4F45-9708-019B960494DF}">
+              <a14:hiddenLine xmlns:a14="http://schemas.microsoft.com/office/drawing/2010/main" w="19050" cap="flat" cmpd="sng" algn="ctr">
+                <a:solidFill>
+                  <a:schemeClr val="accent1">
+                    <a:shade val="15000"/>
+                  </a:schemeClr>
+                </a:solidFill>
+                <a:prstDash val="solid"/>
+                <a:miter lim="800000"/>
+              </a14:hiddenLine>
+            </a:ext>
+          </a:extLst>
+        </p:spPr>
+        <p:style>
+          <a:lnRef idx="2">
+            <a:schemeClr val="accent1">
+              <a:shade val="15000"/>
+            </a:schemeClr>
+          </a:lnRef>
+          <a:fillRef idx="1">
+            <a:schemeClr val="accent1"/>
+          </a:fillRef>
+          <a:effectRef idx="0">
+            <a:schemeClr val="accent1"/>
+          </a:effectRef>
+          <a:fontRef idx="minor">
+            <a:schemeClr val="lt1"/>
+          </a:fontRef>
+        </p:style>
+        <p:txBody>
+          <a:bodyPr rtlCol="0" anchor="ctr"/>
+          <a:lstStyle/>
+          <a:p>
+            <a:pPr algn="ctr"/>
+            <a:endParaRPr lang="en-US"/>
+          </a:p>
+        </p:txBody>
+      </p:sp>
+      <p:sp>
+        <p:nvSpPr>
+          <p:cNvPr id="4" name="TextBox 3">
+            <a:extLst>
+              <a:ext uri="{FF2B5EF4-FFF2-40B4-BE49-F238E27FC236}">
+                <a16:creationId xmlns:a16="http://schemas.microsoft.com/office/drawing/2014/main" id="{30548713-4D66-0BE0-F929-39913BF070A7}"/>
+              </a:ext>
+            </a:extLst>
+          </p:cNvPr>
+          <p:cNvSpPr txBox="1"/>
+          <p:nvPr/>
+        </p:nvSpPr>
+        <p:spPr>
+          <a:xfrm>
+            <a:off x="711200" y="444500"/>
+            <a:ext cx="8890000" cy="169277"/>
+          </a:xfrm>
+          <a:prstGeom prst="rect">
+            <a:avLst/>
+          </a:prstGeom>
+          <a:noFill/>
+        </p:spPr>
+        <p:txBody>
+          <a:bodyPr vert="horz" wrap="square" lIns="0" tIns="0" rIns="0" bIns="0" rtlCol="0">
+            <a:spAutoFit/>
+          </a:bodyPr>
+          <a:lstStyle/>
+          <a:p>
+            <a:r>
+              <a:rPr lang="en-US" sz="1100" b="1">
+                <a:solidFill>
+                  <a:srgbClr val="348775"/>
+                </a:solidFill>
+                <a:latin typeface="Aptos" panose="020B0004020202020204" pitchFamily="34" charset="0"/>
+              </a:rPr>
+              <a:t>WEEK 12  /  CHAPTER 8  /  IN THE SCENE</a:t>
+            </a:r>
+          </a:p>
+        </p:txBody>
+      </p:sp>
+      <p:sp>
+        <p:nvSpPr>
+          <p:cNvPr id="5" name="TextBox 4">
+            <a:extLst>
+              <a:ext uri="{FF2B5EF4-FFF2-40B4-BE49-F238E27FC236}">
+                <a16:creationId xmlns:a16="http://schemas.microsoft.com/office/drawing/2014/main" id="{7AEFC3D4-CBA9-98D1-AB2E-3716241CDBD2}"/>
+              </a:ext>
+            </a:extLst>
+          </p:cNvPr>
+          <p:cNvSpPr txBox="1"/>
+          <p:nvPr/>
+        </p:nvSpPr>
+        <p:spPr>
+          <a:xfrm>
+            <a:off x="711200" y="850900"/>
+            <a:ext cx="10668000" cy="446276"/>
+          </a:xfrm>
+          <a:prstGeom prst="rect">
+            <a:avLst/>
+          </a:prstGeom>
+          <a:noFill/>
+        </p:spPr>
+        <p:txBody>
+          <a:bodyPr vert="horz" wrap="square" lIns="0" tIns="0" rIns="0" bIns="0" rtlCol="0">
+            <a:spAutoFit/>
+          </a:bodyPr>
+          <a:lstStyle/>
+          <a:p>
+            <a:r>
+              <a:rPr lang="en-US" sz="2900" b="1">
+                <a:solidFill>
+                  <a:srgbClr val="1A302A"/>
+                </a:solidFill>
+                <a:latin typeface="Aptos Display" panose="020B0004020202020204" pitchFamily="34" charset="0"/>
+              </a:rPr>
+              <a:t>Gaze fills the ring, then selects</a:t>
+            </a:r>
+          </a:p>
+        </p:txBody>
+      </p:sp>
+      <p:sp>
+        <p:nvSpPr>
+          <p:cNvPr id="6" name="TextBox 5">
+            <a:extLst>
+              <a:ext uri="{FF2B5EF4-FFF2-40B4-BE49-F238E27FC236}">
+                <a16:creationId xmlns:a16="http://schemas.microsoft.com/office/drawing/2014/main" id="{2C45CA81-15ED-66C7-D926-DD7CCFE6966F}"/>
+              </a:ext>
+            </a:extLst>
+          </p:cNvPr>
+          <p:cNvSpPr txBox="1"/>
+          <p:nvPr/>
+        </p:nvSpPr>
+        <p:spPr>
+          <a:xfrm>
+            <a:off x="736600" y="1511300"/>
+            <a:ext cx="10414000" cy="215444"/>
+          </a:xfrm>
+          <a:prstGeom prst="rect">
+            <a:avLst/>
+          </a:prstGeom>
+          <a:noFill/>
+        </p:spPr>
+        <p:txBody>
+          <a:bodyPr vert="horz" wrap="square" lIns="0" tIns="0" rIns="0" bIns="0" rtlCol="0">
+            <a:spAutoFit/>
+          </a:bodyPr>
+          <a:lstStyle/>
+          <a:p>
+            <a:r>
+              <a:rPr lang="en-US" sz="1400">
+                <a:solidFill>
+                  <a:srgbClr val="55645D"/>
+                </a:solidFill>
+                <a:latin typeface="Aptos" panose="020B0004020202020204" pitchFamily="34" charset="0"/>
+              </a:rPr>
+              <a:t>Assets/Scenes/GazeDwell.unity  |  5 of 5 checks passed in a Windows build (head gaze simulated, no headset)</a:t>
+            </a:r>
+          </a:p>
+        </p:txBody>
+      </p:sp>
+      <p:sp>
+        <p:nvSpPr>
+          <p:cNvPr id="15" name="Rectangle 14">
+            <a:extLst>
+              <a:ext uri="{FF2B5EF4-FFF2-40B4-BE49-F238E27FC236}">
+                <a16:creationId xmlns:a16="http://schemas.microsoft.com/office/drawing/2014/main" id="{69FD3F2F-0491-0D03-E29E-C167A6A839F5}"/>
+              </a:ext>
+            </a:extLst>
+          </p:cNvPr>
+          <p:cNvSpPr/>
+          <p:nvPr/>
+        </p:nvSpPr>
+        <p:spPr>
+          <a:xfrm>
+            <a:off x="609600" y="6350000"/>
+            <a:ext cx="10972800" cy="12700"/>
+          </a:xfrm>
+          <a:prstGeom prst="rect">
+            <a:avLst/>
+          </a:prstGeom>
+          <a:solidFill>
+            <a:srgbClr val="D5DCD6"/>
+          </a:solidFill>
+          <a:ln w="19050" cap="flat" cmpd="sng" algn="ctr">
+            <a:noFill/>
+            <a:prstDash val="solid"/>
+            <a:miter lim="800000"/>
+          </a:ln>
+          <a:effectLst/>
+          <a:extLst>
+            <a:ext uri="{91240B29-F687-4F45-9708-019B960494DF}">
+              <a14:hiddenLine xmlns:a14="http://schemas.microsoft.com/office/drawing/2010/main" w="19050" cap="flat" cmpd="sng" algn="ctr">
+                <a:solidFill>
+                  <a:schemeClr val="accent1">
+                    <a:shade val="15000"/>
+                  </a:schemeClr>
+                </a:solidFill>
+                <a:prstDash val="solid"/>
+                <a:miter lim="800000"/>
+              </a14:hiddenLine>
+            </a:ext>
+          </a:extLst>
+        </p:spPr>
+        <p:style>
+          <a:lnRef idx="2">
+            <a:schemeClr val="accent1">
+              <a:shade val="15000"/>
+            </a:schemeClr>
+          </a:lnRef>
+          <a:fillRef idx="1">
+            <a:schemeClr val="accent1"/>
+          </a:fillRef>
+          <a:effectRef idx="0">
+            <a:schemeClr val="accent1"/>
+          </a:effectRef>
+          <a:fontRef idx="minor">
+            <a:schemeClr val="lt1"/>
+          </a:fontRef>
+        </p:style>
+        <p:txBody>
+          <a:bodyPr rtlCol="0" anchor="ctr"/>
+          <a:lstStyle/>
+          <a:p>
+            <a:pPr algn="ctr"/>
+            <a:endParaRPr lang="en-US"/>
+          </a:p>
+        </p:txBody>
+      </p:sp>
+      <p:sp>
+        <p:nvSpPr>
+          <p:cNvPr id="16" name="TextBox 15">
+            <a:extLst>
+              <a:ext uri="{FF2B5EF4-FFF2-40B4-BE49-F238E27FC236}">
+                <a16:creationId xmlns:a16="http://schemas.microsoft.com/office/drawing/2014/main" id="{94C30F3F-C881-8525-AC0D-8F87B7FEB138}"/>
+              </a:ext>
+            </a:extLst>
+          </p:cNvPr>
+          <p:cNvSpPr txBox="1"/>
+          <p:nvPr/>
+        </p:nvSpPr>
+        <p:spPr>
+          <a:xfrm>
+            <a:off x="609600" y="6489700"/>
+            <a:ext cx="8890000" cy="138499"/>
+          </a:xfrm>
+          <a:prstGeom prst="rect">
+            <a:avLst/>
+          </a:prstGeom>
+          <a:noFill/>
+        </p:spPr>
+        <p:txBody>
+          <a:bodyPr vert="horz" wrap="square" lIns="0" tIns="0" rIns="0" bIns="0" rtlCol="0">
+            <a:spAutoFit/>
+          </a:bodyPr>
+          <a:lstStyle/>
+          <a:p>
+            <a:r>
+              <a:rPr lang="en-US" sz="900" b="1">
+                <a:solidFill>
+                  <a:srgbClr val="55645D"/>
+                </a:solidFill>
+                <a:latin typeface="Aptos" panose="020B0004020202020204" pitchFamily="34" charset="0"/>
+              </a:rPr>
+              <a:t>CIST 1423  /  UNITY XR LABS</a:t>
+            </a:r>
+          </a:p>
+        </p:txBody>
+      </p:sp>
+      <p:sp>
+        <p:nvSpPr>
+          <p:cNvPr id="17" name="TextBox 16">
+            <a:extLst>
+              <a:ext uri="{FF2B5EF4-FFF2-40B4-BE49-F238E27FC236}">
+                <a16:creationId xmlns:a16="http://schemas.microsoft.com/office/drawing/2014/main" id="{5225ADB3-85A6-210C-8913-FBF881FF305B}"/>
+              </a:ext>
+            </a:extLst>
+          </p:cNvPr>
+          <p:cNvSpPr txBox="1"/>
+          <p:nvPr/>
+        </p:nvSpPr>
+        <p:spPr>
+          <a:xfrm>
+            <a:off x="10985500" y="6451600"/>
+            <a:ext cx="571500" cy="169277"/>
+          </a:xfrm>
+          <a:prstGeom prst="rect">
+            <a:avLst/>
+          </a:prstGeom>
+          <a:noFill/>
+        </p:spPr>
+        <p:txBody>
+          <a:bodyPr vert="horz" wrap="square" lIns="0" tIns="0" rIns="0" bIns="0" rtlCol="0">
+            <a:spAutoFit/>
+          </a:bodyPr>
+          <a:lstStyle/>
+          <a:p>
+            <a:r>
+              <a:rPr lang="en-US" sz="1100" b="1">
+                <a:solidFill>
+                  <a:srgbClr val="55645D"/>
+                </a:solidFill>
+                <a:latin typeface="Aptos Display" panose="020B0004020202020204" pitchFamily="34" charset="0"/>
+              </a:rPr>
+              <a:t>10</a:t>
+            </a:r>
+          </a:p>
+        </p:txBody>
+      </p:sp>
+      <p:pic>
+        <p:nvPicPr>
+          <p:cNvPr id="19" name="Screenshot 1" descr="Screenshot 1">
+            <a:extLst>
+              <a:ext uri="{FF2B5EF4-FFF2-40B4-BE49-F238E27FC236}">
+                <a16:creationId xmlns:a16="http://schemas.microsoft.com/office/drawing/2014/main" id="{6D84AB6D-C8FD-8D75-F60E-7F783DBBF3C7}"/>
+              </a:ext>
+            </a:extLst>
+          </p:cNvPr>
+          <p:cNvPicPr>
+            <a:picLocks/>
+          </p:cNvPicPr>
+          <p:nvPr/>
+        </p:nvPicPr>
+        <p:blipFill>
+          <a:blip r:embed="rId2">
+            <a:extLst>
+              <a:ext uri="{28A0092B-C50C-407E-A947-70E740481C1C}">
+                <a14:useLocalDpi xmlns:a14="http://schemas.microsoft.com/office/drawing/2010/main" val="0"/>
+              </a:ext>
+            </a:extLst>
+          </a:blip>
+          <a:stretch>
+            <a:fillRect/>
+          </a:stretch>
+        </p:blipFill>
+        <p:spPr>
+          <a:xfrm>
+            <a:off x="711200" y="2184400"/>
+            <a:ext cx="3454400" cy="1943100"/>
+          </a:xfrm>
+          <a:prstGeom prst="rect">
+            <a:avLst/>
+          </a:prstGeom>
+          <a:ln w="9525">
+            <a:solidFill>
+              <a:srgbClr val="D5DCD6"/>
+            </a:solidFill>
+          </a:ln>
+        </p:spPr>
+      </p:pic>
+      <p:sp>
+        <p:nvSpPr>
+          <p:cNvPr id="20" name="Caption 1">
+            <a:extLst>
+              <a:ext uri="{FF2B5EF4-FFF2-40B4-BE49-F238E27FC236}">
+                <a16:creationId xmlns:a16="http://schemas.microsoft.com/office/drawing/2014/main" id="{1850FCA5-F670-0B3D-19C9-60B8E4549A53}"/>
+              </a:ext>
+            </a:extLst>
+          </p:cNvPr>
+          <p:cNvSpPr txBox="1"/>
+          <p:nvPr/>
+        </p:nvSpPr>
+        <p:spPr>
+          <a:xfrm>
+            <a:off x="711200" y="4254500"/>
+            <a:ext cx="3454400" cy="369332"/>
+          </a:xfrm>
+          <a:prstGeom prst="rect">
+            <a:avLst/>
+          </a:prstGeom>
+          <a:noFill/>
+        </p:spPr>
+        <p:txBody>
+          <a:bodyPr vert="horz" wrap="square" lIns="0" tIns="0" rIns="0" bIns="0" rtlCol="0">
+            <a:noAutofit/>
+          </a:bodyPr>
+          <a:lstStyle/>
+          <a:p>
+            <a:r>
+              <a:rPr lang="en-US" sz="1100" b="1">
+                <a:solidFill>
+                  <a:srgbClr val="263A33"/>
+                </a:solidFill>
+                <a:latin typeface="Aptos" panose="020B0004020202020204" pitchFamily="34" charset="0"/>
+              </a:rPr>
+              <a:t>Idle.</a:t>
+            </a:r>
+            <a:r>
+              <a:rPr lang="en-US" sz="1100">
+                <a:solidFill>
+                  <a:srgbClr val="55645D"/>
+                </a:solidFill>
+                <a:latin typeface="Aptos" panose="020B0004020202020204" pitchFamily="34" charset="0"/>
+              </a:rPr>
+              <a:t> Three targets; nothing is gazed at.</a:t>
+            </a:r>
+          </a:p>
+        </p:txBody>
+      </p:sp>
+      <p:pic>
+        <p:nvPicPr>
+          <p:cNvPr id="22" name="Screenshot 2" descr="Screenshot 2">
+            <a:extLst>
+              <a:ext uri="{FF2B5EF4-FFF2-40B4-BE49-F238E27FC236}">
+                <a16:creationId xmlns:a16="http://schemas.microsoft.com/office/drawing/2014/main" id="{C792EBBC-C385-CB3C-843C-C20BD5C498E7}"/>
+              </a:ext>
+            </a:extLst>
+          </p:cNvPr>
+          <p:cNvPicPr>
+            <a:picLocks/>
+          </p:cNvPicPr>
+          <p:nvPr/>
+        </p:nvPicPr>
+        <p:blipFill>
+          <a:blip r:embed="rId3">
+            <a:extLst>
+              <a:ext uri="{28A0092B-C50C-407E-A947-70E740481C1C}">
+                <a14:useLocalDpi xmlns:a14="http://schemas.microsoft.com/office/drawing/2010/main" val="0"/>
+              </a:ext>
+            </a:extLst>
+          </a:blip>
+          <a:stretch>
+            <a:fillRect/>
+          </a:stretch>
+        </p:blipFill>
+        <p:spPr>
+          <a:xfrm>
+            <a:off x="4368800" y="2184400"/>
+            <a:ext cx="3454400" cy="1943100"/>
+          </a:xfrm>
+          <a:prstGeom prst="rect">
+            <a:avLst/>
+          </a:prstGeom>
+          <a:ln w="9525">
+            <a:solidFill>
+              <a:srgbClr val="D5DCD6"/>
+            </a:solidFill>
+          </a:ln>
+        </p:spPr>
+      </p:pic>
+      <p:sp>
+        <p:nvSpPr>
+          <p:cNvPr id="23" name="Caption 2">
+            <a:extLst>
+              <a:ext uri="{FF2B5EF4-FFF2-40B4-BE49-F238E27FC236}">
+                <a16:creationId xmlns:a16="http://schemas.microsoft.com/office/drawing/2014/main" id="{8B3D0BA2-1D5C-974F-DFEF-51FA47F42345}"/>
+              </a:ext>
+            </a:extLst>
+          </p:cNvPr>
+          <p:cNvSpPr txBox="1"/>
+          <p:nvPr/>
+        </p:nvSpPr>
+        <p:spPr>
+          <a:xfrm>
+            <a:off x="4368800" y="4254500"/>
+            <a:ext cx="3454400" cy="369332"/>
+          </a:xfrm>
+          <a:prstGeom prst="rect">
+            <a:avLst/>
+          </a:prstGeom>
+          <a:noFill/>
+        </p:spPr>
+        <p:txBody>
+          <a:bodyPr vert="horz" wrap="square" lIns="0" tIns="0" rIns="0" bIns="0" rtlCol="0">
+            <a:noAutofit/>
+          </a:bodyPr>
+          <a:lstStyle/>
+          <a:p>
+            <a:r>
+              <a:rPr lang="en-US" sz="1100" b="1">
+                <a:solidFill>
+                  <a:srgbClr val="263A33"/>
+                </a:solidFill>
+                <a:latin typeface="Aptos" panose="020B0004020202020204" pitchFamily="34" charset="0"/>
+              </a:rPr>
+              <a:t>0.6 s in.</a:t>
+            </a:r>
+            <a:r>
+              <a:rPr lang="en-US" sz="1100">
+                <a:solidFill>
+                  <a:srgbClr val="55645D"/>
+                </a:solidFill>
+                <a:latin typeface="Aptos" panose="020B0004020202020204" pitchFamily="34" charset="0"/>
+              </a:rPr>
+              <a:t> Gaze color and a half-full ring. Looking away now cancels.</a:t>
+            </a:r>
+          </a:p>
+        </p:txBody>
+      </p:sp>
+      <p:pic>
+        <p:nvPicPr>
+          <p:cNvPr id="25" name="Screenshot 3" descr="Screenshot 3">
+            <a:extLst>
+              <a:ext uri="{FF2B5EF4-FFF2-40B4-BE49-F238E27FC236}">
+                <a16:creationId xmlns:a16="http://schemas.microsoft.com/office/drawing/2014/main" id="{D503E776-8085-C4D2-85D1-6C3891876A67}"/>
+              </a:ext>
+            </a:extLst>
+          </p:cNvPr>
+          <p:cNvPicPr>
+            <a:picLocks/>
+          </p:cNvPicPr>
+          <p:nvPr/>
+        </p:nvPicPr>
+        <p:blipFill>
+          <a:blip r:embed="rId4">
+            <a:extLst>
+              <a:ext uri="{28A0092B-C50C-407E-A947-70E740481C1C}">
+                <a14:useLocalDpi xmlns:a14="http://schemas.microsoft.com/office/drawing/2010/main" val="0"/>
+              </a:ext>
+            </a:extLst>
+          </a:blip>
+          <a:stretch>
+            <a:fillRect/>
+          </a:stretch>
+        </p:blipFill>
+        <p:spPr>
+          <a:xfrm>
+            <a:off x="8026400" y="2184400"/>
+            <a:ext cx="3454400" cy="1943100"/>
+          </a:xfrm>
+          <a:prstGeom prst="rect">
+            <a:avLst/>
+          </a:prstGeom>
+          <a:ln w="9525">
+            <a:solidFill>
+              <a:srgbClr val="D5DCD6"/>
+            </a:solidFill>
+          </a:ln>
+        </p:spPr>
+      </p:pic>
+      <p:sp>
+        <p:nvSpPr>
+          <p:cNvPr id="26" name="Caption 3">
+            <a:extLst>
+              <a:ext uri="{FF2B5EF4-FFF2-40B4-BE49-F238E27FC236}">
+                <a16:creationId xmlns:a16="http://schemas.microsoft.com/office/drawing/2014/main" id="{F896A2D4-5A24-BBAC-010C-6C9B1AC929F5}"/>
+              </a:ext>
+            </a:extLst>
+          </p:cNvPr>
+          <p:cNvSpPr txBox="1"/>
+          <p:nvPr/>
+        </p:nvSpPr>
+        <p:spPr>
+          <a:xfrm>
+            <a:off x="8026400" y="4254500"/>
+            <a:ext cx="3454400" cy="369332"/>
+          </a:xfrm>
+          <a:prstGeom prst="rect">
+            <a:avLst/>
+          </a:prstGeom>
+          <a:noFill/>
+        </p:spPr>
+        <p:txBody>
+          <a:bodyPr vert="horz" wrap="square" lIns="0" tIns="0" rIns="0" bIns="0" rtlCol="0">
+            <a:noAutofit/>
+          </a:bodyPr>
+          <a:lstStyle/>
+          <a:p>
+            <a:r>
+              <a:rPr lang="en-US" sz="1100" b="1">
+                <a:solidFill>
+                  <a:srgbClr val="263A33"/>
+                </a:solidFill>
+                <a:latin typeface="Aptos" panose="020B0004020202020204" pitchFamily="34" charset="0"/>
+              </a:rPr>
+              <a:t>Selected.</a:t>
+            </a:r>
+            <a:r>
+              <a:rPr lang="en-US" sz="1100">
+                <a:solidFill>
+                  <a:srgbClr val="55645D"/>
+                </a:solidFill>
+                <a:latin typeface="Aptos" panose="020B0004020202020204" pitchFamily="34" charset="0"/>
+              </a:rPr>
+              <a:t> 1.2 s dwells on the cube and sphere; the event fired once.</a:t>
+            </a:r>
+          </a:p>
+        </p:txBody>
+      </p:sp>
+    </p:spTree>
+    <p:extLst>
+      <p:ext uri="{BB962C8B-B14F-4D97-AF65-F5344CB8AC3E}">
+        <p14:creationId xmlns:p14="http://schemas.microsoft.com/office/powerpoint/2010/main" val="119717170"/>
+      </p:ext>
+    </p:extLst>
+  </p:cSld>
+  <p:clrMapOvr>
+    <a:masterClrMapping/>
+  </p:clrMapOvr>
+</p:sld>
+</file>
+
+<file path=ppt/slides/slide11.xml><?xml version="1.0" encoding="utf-8"?>
+<p:sld xmlns:a="http://schemas.openxmlformats.org/drawingml/2006/main" xmlns:r="http://schemas.openxmlformats.org/officeDocument/2006/relationships" xmlns:p="http://schemas.openxmlformats.org/presentationml/2006/main">
+  <p:cSld>
+    <p:spTree>
+      <p:nvGrpSpPr>
+        <p:cNvPr id="1" name=""/>
+        <p:cNvGrpSpPr/>
+        <p:nvPr/>
+      </p:nvGrpSpPr>
+      <p:grpSpPr>
+        <a:xfrm>
+          <a:off x="0" y="0"/>
+          <a:ext cx="0" cy="0"/>
+          <a:chOff x="0" y="0"/>
+          <a:chExt cx="0" cy="0"/>
+        </a:xfrm>
+      </p:grpSpPr>
+      <p:sp>
+        <p:nvSpPr>
+          <p:cNvPr id="2" name="Rectangle 1">
+            <a:extLst>
+              <a:ext uri="{FF2B5EF4-FFF2-40B4-BE49-F238E27FC236}">
+                <a16:creationId xmlns:a16="http://schemas.microsoft.com/office/drawing/2014/main" id="{6CF71C1A-7C52-4709-3584-DA2834E83ED7}"/>
+              </a:ext>
+            </a:extLst>
+          </p:cNvPr>
+          <p:cNvSpPr/>
+          <p:nvPr/>
+        </p:nvSpPr>
+        <p:spPr>
+          <a:xfrm>
+            <a:off x="0" y="0"/>
+            <a:ext cx="12192000" cy="6858000"/>
+          </a:xfrm>
+          <a:prstGeom prst="rect">
+            <a:avLst/>
+          </a:prstGeom>
+          <a:solidFill>
+            <a:srgbClr val="F3F1E9"/>
+          </a:solidFill>
+          <a:ln w="19050" cap="flat" cmpd="sng" algn="ctr">
+            <a:noFill/>
+            <a:prstDash val="solid"/>
+            <a:miter lim="800000"/>
+          </a:ln>
+          <a:effectLst/>
+          <a:extLst>
+            <a:ext uri="{91240B29-F687-4F45-9708-019B960494DF}">
+              <a14:hiddenLine xmlns:a14="http://schemas.microsoft.com/office/drawing/2010/main" w="19050" cap="flat" cmpd="sng" algn="ctr">
+                <a:solidFill>
+                  <a:schemeClr val="accent1">
+                    <a:shade val="15000"/>
+                  </a:schemeClr>
+                </a:solidFill>
+                <a:prstDash val="solid"/>
+                <a:miter lim="800000"/>
+              </a14:hiddenLine>
+            </a:ext>
+          </a:extLst>
+        </p:spPr>
+        <p:style>
+          <a:lnRef idx="2">
+            <a:schemeClr val="accent1">
+              <a:shade val="15000"/>
+            </a:schemeClr>
+          </a:lnRef>
+          <a:fillRef idx="1">
+            <a:schemeClr val="accent1"/>
+          </a:fillRef>
+          <a:effectRef idx="0">
+            <a:schemeClr val="accent1"/>
+          </a:effectRef>
+          <a:fontRef idx="minor">
+            <a:schemeClr val="lt1"/>
+          </a:fontRef>
+        </p:style>
+        <p:txBody>
+          <a:bodyPr rtlCol="0" anchor="ctr"/>
+          <a:lstStyle/>
+          <a:p>
+            <a:pPr algn="ctr"/>
+            <a:endParaRPr lang="en-US"/>
+          </a:p>
+        </p:txBody>
+      </p:sp>
+      <p:sp>
+        <p:nvSpPr>
+          <p:cNvPr id="3" name="Rectangle 2">
+            <a:extLst>
+              <a:ext uri="{FF2B5EF4-FFF2-40B4-BE49-F238E27FC236}">
+                <a16:creationId xmlns:a16="http://schemas.microsoft.com/office/drawing/2014/main" id="{4B4A3D1D-1CA3-3FE3-1CAC-FB1E7494F187}"/>
+              </a:ext>
+            </a:extLst>
+          </p:cNvPr>
+          <p:cNvSpPr/>
+          <p:nvPr/>
+        </p:nvSpPr>
+        <p:spPr>
+          <a:xfrm>
+            <a:off x="0" y="0"/>
+            <a:ext cx="177800" cy="6858000"/>
+          </a:xfrm>
+          <a:prstGeom prst="rect">
+            <a:avLst/>
+          </a:prstGeom>
+          <a:solidFill>
+            <a:srgbClr val="745C3B"/>
+          </a:solidFill>
+          <a:ln w="19050" cap="flat" cmpd="sng" algn="ctr">
+            <a:noFill/>
+            <a:prstDash val="solid"/>
+            <a:miter lim="800000"/>
+          </a:ln>
+          <a:effectLst/>
+          <a:extLst>
+            <a:ext uri="{91240B29-F687-4F45-9708-019B960494DF}">
+              <a14:hiddenLine xmlns:a14="http://schemas.microsoft.com/office/drawing/2010/main" w="19050" cap="flat" cmpd="sng" algn="ctr">
+                <a:solidFill>
+                  <a:schemeClr val="accent1">
+                    <a:shade val="15000"/>
+                  </a:schemeClr>
+                </a:solidFill>
+                <a:prstDash val="solid"/>
+                <a:miter lim="800000"/>
+              </a14:hiddenLine>
+            </a:ext>
+          </a:extLst>
+        </p:spPr>
+        <p:style>
+          <a:lnRef idx="2">
+            <a:schemeClr val="accent1">
+              <a:shade val="15000"/>
+            </a:schemeClr>
+          </a:lnRef>
+          <a:fillRef idx="1">
+            <a:schemeClr val="accent1"/>
+          </a:fillRef>
+          <a:effectRef idx="0">
+            <a:schemeClr val="accent1"/>
+          </a:effectRef>
+          <a:fontRef idx="minor">
+            <a:schemeClr val="lt1"/>
+          </a:fontRef>
+        </p:style>
+        <p:txBody>
+          <a:bodyPr rtlCol="0" anchor="ctr"/>
+          <a:lstStyle/>
+          <a:p>
+            <a:pPr algn="ctr"/>
+            <a:endParaRPr lang="en-US"/>
+          </a:p>
+        </p:txBody>
+      </p:sp>
+      <p:sp>
+        <p:nvSpPr>
+          <p:cNvPr id="4" name="TextBox 3">
+            <a:extLst>
+              <a:ext uri="{FF2B5EF4-FFF2-40B4-BE49-F238E27FC236}">
+                <a16:creationId xmlns:a16="http://schemas.microsoft.com/office/drawing/2014/main" id="{3D0D9195-D90A-25BB-4913-BE49FED81EFD}"/>
+              </a:ext>
+            </a:extLst>
+          </p:cNvPr>
+          <p:cNvSpPr txBox="1"/>
+          <p:nvPr/>
+        </p:nvSpPr>
+        <p:spPr>
+          <a:xfrm>
+            <a:off x="711200" y="444500"/>
+            <a:ext cx="8890000" cy="169277"/>
+          </a:xfrm>
+          <a:prstGeom prst="rect">
+            <a:avLst/>
+          </a:prstGeom>
+          <a:noFill/>
+        </p:spPr>
+        <p:txBody>
+          <a:bodyPr vert="horz" wrap="square" lIns="0" tIns="0" rIns="0" bIns="0" rtlCol="0">
+            <a:spAutoFit/>
+          </a:bodyPr>
+          <a:lstStyle/>
+          <a:p>
+            <a:r>
+              <a:rPr lang="en-US" sz="1100" b="1">
+                <a:solidFill>
+                  <a:srgbClr val="745C3B"/>
+                </a:solidFill>
+                <a:latin typeface="Aptos" panose="020B0004020202020204" pitchFamily="34" charset="0"/>
+              </a:rPr>
+              <a:t>WEEK 13  /  CHAPTER 9</a:t>
+            </a:r>
+          </a:p>
+        </p:txBody>
+      </p:sp>
+      <p:sp>
+        <p:nvSpPr>
+          <p:cNvPr id="5" name="TextBox 4">
+            <a:extLst>
+              <a:ext uri="{FF2B5EF4-FFF2-40B4-BE49-F238E27FC236}">
+                <a16:creationId xmlns:a16="http://schemas.microsoft.com/office/drawing/2014/main" id="{54B1DD26-7E89-861D-713B-1933176E2878}"/>
+              </a:ext>
+            </a:extLst>
+          </p:cNvPr>
+          <p:cNvSpPr txBox="1"/>
+          <p:nvPr/>
+        </p:nvSpPr>
+        <p:spPr>
+          <a:xfrm>
+            <a:off x="711200" y="850900"/>
+            <a:ext cx="10668000" cy="446276"/>
+          </a:xfrm>
+          <a:prstGeom prst="rect">
+            <a:avLst/>
+          </a:prstGeom>
+          <a:noFill/>
+        </p:spPr>
+        <p:txBody>
+          <a:bodyPr vert="horz" wrap="square" lIns="0" tIns="0" rIns="0" bIns="0" rtlCol="0">
+            <a:spAutoFit/>
+          </a:bodyPr>
+          <a:lstStyle/>
+          <a:p>
+            <a:r>
+              <a:rPr lang="en-US" sz="2900" b="1">
+                <a:solidFill>
+                  <a:srgbClr val="1A302A"/>
+                </a:solidFill>
+                <a:latin typeface="Aptos Display" panose="020B0004020202020204" pitchFamily="34" charset="0"/>
+              </a:rPr>
+              <a:t>Comfort, validation, and review</a:t>
+            </a:r>
+          </a:p>
+        </p:txBody>
+      </p:sp>
+      <p:sp>
+        <p:nvSpPr>
+          <p:cNvPr id="6" name="TextBox 5">
+            <a:extLst>
+              <a:ext uri="{FF2B5EF4-FFF2-40B4-BE49-F238E27FC236}">
+                <a16:creationId xmlns:a16="http://schemas.microsoft.com/office/drawing/2014/main" id="{4E04C44F-3508-A5D1-D715-C61436A6E0C3}"/>
+              </a:ext>
+            </a:extLst>
+          </p:cNvPr>
+          <p:cNvSpPr txBox="1"/>
+          <p:nvPr/>
+        </p:nvSpPr>
+        <p:spPr>
+          <a:xfrm>
+            <a:off x="736600" y="1511300"/>
+            <a:ext cx="10414000" cy="215444"/>
+          </a:xfrm>
+          <a:prstGeom prst="rect">
+            <a:avLst/>
+          </a:prstGeom>
+          <a:noFill/>
+        </p:spPr>
+        <p:txBody>
+          <a:bodyPr vert="horz" wrap="square" lIns="0" tIns="0" rIns="0" bIns="0" rtlCol="0">
+            <a:spAutoFit/>
+          </a:bodyPr>
+          <a:lstStyle/>
+          <a:p>
+            <a:r>
+              <a:rPr lang="en-US" sz="1400">
+                <a:solidFill>
+                  <a:srgbClr val="55645D"/>
+                </a:solidFill>
+                <a:latin typeface="Aptos" panose="020B0004020202020204" pitchFamily="34" charset="0"/>
+              </a:rPr>
+              <a:t>Apply lifecycle thinking to a prior project; the helper records observations, not comfort certification.</a:t>
+            </a:r>
+          </a:p>
+        </p:txBody>
+      </p:sp>
+      <p:sp>
+        <p:nvSpPr>
+          <p:cNvPr id="7" name="Rectangle 6">
+            <a:extLst>
+              <a:ext uri="{FF2B5EF4-FFF2-40B4-BE49-F238E27FC236}">
+                <a16:creationId xmlns:a16="http://schemas.microsoft.com/office/drawing/2014/main" id="{6009743F-906F-AAAE-55BB-04AF21875773}"/>
+              </a:ext>
+            </a:extLst>
+          </p:cNvPr>
+          <p:cNvSpPr/>
+          <p:nvPr/>
+        </p:nvSpPr>
+        <p:spPr>
+          <a:xfrm>
+            <a:off x="711200" y="2209800"/>
+            <a:ext cx="6680200" cy="3429000"/>
+          </a:xfrm>
+          <a:prstGeom prst="rect">
+            <a:avLst/>
+          </a:prstGeom>
+          <a:solidFill>
+            <a:srgbClr val="FFFEFA"/>
+          </a:solidFill>
+          <a:ln w="19050" cap="flat" cmpd="sng" algn="ctr">
+            <a:noFill/>
+            <a:prstDash val="solid"/>
+            <a:miter lim="800000"/>
+          </a:ln>
+          <a:effectLst/>
+          <a:extLst>
+            <a:ext uri="{91240B29-F687-4F45-9708-019B960494DF}">
+              <a14:hiddenLine xmlns:a14="http://schemas.microsoft.com/office/drawing/2010/main" w="19050" cap="flat" cmpd="sng" algn="ctr">
+                <a:solidFill>
+                  <a:schemeClr val="accent1">
+                    <a:shade val="15000"/>
+                  </a:schemeClr>
+                </a:solidFill>
+                <a:prstDash val="solid"/>
+                <a:miter lim="800000"/>
+              </a14:hiddenLine>
+            </a:ext>
+          </a:extLst>
+        </p:spPr>
+        <p:style>
+          <a:lnRef idx="2">
+            <a:schemeClr val="accent1">
+              <a:shade val="15000"/>
+            </a:schemeClr>
+          </a:lnRef>
+          <a:fillRef idx="1">
+            <a:schemeClr val="accent1"/>
+          </a:fillRef>
+          <a:effectRef idx="0">
+            <a:schemeClr val="accent1"/>
+          </a:effectRef>
+          <a:fontRef idx="minor">
+            <a:schemeClr val="lt1"/>
+          </a:fontRef>
+        </p:style>
+        <p:txBody>
+          <a:bodyPr rtlCol="0" anchor="ctr"/>
+          <a:lstStyle/>
+          <a:p>
+            <a:pPr algn="ctr"/>
+            <a:endParaRPr lang="en-US"/>
+          </a:p>
+        </p:txBody>
+      </p:sp>
+      <p:sp>
+        <p:nvSpPr>
+          <p:cNvPr id="8" name="TextBox 7">
+            <a:extLst>
+              <a:ext uri="{FF2B5EF4-FFF2-40B4-BE49-F238E27FC236}">
+                <a16:creationId xmlns:a16="http://schemas.microsoft.com/office/drawing/2014/main" id="{563A3436-E9E1-804A-318E-21406483D648}"/>
+              </a:ext>
+            </a:extLst>
+          </p:cNvPr>
+          <p:cNvSpPr txBox="1"/>
+          <p:nvPr/>
+        </p:nvSpPr>
+        <p:spPr>
+          <a:xfrm>
+            <a:off x="990600" y="2463800"/>
+            <a:ext cx="5715000" cy="153888"/>
+          </a:xfrm>
+          <a:prstGeom prst="rect">
+            <a:avLst/>
+          </a:prstGeom>
+          <a:noFill/>
+        </p:spPr>
+        <p:txBody>
+          <a:bodyPr vert="horz" wrap="square" lIns="0" tIns="0" rIns="0" bIns="0" rtlCol="0">
+            <a:spAutoFit/>
+          </a:bodyPr>
+          <a:lstStyle/>
+          <a:p>
+            <a:r>
+              <a:rPr lang="en-US" sz="1000" b="1">
+                <a:solidFill>
+                  <a:srgbClr val="745C3B"/>
+                </a:solidFill>
+                <a:latin typeface="Aptos" panose="020B0004020202020204" pitchFamily="34" charset="0"/>
+              </a:rPr>
+              <a:t>STUDENTS BUILD</a:t>
+            </a:r>
+          </a:p>
+        </p:txBody>
+      </p:sp>
+      <p:sp>
+        <p:nvSpPr>
+          <p:cNvPr id="9" name="TextBox 8">
+            <a:extLst>
+              <a:ext uri="{FF2B5EF4-FFF2-40B4-BE49-F238E27FC236}">
+                <a16:creationId xmlns:a16="http://schemas.microsoft.com/office/drawing/2014/main" id="{9521B6BD-973F-4350-FA90-6E20DA690802}"/>
+              </a:ext>
+            </a:extLst>
+          </p:cNvPr>
+          <p:cNvSpPr txBox="1"/>
+          <p:nvPr/>
+        </p:nvSpPr>
+        <p:spPr>
+          <a:xfrm>
+            <a:off x="990600" y="2857500"/>
+            <a:ext cx="6032500" cy="984885"/>
+          </a:xfrm>
+          <a:prstGeom prst="rect">
+            <a:avLst/>
+          </a:prstGeom>
+          <a:noFill/>
+        </p:spPr>
+        <p:txBody>
+          <a:bodyPr vert="horz" wrap="square" lIns="0" tIns="0" rIns="0" bIns="0" rtlCol="0">
+            <a:spAutoFit/>
+          </a:bodyPr>
+          <a:lstStyle/>
+          <a:p>
+            <a:r>
+              <a:rPr lang="en-US" sz="1600">
+                <a:solidFill>
+                  <a:srgbClr val="263A33"/>
+                </a:solidFill>
+                <a:latin typeface="Aptos" panose="020B0004020202020204" pitchFamily="34" charset="0"/>
+              </a:rPr>
+              <a:t>- Review locomotion, reach, UI, access, recovery, performance
+- Write observation -&gt; impact -&gt; change -&gt; retest
+- Compare toolkits using dated primary sources
+- Make one focused change and review a peer PR</a:t>
+            </a:r>
+          </a:p>
+        </p:txBody>
+      </p:sp>
+      <p:sp>
+        <p:nvSpPr>
+          <p:cNvPr id="10" name="Rectangle 9">
+            <a:extLst>
+              <a:ext uri="{FF2B5EF4-FFF2-40B4-BE49-F238E27FC236}">
+                <a16:creationId xmlns:a16="http://schemas.microsoft.com/office/drawing/2014/main" id="{A7083CC1-F3B4-BA90-38D1-26001411D197}"/>
+              </a:ext>
+            </a:extLst>
+          </p:cNvPr>
+          <p:cNvSpPr/>
+          <p:nvPr/>
+        </p:nvSpPr>
+        <p:spPr>
+          <a:xfrm>
+            <a:off x="7721600" y="2209800"/>
+            <a:ext cx="3759200" cy="3581400"/>
+          </a:xfrm>
+          <a:prstGeom prst="rect">
+            <a:avLst/>
+          </a:prstGeom>
+          <a:solidFill>
+            <a:srgbClr val="1D3D35"/>
+          </a:solidFill>
+          <a:ln w="19050" cap="flat" cmpd="sng" algn="ctr">
+            <a:noFill/>
+            <a:prstDash val="solid"/>
+            <a:miter lim="800000"/>
+          </a:ln>
+          <a:effectLst/>
+          <a:extLst>
+            <a:ext uri="{91240B29-F687-4F45-9708-019B960494DF}">
+              <a14:hiddenLine xmlns:a14="http://schemas.microsoft.com/office/drawing/2010/main" w="19050" cap="flat" cmpd="sng" algn="ctr">
+                <a:solidFill>
+                  <a:schemeClr val="accent1">
+                    <a:shade val="15000"/>
+                  </a:schemeClr>
+                </a:solidFill>
+                <a:prstDash val="solid"/>
+                <a:miter lim="800000"/>
+              </a14:hiddenLine>
+            </a:ext>
+          </a:extLst>
+        </p:spPr>
+        <p:style>
+          <a:lnRef idx="2">
+            <a:schemeClr val="accent1">
+              <a:shade val="15000"/>
+            </a:schemeClr>
+          </a:lnRef>
+          <a:fillRef idx="1">
+            <a:schemeClr val="accent1"/>
+          </a:fillRef>
+          <a:effectRef idx="0">
+            <a:schemeClr val="accent1"/>
+          </a:effectRef>
+          <a:fontRef idx="minor">
+            <a:schemeClr val="lt1"/>
+          </a:fontRef>
+        </p:style>
+        <p:txBody>
+          <a:bodyPr rtlCol="0" anchor="ctr"/>
+          <a:lstStyle/>
+          <a:p>
+            <a:pPr algn="ctr"/>
+            <a:endParaRPr lang="en-US"/>
+          </a:p>
+        </p:txBody>
+      </p:sp>
+      <p:sp>
+        <p:nvSpPr>
+          <p:cNvPr id="11" name="TextBox 10">
+            <a:extLst>
+              <a:ext uri="{FF2B5EF4-FFF2-40B4-BE49-F238E27FC236}">
+                <a16:creationId xmlns:a16="http://schemas.microsoft.com/office/drawing/2014/main" id="{D59DFED4-1FE9-844F-1902-21DD1ADCDFBA}"/>
+              </a:ext>
+            </a:extLst>
+          </p:cNvPr>
+          <p:cNvSpPr txBox="1"/>
+          <p:nvPr/>
+        </p:nvSpPr>
+        <p:spPr>
+          <a:xfrm>
+            <a:off x="8001000" y="2476500"/>
+            <a:ext cx="3124200" cy="184666"/>
+          </a:xfrm>
+          <a:prstGeom prst="rect">
+            <a:avLst/>
+          </a:prstGeom>
+          <a:noFill/>
+        </p:spPr>
+        <p:txBody>
+          <a:bodyPr vert="horz" wrap="square" lIns="0" tIns="0" rIns="0" bIns="0" rtlCol="0">
+            <a:spAutoFit/>
+          </a:bodyPr>
+          <a:lstStyle/>
+          <a:p>
+            <a:r>
+              <a:rPr lang="en-US" sz="1200" b="1">
+                <a:solidFill>
+                  <a:srgbClr val="F2C16D"/>
+                </a:solidFill>
+                <a:latin typeface="Aptos" panose="020B0004020202020204" pitchFamily="34" charset="0"/>
+              </a:rPr>
+              <a:t>EVIDENCE OVER CLAIMS</a:t>
+            </a:r>
+          </a:p>
+        </p:txBody>
+      </p:sp>
+      <p:sp>
+        <p:nvSpPr>
+          <p:cNvPr id="12" name="TextBox 11">
+            <a:extLst>
+              <a:ext uri="{FF2B5EF4-FFF2-40B4-BE49-F238E27FC236}">
+                <a16:creationId xmlns:a16="http://schemas.microsoft.com/office/drawing/2014/main" id="{67EC189F-DA4F-3594-245D-645D5C4D66B0}"/>
+              </a:ext>
+            </a:extLst>
+          </p:cNvPr>
+          <p:cNvSpPr txBox="1"/>
+          <p:nvPr/>
+        </p:nvSpPr>
+        <p:spPr>
+          <a:xfrm>
+            <a:off x="8001000" y="2933700"/>
+            <a:ext cx="3149600" cy="1077218"/>
+          </a:xfrm>
+          <a:prstGeom prst="rect">
+            <a:avLst/>
+          </a:prstGeom>
+          <a:noFill/>
+        </p:spPr>
+        <p:txBody>
+          <a:bodyPr vert="horz" wrap="square" lIns="0" tIns="0" rIns="0" bIns="0" rtlCol="0">
+            <a:spAutoFit/>
+          </a:bodyPr>
+          <a:lstStyle/>
+          <a:p>
+            <a:r>
+              <a:rPr lang="en-US" sz="1400">
+                <a:solidFill>
+                  <a:srgbClr val="F7F4EC"/>
+                </a:solidFill>
+                <a:latin typeface="Aptos" panose="020B0004020202020204" pitchFamily="34" charset="0"/>
+              </a:rPr>
+              <a:t>1  Test common tasks on intended setup.
+2  Record before/after result and limitations.
+3  Reviewer checks evidence and regression risk.</a:t>
+            </a:r>
+          </a:p>
+        </p:txBody>
+      </p:sp>
+      <p:sp>
+        <p:nvSpPr>
+          <p:cNvPr id="13" name="TextBox 12">
+            <a:extLst>
+              <a:ext uri="{FF2B5EF4-FFF2-40B4-BE49-F238E27FC236}">
+                <a16:creationId xmlns:a16="http://schemas.microsoft.com/office/drawing/2014/main" id="{9E7FC8ED-52FB-CEA2-ADD4-06FA4813B69C}"/>
+              </a:ext>
+            </a:extLst>
+          </p:cNvPr>
+          <p:cNvSpPr txBox="1"/>
+          <p:nvPr/>
+        </p:nvSpPr>
+        <p:spPr>
+          <a:xfrm>
+            <a:off x="8001000" y="5029200"/>
+            <a:ext cx="1270000" cy="138499"/>
+          </a:xfrm>
+          <a:prstGeom prst="rect">
+            <a:avLst/>
+          </a:prstGeom>
+          <a:noFill/>
+        </p:spPr>
+        <p:txBody>
+          <a:bodyPr vert="horz" wrap="square" lIns="0" tIns="0" rIns="0" bIns="0" rtlCol="0">
+            <a:spAutoFit/>
+          </a:bodyPr>
+          <a:lstStyle/>
+          <a:p>
+            <a:r>
+              <a:rPr lang="en-US" sz="900" b="1">
+                <a:solidFill>
+                  <a:srgbClr val="AFC7BD"/>
+                </a:solidFill>
+                <a:latin typeface="Aptos" panose="020B0004020202020204" pitchFamily="34" charset="0"/>
+              </a:rPr>
+              <a:t>TURN IN</a:t>
+            </a:r>
+          </a:p>
+        </p:txBody>
+      </p:sp>
+      <p:sp>
+        <p:nvSpPr>
+          <p:cNvPr id="14" name="TextBox 13">
+            <a:extLst>
+              <a:ext uri="{FF2B5EF4-FFF2-40B4-BE49-F238E27FC236}">
+                <a16:creationId xmlns:a16="http://schemas.microsoft.com/office/drawing/2014/main" id="{C75CAA81-C5A5-B38E-CE14-D04B4BDEBB6B}"/>
+              </a:ext>
+            </a:extLst>
+          </p:cNvPr>
+          <p:cNvSpPr txBox="1"/>
+          <p:nvPr/>
+        </p:nvSpPr>
+        <p:spPr>
+          <a:xfrm>
+            <a:off x="8001000" y="5270500"/>
+            <a:ext cx="3149600" cy="338554"/>
+          </a:xfrm>
+          <a:prstGeom prst="rect">
+            <a:avLst/>
+          </a:prstGeom>
+          <a:noFill/>
+        </p:spPr>
+        <p:txBody>
+          <a:bodyPr vert="horz" wrap="square" lIns="0" tIns="0" rIns="0" bIns="0" rtlCol="0">
+            <a:spAutoFit/>
+          </a:bodyPr>
+          <a:lstStyle/>
+          <a:p>
+            <a:r>
+              <a:rPr lang="en-US" sz="1100" b="1">
+                <a:solidFill>
+                  <a:srgbClr val="FFFFFF"/>
+                </a:solidFill>
+                <a:latin typeface="Aptos" panose="020B0004020202020204" pitchFamily="34" charset="0"/>
+              </a:rPr>
+              <a:t>Revised scene + report + toolkit note + peer review</a:t>
+            </a:r>
+          </a:p>
+        </p:txBody>
+      </p:sp>
+      <p:sp>
+        <p:nvSpPr>
+          <p:cNvPr id="15" name="Rectangle 14">
+            <a:extLst>
+              <a:ext uri="{FF2B5EF4-FFF2-40B4-BE49-F238E27FC236}">
+                <a16:creationId xmlns:a16="http://schemas.microsoft.com/office/drawing/2014/main" id="{82072329-E1F5-21C6-2E4F-D9BA33A49AF5}"/>
+              </a:ext>
+            </a:extLst>
+          </p:cNvPr>
+          <p:cNvSpPr/>
+          <p:nvPr/>
+        </p:nvSpPr>
+        <p:spPr>
+          <a:xfrm>
+            <a:off x="609600" y="6350000"/>
+            <a:ext cx="10972800" cy="12700"/>
+          </a:xfrm>
+          <a:prstGeom prst="rect">
+            <a:avLst/>
+          </a:prstGeom>
+          <a:solidFill>
+            <a:srgbClr val="D5DCD6"/>
+          </a:solidFill>
+          <a:ln w="19050" cap="flat" cmpd="sng" algn="ctr">
+            <a:noFill/>
+            <a:prstDash val="solid"/>
+            <a:miter lim="800000"/>
+          </a:ln>
+          <a:effectLst/>
+          <a:extLst>
+            <a:ext uri="{91240B29-F687-4F45-9708-019B960494DF}">
+              <a14:hiddenLine xmlns:a14="http://schemas.microsoft.com/office/drawing/2010/main" w="19050" cap="flat" cmpd="sng" algn="ctr">
+                <a:solidFill>
+                  <a:schemeClr val="accent1">
+                    <a:shade val="15000"/>
+                  </a:schemeClr>
+                </a:solidFill>
+                <a:prstDash val="solid"/>
+                <a:miter lim="800000"/>
+              </a14:hiddenLine>
+            </a:ext>
+          </a:extLst>
+        </p:spPr>
+        <p:style>
+          <a:lnRef idx="2">
+            <a:schemeClr val="accent1">
+              <a:shade val="15000"/>
+            </a:schemeClr>
+          </a:lnRef>
+          <a:fillRef idx="1">
+            <a:schemeClr val="accent1"/>
+          </a:fillRef>
+          <a:effectRef idx="0">
+            <a:schemeClr val="accent1"/>
+          </a:effectRef>
+          <a:fontRef idx="minor">
+            <a:schemeClr val="lt1"/>
+          </a:fontRef>
+        </p:style>
+        <p:txBody>
+          <a:bodyPr rtlCol="0" anchor="ctr"/>
+          <a:lstStyle/>
+          <a:p>
+            <a:pPr algn="ctr"/>
+            <a:endParaRPr lang="en-US"/>
+          </a:p>
+        </p:txBody>
+      </p:sp>
+      <p:sp>
+        <p:nvSpPr>
+          <p:cNvPr id="16" name="TextBox 15">
+            <a:extLst>
+              <a:ext uri="{FF2B5EF4-FFF2-40B4-BE49-F238E27FC236}">
+                <a16:creationId xmlns:a16="http://schemas.microsoft.com/office/drawing/2014/main" id="{219A8351-6C1B-8009-F4F2-E05DAE250D59}"/>
+              </a:ext>
+            </a:extLst>
+          </p:cNvPr>
+          <p:cNvSpPr txBox="1"/>
+          <p:nvPr/>
+        </p:nvSpPr>
+        <p:spPr>
+          <a:xfrm>
+            <a:off x="609600" y="6489700"/>
+            <a:ext cx="8890000" cy="138499"/>
+          </a:xfrm>
+          <a:prstGeom prst="rect">
+            <a:avLst/>
+          </a:prstGeom>
+          <a:noFill/>
+        </p:spPr>
+        <p:txBody>
+          <a:bodyPr vert="horz" wrap="square" lIns="0" tIns="0" rIns="0" bIns="0" rtlCol="0">
+            <a:spAutoFit/>
+          </a:bodyPr>
+          <a:lstStyle/>
+          <a:p>
+            <a:r>
+              <a:rPr lang="en-US" sz="900" b="1">
+                <a:solidFill>
+                  <a:srgbClr val="55645D"/>
+                </a:solidFill>
+                <a:latin typeface="Aptos" panose="020B0004020202020204" pitchFamily="34" charset="0"/>
+              </a:rPr>
+              <a:t>CIST 1423  /  UNITY XR LABS</a:t>
+            </a:r>
+          </a:p>
+        </p:txBody>
+      </p:sp>
+      <p:sp>
+        <p:nvSpPr>
+          <p:cNvPr id="17" name="TextBox 16">
+            <a:extLst>
+              <a:ext uri="{FF2B5EF4-FFF2-40B4-BE49-F238E27FC236}">
+                <a16:creationId xmlns:a16="http://schemas.microsoft.com/office/drawing/2014/main" id="{514EB5D0-C3DD-77D6-DF99-37EA3EA0BA50}"/>
+              </a:ext>
+            </a:extLst>
+          </p:cNvPr>
+          <p:cNvSpPr txBox="1"/>
+          <p:nvPr/>
+        </p:nvSpPr>
+        <p:spPr>
+          <a:xfrm>
+            <a:off x="10985500" y="6451600"/>
+            <a:ext cx="571500" cy="169277"/>
+          </a:xfrm>
+          <a:prstGeom prst="rect">
+            <a:avLst/>
+          </a:prstGeom>
+          <a:noFill/>
+        </p:spPr>
+        <p:txBody>
+          <a:bodyPr vert="horz" wrap="square" lIns="0" tIns="0" rIns="0" bIns="0" rtlCol="0">
+            <a:spAutoFit/>
+          </a:bodyPr>
+          <a:lstStyle/>
+          <a:p>
+            <a:r>
+              <a:rPr lang="en-US" sz="1100" b="1">
+                <a:solidFill>
+                  <a:srgbClr val="55645D"/>
+                </a:solidFill>
+                <a:latin typeface="Aptos Display" panose="020B0004020202020204" pitchFamily="34" charset="0"/>
+              </a:rPr>
+              <a:t>11</a:t>
+            </a:r>
+          </a:p>
+        </p:txBody>
+      </p:sp>
+    </p:spTree>
+    <p:extLst>
+      <p:ext uri="{BB962C8B-B14F-4D97-AF65-F5344CB8AC3E}">
+        <p14:creationId xmlns:p14="http://schemas.microsoft.com/office/powerpoint/2010/main" val="2672870864"/>
+      </p:ext>
+    </p:extLst>
+  </p:cSld>
+  <p:clrMapOvr>
+    <a:masterClrMapping/>
+  </p:clrMapOvr>
+</p:sld>
+</file>
+
+<file path=ppt/slides/slide12.xml><?xml version="1.0" encoding="utf-8"?>
+<p:sld xmlns:a="http://schemas.openxmlformats.org/drawingml/2006/main" xmlns:r="http://schemas.openxmlformats.org/officeDocument/2006/relationships" xmlns:p="http://schemas.openxmlformats.org/presentationml/2006/main">
+  <p:cSld>
+    <p:spTree>
+      <p:nvGrpSpPr>
+        <p:cNvPr id="1" name=""/>
+        <p:cNvGrpSpPr/>
+        <p:nvPr/>
+      </p:nvGrpSpPr>
+      <p:grpSpPr>
+        <a:xfrm>
+          <a:off x="0" y="0"/>
+          <a:ext cx="0" cy="0"/>
+          <a:chOff x="0" y="0"/>
+          <a:chExt cx="0" cy="0"/>
+        </a:xfrm>
+      </p:grpSpPr>
+      <p:sp>
+        <p:nvSpPr>
+          <p:cNvPr id="2" name="Rectangle 1">
+            <a:extLst>
+              <a:ext uri="{FF2B5EF4-FFF2-40B4-BE49-F238E27FC236}">
+                <a16:creationId xmlns:a16="http://schemas.microsoft.com/office/drawing/2014/main" id="{6CF71C1A-7C52-4709-3584-DA2834E83ED7}"/>
+              </a:ext>
+            </a:extLst>
+          </p:cNvPr>
+          <p:cNvSpPr/>
+          <p:nvPr/>
+        </p:nvSpPr>
+        <p:spPr>
+          <a:xfrm>
+            <a:off x="0" y="0"/>
+            <a:ext cx="12192000" cy="6858000"/>
+          </a:xfrm>
+          <a:prstGeom prst="rect">
+            <a:avLst/>
+          </a:prstGeom>
+          <a:solidFill>
+            <a:srgbClr val="F3F1E9"/>
+          </a:solidFill>
+          <a:ln w="19050" cap="flat" cmpd="sng" algn="ctr">
+            <a:noFill/>
+            <a:prstDash val="solid"/>
+            <a:miter lim="800000"/>
+          </a:ln>
+          <a:effectLst/>
+          <a:extLst>
+            <a:ext uri="{91240B29-F687-4F45-9708-019B960494DF}">
+              <a14:hiddenLine xmlns:a14="http://schemas.microsoft.com/office/drawing/2010/main" w="19050" cap="flat" cmpd="sng" algn="ctr">
+                <a:solidFill>
+                  <a:schemeClr val="accent1">
+                    <a:shade val="15000"/>
+                  </a:schemeClr>
+                </a:solidFill>
+                <a:prstDash val="solid"/>
+                <a:miter lim="800000"/>
+              </a14:hiddenLine>
+            </a:ext>
+          </a:extLst>
+        </p:spPr>
+        <p:style>
+          <a:lnRef idx="2">
+            <a:schemeClr val="accent1">
+              <a:shade val="15000"/>
+            </a:schemeClr>
+          </a:lnRef>
+          <a:fillRef idx="1">
+            <a:schemeClr val="accent1"/>
+          </a:fillRef>
+          <a:effectRef idx="0">
+            <a:schemeClr val="accent1"/>
+          </a:effectRef>
+          <a:fontRef idx="minor">
+            <a:schemeClr val="lt1"/>
+          </a:fontRef>
+        </p:style>
+        <p:txBody>
+          <a:bodyPr rtlCol="0" anchor="ctr"/>
+          <a:lstStyle/>
+          <a:p>
+            <a:pPr algn="ctr"/>
+            <a:endParaRPr lang="en-US"/>
+          </a:p>
+        </p:txBody>
+      </p:sp>
+      <p:sp>
+        <p:nvSpPr>
+          <p:cNvPr id="3" name="Rectangle 2">
+            <a:extLst>
+              <a:ext uri="{FF2B5EF4-FFF2-40B4-BE49-F238E27FC236}">
+                <a16:creationId xmlns:a16="http://schemas.microsoft.com/office/drawing/2014/main" id="{4B4A3D1D-1CA3-3FE3-1CAC-FB1E7494F187}"/>
+              </a:ext>
+            </a:extLst>
+          </p:cNvPr>
+          <p:cNvSpPr/>
+          <p:nvPr/>
+        </p:nvSpPr>
+        <p:spPr>
+          <a:xfrm>
+            <a:off x="0" y="0"/>
+            <a:ext cx="177800" cy="6858000"/>
+          </a:xfrm>
+          <a:prstGeom prst="rect">
+            <a:avLst/>
+          </a:prstGeom>
+          <a:solidFill>
+            <a:srgbClr val="745C3B"/>
+          </a:solidFill>
+          <a:ln w="19050" cap="flat" cmpd="sng" algn="ctr">
+            <a:noFill/>
+            <a:prstDash val="solid"/>
+            <a:miter lim="800000"/>
+          </a:ln>
+          <a:effectLst/>
+          <a:extLst>
+            <a:ext uri="{91240B29-F687-4F45-9708-019B960494DF}">
+              <a14:hiddenLine xmlns:a14="http://schemas.microsoft.com/office/drawing/2010/main" w="19050" cap="flat" cmpd="sng" algn="ctr">
+                <a:solidFill>
+                  <a:schemeClr val="accent1">
+                    <a:shade val="15000"/>
+                  </a:schemeClr>
+                </a:solidFill>
+                <a:prstDash val="solid"/>
+                <a:miter lim="800000"/>
+              </a14:hiddenLine>
+            </a:ext>
+          </a:extLst>
+        </p:spPr>
+        <p:style>
+          <a:lnRef idx="2">
+            <a:schemeClr val="accent1">
+              <a:shade val="15000"/>
+            </a:schemeClr>
+          </a:lnRef>
+          <a:fillRef idx="1">
+            <a:schemeClr val="accent1"/>
+          </a:fillRef>
+          <a:effectRef idx="0">
+            <a:schemeClr val="accent1"/>
+          </a:effectRef>
+          <a:fontRef idx="minor">
+            <a:schemeClr val="lt1"/>
+          </a:fontRef>
+        </p:style>
+        <p:txBody>
+          <a:bodyPr rtlCol="0" anchor="ctr"/>
+          <a:lstStyle/>
+          <a:p>
+            <a:pPr algn="ctr"/>
+            <a:endParaRPr lang="en-US"/>
+          </a:p>
+        </p:txBody>
+      </p:sp>
+      <p:sp>
+        <p:nvSpPr>
+          <p:cNvPr id="4" name="TextBox 3">
+            <a:extLst>
+              <a:ext uri="{FF2B5EF4-FFF2-40B4-BE49-F238E27FC236}">
+                <a16:creationId xmlns:a16="http://schemas.microsoft.com/office/drawing/2014/main" id="{3D0D9195-D90A-25BB-4913-BE49FED81EFD}"/>
+              </a:ext>
+            </a:extLst>
+          </p:cNvPr>
+          <p:cNvSpPr txBox="1"/>
+          <p:nvPr/>
+        </p:nvSpPr>
+        <p:spPr>
+          <a:xfrm>
+            <a:off x="711200" y="444500"/>
+            <a:ext cx="8890000" cy="169277"/>
+          </a:xfrm>
+          <a:prstGeom prst="rect">
+            <a:avLst/>
+          </a:prstGeom>
+          <a:noFill/>
+        </p:spPr>
+        <p:txBody>
+          <a:bodyPr vert="horz" wrap="square" lIns="0" tIns="0" rIns="0" bIns="0" rtlCol="0">
+            <a:spAutoFit/>
+          </a:bodyPr>
+          <a:lstStyle/>
+          <a:p>
+            <a:r>
+              <a:rPr lang="en-US" sz="1100" b="1">
+                <a:solidFill>
+                  <a:srgbClr val="745C3B"/>
+                </a:solidFill>
+                <a:latin typeface="Aptos" panose="020B0004020202020204" pitchFamily="34" charset="0"/>
+              </a:rPr>
+              <a:t>WEEK 13  /  CHAPTER 9  /  IN THE SCENE</a:t>
+            </a:r>
+          </a:p>
+        </p:txBody>
+      </p:sp>
+      <p:sp>
+        <p:nvSpPr>
+          <p:cNvPr id="5" name="TextBox 4">
+            <a:extLst>
+              <a:ext uri="{FF2B5EF4-FFF2-40B4-BE49-F238E27FC236}">
+                <a16:creationId xmlns:a16="http://schemas.microsoft.com/office/drawing/2014/main" id="{54B1DD26-7E89-861D-713B-1933176E2878}"/>
+              </a:ext>
+            </a:extLst>
+          </p:cNvPr>
+          <p:cNvSpPr txBox="1"/>
+          <p:nvPr/>
+        </p:nvSpPr>
+        <p:spPr>
+          <a:xfrm>
+            <a:off x="711200" y="850900"/>
+            <a:ext cx="10668000" cy="446276"/>
+          </a:xfrm>
+          <a:prstGeom prst="rect">
+            <a:avLst/>
+          </a:prstGeom>
+          <a:noFill/>
+        </p:spPr>
+        <p:txBody>
+          <a:bodyPr vert="horz" wrap="square" lIns="0" tIns="0" rIns="0" bIns="0" rtlCol="0">
+            <a:spAutoFit/>
+          </a:bodyPr>
+          <a:lstStyle/>
+          <a:p>
+            <a:r>
+              <a:rPr lang="en-US" sz="2900" b="1">
+                <a:solidFill>
+                  <a:srgbClr val="1A302A"/>
+                </a:solidFill>
+                <a:latin typeface="Aptos Display" panose="020B0004020202020204" pitchFamily="34" charset="0"/>
+              </a:rPr>
+              <a:t>A practice room with problems to find</a:t>
+            </a:r>
+          </a:p>
+        </p:txBody>
+      </p:sp>
+      <p:sp>
+        <p:nvSpPr>
+          <p:cNvPr id="6" name="TextBox 5">
+            <a:extLst>
+              <a:ext uri="{FF2B5EF4-FFF2-40B4-BE49-F238E27FC236}">
+                <a16:creationId xmlns:a16="http://schemas.microsoft.com/office/drawing/2014/main" id="{4E04C44F-3508-A5D1-D715-C61436A6E0C3}"/>
+              </a:ext>
+            </a:extLst>
+          </p:cNvPr>
+          <p:cNvSpPr txBox="1"/>
+          <p:nvPr/>
+        </p:nvSpPr>
+        <p:spPr>
+          <a:xfrm>
+            <a:off x="736600" y="1511300"/>
+            <a:ext cx="10414000" cy="215444"/>
+          </a:xfrm>
+          <a:prstGeom prst="rect">
+            <a:avLst/>
+          </a:prstGeom>
+          <a:noFill/>
+        </p:spPr>
+        <p:txBody>
+          <a:bodyPr vert="horz" wrap="square" lIns="0" tIns="0" rIns="0" bIns="0" rtlCol="0">
+            <a:spAutoFit/>
+          </a:bodyPr>
+          <a:lstStyle/>
+          <a:p>
+            <a:r>
+              <a:rPr lang="en-US" sz="1400">
+                <a:solidFill>
+                  <a:srgbClr val="55645D"/>
+                </a:solidFill>
+                <a:latin typeface="Aptos" panose="020B0004020202020204" pitchFamily="34" charset="0"/>
+              </a:rPr>
+              <a:t>Assets/Scenes/ComfortReviewSample.unity  |  starter checks seeded and report verified in Unity 2022.3.62f3</a:t>
+            </a:r>
+          </a:p>
+        </p:txBody>
+      </p:sp>
+      <p:sp>
+        <p:nvSpPr>
+          <p:cNvPr id="15" name="Rectangle 14">
+            <a:extLst>
+              <a:ext uri="{FF2B5EF4-FFF2-40B4-BE49-F238E27FC236}">
+                <a16:creationId xmlns:a16="http://schemas.microsoft.com/office/drawing/2014/main" id="{82072329-E1F5-21C6-2E4F-D9BA33A49AF5}"/>
+              </a:ext>
+            </a:extLst>
+          </p:cNvPr>
+          <p:cNvSpPr/>
+          <p:nvPr/>
+        </p:nvSpPr>
+        <p:spPr>
+          <a:xfrm>
+            <a:off x="609600" y="6350000"/>
+            <a:ext cx="10972800" cy="12700"/>
+          </a:xfrm>
+          <a:prstGeom prst="rect">
+            <a:avLst/>
+          </a:prstGeom>
+          <a:solidFill>
+            <a:srgbClr val="D5DCD6"/>
+          </a:solidFill>
+          <a:ln w="19050" cap="flat" cmpd="sng" algn="ctr">
+            <a:noFill/>
+            <a:prstDash val="solid"/>
+            <a:miter lim="800000"/>
+          </a:ln>
+          <a:effectLst/>
+          <a:extLst>
+            <a:ext uri="{91240B29-F687-4F45-9708-019B960494DF}">
+              <a14:hiddenLine xmlns:a14="http://schemas.microsoft.com/office/drawing/2010/main" w="19050" cap="flat" cmpd="sng" algn="ctr">
+                <a:solidFill>
+                  <a:schemeClr val="accent1">
+                    <a:shade val="15000"/>
+                  </a:schemeClr>
+                </a:solidFill>
+                <a:prstDash val="solid"/>
+                <a:miter lim="800000"/>
+              </a14:hiddenLine>
+            </a:ext>
+          </a:extLst>
+        </p:spPr>
+        <p:style>
+          <a:lnRef idx="2">
+            <a:schemeClr val="accent1">
+              <a:shade val="15000"/>
+            </a:schemeClr>
+          </a:lnRef>
+          <a:fillRef idx="1">
+            <a:schemeClr val="accent1"/>
+          </a:fillRef>
+          <a:effectRef idx="0">
+            <a:schemeClr val="accent1"/>
+          </a:effectRef>
+          <a:fontRef idx="minor">
+            <a:schemeClr val="lt1"/>
+          </a:fontRef>
+        </p:style>
+        <p:txBody>
+          <a:bodyPr rtlCol="0" anchor="ctr"/>
+          <a:lstStyle/>
+          <a:p>
+            <a:pPr algn="ctr"/>
+            <a:endParaRPr lang="en-US"/>
+          </a:p>
+        </p:txBody>
+      </p:sp>
+      <p:sp>
+        <p:nvSpPr>
+          <p:cNvPr id="16" name="TextBox 15">
+            <a:extLst>
+              <a:ext uri="{FF2B5EF4-FFF2-40B4-BE49-F238E27FC236}">
+                <a16:creationId xmlns:a16="http://schemas.microsoft.com/office/drawing/2014/main" id="{219A8351-6C1B-8009-F4F2-E05DAE250D59}"/>
+              </a:ext>
+            </a:extLst>
+          </p:cNvPr>
+          <p:cNvSpPr txBox="1"/>
+          <p:nvPr/>
+        </p:nvSpPr>
+        <p:spPr>
+          <a:xfrm>
+            <a:off x="609600" y="6489700"/>
+            <a:ext cx="8890000" cy="138499"/>
+          </a:xfrm>
+          <a:prstGeom prst="rect">
+            <a:avLst/>
+          </a:prstGeom>
+          <a:noFill/>
+        </p:spPr>
+        <p:txBody>
+          <a:bodyPr vert="horz" wrap="square" lIns="0" tIns="0" rIns="0" bIns="0" rtlCol="0">
+            <a:spAutoFit/>
+          </a:bodyPr>
+          <a:lstStyle/>
+          <a:p>
+            <a:r>
+              <a:rPr lang="en-US" sz="900" b="1">
+                <a:solidFill>
+                  <a:srgbClr val="55645D"/>
+                </a:solidFill>
+                <a:latin typeface="Aptos" panose="020B0004020202020204" pitchFamily="34" charset="0"/>
+              </a:rPr>
+              <a:t>CIST 1423  /  UNITY XR LABS</a:t>
+            </a:r>
+          </a:p>
+        </p:txBody>
+      </p:sp>
+      <p:sp>
+        <p:nvSpPr>
+          <p:cNvPr id="17" name="TextBox 16">
+            <a:extLst>
+              <a:ext uri="{FF2B5EF4-FFF2-40B4-BE49-F238E27FC236}">
+                <a16:creationId xmlns:a16="http://schemas.microsoft.com/office/drawing/2014/main" id="{514EB5D0-C3DD-77D6-DF99-37EA3EA0BA50}"/>
+              </a:ext>
+            </a:extLst>
+          </p:cNvPr>
+          <p:cNvSpPr txBox="1"/>
+          <p:nvPr/>
+        </p:nvSpPr>
+        <p:spPr>
+          <a:xfrm>
+            <a:off x="10985500" y="6451600"/>
+            <a:ext cx="571500" cy="169277"/>
+          </a:xfrm>
+          <a:prstGeom prst="rect">
+            <a:avLst/>
+          </a:prstGeom>
+          <a:noFill/>
+        </p:spPr>
+        <p:txBody>
+          <a:bodyPr vert="horz" wrap="square" lIns="0" tIns="0" rIns="0" bIns="0" rtlCol="0">
+            <a:spAutoFit/>
+          </a:bodyPr>
+          <a:lstStyle/>
+          <a:p>
+            <a:r>
+              <a:rPr lang="en-US" sz="1100" b="1">
+                <a:solidFill>
+                  <a:srgbClr val="55645D"/>
+                </a:solidFill>
+                <a:latin typeface="Aptos Display" panose="020B0004020202020204" pitchFamily="34" charset="0"/>
+              </a:rPr>
+              <a:t>12</a:t>
+            </a:r>
+          </a:p>
+        </p:txBody>
+      </p:sp>
+      <p:pic>
+        <p:nvPicPr>
+          <p:cNvPr id="19" name="Screenshot 1" descr="Screenshot 1">
+            <a:extLst>
+              <a:ext uri="{FF2B5EF4-FFF2-40B4-BE49-F238E27FC236}">
+                <a16:creationId xmlns:a16="http://schemas.microsoft.com/office/drawing/2014/main" id="{AC9F61E9-DF46-D952-79A5-943E4CF673EF}"/>
+              </a:ext>
+            </a:extLst>
+          </p:cNvPr>
+          <p:cNvPicPr>
+            <a:picLocks/>
+          </p:cNvPicPr>
+          <p:nvPr/>
+        </p:nvPicPr>
+        <p:blipFill>
+          <a:blip r:embed="rId2">
+            <a:extLst>
+              <a:ext uri="{28A0092B-C50C-407E-A947-70E740481C1C}">
+                <a14:useLocalDpi xmlns:a14="http://schemas.microsoft.com/office/drawing/2010/main" val="0"/>
+              </a:ext>
+            </a:extLst>
+          </a:blip>
+          <a:stretch>
+            <a:fillRect/>
+          </a:stretch>
+        </p:blipFill>
+        <p:spPr>
+          <a:xfrm>
+            <a:off x="711200" y="2133600"/>
+            <a:ext cx="5334000" cy="3000375"/>
+          </a:xfrm>
+          <a:prstGeom prst="rect">
+            <a:avLst/>
+          </a:prstGeom>
+          <a:ln w="9525">
+            <a:solidFill>
+              <a:srgbClr val="D5DCD6"/>
+            </a:solidFill>
+          </a:ln>
+        </p:spPr>
+      </p:pic>
+      <p:sp>
+        <p:nvSpPr>
+          <p:cNvPr id="20" name="Caption 1">
+            <a:extLst>
+              <a:ext uri="{FF2B5EF4-FFF2-40B4-BE49-F238E27FC236}">
+                <a16:creationId xmlns:a16="http://schemas.microsoft.com/office/drawing/2014/main" id="{23B62349-1AB1-86F4-2BDE-DCC3639CB5C1}"/>
+              </a:ext>
+            </a:extLst>
+          </p:cNvPr>
+          <p:cNvSpPr txBox="1"/>
+          <p:nvPr/>
+        </p:nvSpPr>
+        <p:spPr>
+          <a:xfrm>
+            <a:off x="711200" y="5257800"/>
+            <a:ext cx="5334000" cy="369332"/>
+          </a:xfrm>
+          <a:prstGeom prst="rect">
+            <a:avLst/>
+          </a:prstGeom>
+          <a:noFill/>
+        </p:spPr>
+        <p:txBody>
+          <a:bodyPr vert="horz" wrap="square" lIns="0" tIns="0" rIns="0" bIns="0" rtlCol="0">
+            <a:noAutofit/>
+          </a:bodyPr>
+          <a:lstStyle/>
+          <a:p>
+            <a:r>
+              <a:rPr lang="en-US" sz="1100" b="1">
+                <a:solidFill>
+                  <a:srgbClr val="263A33"/>
+                </a:solidFill>
+                <a:latin typeface="Aptos" panose="020B0004020202020204" pitchFamily="34" charset="0"/>
+              </a:rPr>
+              <a:t>Practice room.</a:t>
+            </a:r>
+            <a:r>
+              <a:rPr lang="en-US" sz="1100">
+                <a:solidFill>
+                  <a:srgbClr val="55645D"/>
+                </a:solidFill>
+                <a:latin typeface="Aptos" panose="020B0004020202020204" pitchFamily="34" charset="0"/>
+              </a:rPr>
+              <a:t> A task label, a shelf item at 2.2 m, and an exit sign too small to read from the start point.</a:t>
+            </a:r>
+          </a:p>
+        </p:txBody>
+      </p:sp>
+      <p:pic>
+        <p:nvPicPr>
+          <p:cNvPr id="22" name="Screenshot 2" descr="Screenshot 2">
+            <a:extLst>
+              <a:ext uri="{FF2B5EF4-FFF2-40B4-BE49-F238E27FC236}">
+                <a16:creationId xmlns:a16="http://schemas.microsoft.com/office/drawing/2014/main" id="{062F33C8-CBCA-0DEA-E20C-DC32B1CE2CED}"/>
+              </a:ext>
+            </a:extLst>
+          </p:cNvPr>
+          <p:cNvPicPr>
+            <a:picLocks/>
+          </p:cNvPicPr>
+          <p:nvPr/>
+        </p:nvPicPr>
+        <p:blipFill>
+          <a:blip r:embed="rId3">
+            <a:extLst>
+              <a:ext uri="{28A0092B-C50C-407E-A947-70E740481C1C}">
+                <a14:useLocalDpi xmlns:a14="http://schemas.microsoft.com/office/drawing/2010/main" val="0"/>
+              </a:ext>
+            </a:extLst>
+          </a:blip>
+          <a:stretch>
+            <a:fillRect/>
+          </a:stretch>
+        </p:blipFill>
+        <p:spPr>
+          <a:xfrm>
+            <a:off x="6350000" y="2133600"/>
+            <a:ext cx="2021840" cy="3302000"/>
+          </a:xfrm>
+          <a:prstGeom prst="rect">
+            <a:avLst/>
+          </a:prstGeom>
+          <a:ln w="9525">
+            <a:solidFill>
+              <a:srgbClr val="D5DCD6"/>
+            </a:solidFill>
+          </a:ln>
+        </p:spPr>
+      </p:pic>
+      <p:sp>
+        <p:nvSpPr>
+          <p:cNvPr id="23" name="Caption 2">
+            <a:extLst>
+              <a:ext uri="{FF2B5EF4-FFF2-40B4-BE49-F238E27FC236}">
+                <a16:creationId xmlns:a16="http://schemas.microsoft.com/office/drawing/2014/main" id="{7F053E84-324F-2DC9-DEC0-D40281183739}"/>
+              </a:ext>
+            </a:extLst>
+          </p:cNvPr>
+          <p:cNvSpPr txBox="1"/>
+          <p:nvPr/>
+        </p:nvSpPr>
+        <p:spPr>
+          <a:xfrm>
+            <a:off x="6350000" y="5562600"/>
+            <a:ext cx="2019300" cy="369332"/>
+          </a:xfrm>
+          <a:prstGeom prst="rect">
+            <a:avLst/>
+          </a:prstGeom>
+          <a:noFill/>
+        </p:spPr>
+        <p:txBody>
+          <a:bodyPr vert="horz" wrap="square" lIns="0" tIns="0" rIns="0" bIns="0" rtlCol="0">
+            <a:noAutofit/>
+          </a:bodyPr>
+          <a:lstStyle/>
+          <a:p>
+            <a:r>
+              <a:rPr lang="en-US" sz="1100" b="1">
+                <a:solidFill>
+                  <a:srgbClr val="263A33"/>
+                </a:solidFill>
+                <a:latin typeface="Aptos" panose="020B0004020202020204" pitchFamily="34" charset="0"/>
+              </a:rPr>
+              <a:t>Inspector.</a:t>
+            </a:r>
+            <a:r>
+              <a:rPr lang="en-US" sz="1100">
+                <a:solidFill>
+                  <a:srgbClr val="55645D"/>
+                </a:solidFill>
+                <a:latin typeface="Aptos" panose="020B0004020202020204" pitchFamily="34" charset="0"/>
+              </a:rPr>
+              <a:t> Starter checks with example statuses and evidence.</a:t>
+            </a:r>
+          </a:p>
+        </p:txBody>
+      </p:sp>
+      <p:pic>
+        <p:nvPicPr>
+          <p:cNvPr id="25" name="Screenshot 3" descr="Screenshot 3">
+            <a:extLst>
+              <a:ext uri="{FF2B5EF4-FFF2-40B4-BE49-F238E27FC236}">
+                <a16:creationId xmlns:a16="http://schemas.microsoft.com/office/drawing/2014/main" id="{18F849E8-E25B-C14B-1DC3-97C109013FF4}"/>
+              </a:ext>
+            </a:extLst>
+          </p:cNvPr>
+          <p:cNvPicPr>
+            <a:picLocks/>
+          </p:cNvPicPr>
+          <p:nvPr/>
+        </p:nvPicPr>
+        <p:blipFill>
+          <a:blip r:embed="rId4">
+            <a:extLst>
+              <a:ext uri="{28A0092B-C50C-407E-A947-70E740481C1C}">
+                <a14:useLocalDpi xmlns:a14="http://schemas.microsoft.com/office/drawing/2010/main" val="0"/>
+              </a:ext>
+            </a:extLst>
+          </a:blip>
+          <a:stretch>
+            <a:fillRect/>
+          </a:stretch>
+        </p:blipFill>
+        <p:spPr>
+          <a:xfrm>
+            <a:off x="8674100" y="2133600"/>
+            <a:ext cx="2806700" cy="1795780"/>
+          </a:xfrm>
+          <a:prstGeom prst="rect">
+            <a:avLst/>
+          </a:prstGeom>
+          <a:ln w="9525">
+            <a:solidFill>
+              <a:srgbClr val="D5DCD6"/>
+            </a:solidFill>
+          </a:ln>
+        </p:spPr>
+      </p:pic>
+      <p:sp>
+        <p:nvSpPr>
+          <p:cNvPr id="26" name="Caption 3">
+            <a:extLst>
+              <a:ext uri="{FF2B5EF4-FFF2-40B4-BE49-F238E27FC236}">
+                <a16:creationId xmlns:a16="http://schemas.microsoft.com/office/drawing/2014/main" id="{0223F18F-BC1D-2D2A-8329-4C6E1DC06DFA}"/>
+              </a:ext>
+            </a:extLst>
+          </p:cNvPr>
+          <p:cNvSpPr txBox="1"/>
+          <p:nvPr/>
+        </p:nvSpPr>
+        <p:spPr>
+          <a:xfrm>
+            <a:off x="8674100" y="4051300"/>
+            <a:ext cx="2806700" cy="369332"/>
+          </a:xfrm>
+          <a:prstGeom prst="rect">
+            <a:avLst/>
+          </a:prstGeom>
+          <a:noFill/>
+        </p:spPr>
+        <p:txBody>
+          <a:bodyPr vert="horz" wrap="square" lIns="0" tIns="0" rIns="0" bIns="0" rtlCol="0">
+            <a:noAutofit/>
+          </a:bodyPr>
+          <a:lstStyle/>
+          <a:p>
+            <a:r>
+              <a:rPr lang="en-US" sz="1100" b="1">
+                <a:solidFill>
+                  <a:srgbClr val="263A33"/>
+                </a:solidFill>
+                <a:latin typeface="Aptos" panose="020B0004020202020204" pitchFamily="34" charset="0"/>
+              </a:rPr>
+              <a:t>Printed report.</a:t>
+            </a:r>
+            <a:r>
+              <a:rPr lang="en-US" sz="1100">
+                <a:solidFill>
+                  <a:srgbClr val="55645D"/>
+                </a:solidFill>
+                <a:latin typeface="Aptos" panose="020B0004020202020204" pitchFamily="34" charset="0"/>
+              </a:rPr>
+              <a:t> Example run: Pass 2, Needs Work 2, N/A 1, Not Run 2.</a:t>
+            </a:r>
+          </a:p>
+        </p:txBody>
+      </p:sp>
+    </p:spTree>
+    <p:extLst>
+      <p:ext uri="{BB962C8B-B14F-4D97-AF65-F5344CB8AC3E}">
+        <p14:creationId xmlns:p14="http://schemas.microsoft.com/office/powerpoint/2010/main" val="2987345153"/>
+      </p:ext>
+    </p:extLst>
+  </p:cSld>
+  <p:clrMapOvr>
+    <a:masterClrMapping/>
+  </p:clrMapOvr>
+</p:sld>
+</file>
+
+<file path=ppt/slides/slide13.xml><?xml version="1.0" encoding="utf-8"?>
+<p:sld xmlns:a="http://schemas.openxmlformats.org/drawingml/2006/main" xmlns:r="http://schemas.openxmlformats.org/officeDocument/2006/relationships" xmlns:p="http://schemas.openxmlformats.org/presentationml/2006/main">
+  <p:cSld>
+    <p:spTree>
+      <p:nvGrpSpPr>
+        <p:cNvPr id="1" name=""/>
+        <p:cNvGrpSpPr/>
+        <p:nvPr/>
+      </p:nvGrpSpPr>
+      <p:grpSpPr>
+        <a:xfrm>
+          <a:off x="0" y="0"/>
+          <a:ext cx="0" cy="0"/>
+          <a:chOff x="0" y="0"/>
+          <a:chExt cx="0" cy="0"/>
+        </a:xfrm>
+      </p:grpSpPr>
+      <p:sp>
+        <p:nvSpPr>
+          <p:cNvPr id="2" name="Rectangle 1">
+            <a:extLst>
+              <a:ext uri="{FF2B5EF4-FFF2-40B4-BE49-F238E27FC236}">
+                <a16:creationId xmlns:a16="http://schemas.microsoft.com/office/drawing/2014/main" id="{02FB3057-8C73-2048-BA1C-AF2594F3972E}"/>
+              </a:ext>
+            </a:extLst>
+          </p:cNvPr>
+          <p:cNvSpPr/>
+          <p:nvPr/>
+        </p:nvSpPr>
+        <p:spPr>
+          <a:xfrm>
+            <a:off x="0" y="0"/>
+            <a:ext cx="12192000" cy="6858000"/>
+          </a:xfrm>
+          <a:prstGeom prst="rect">
+            <a:avLst/>
+          </a:prstGeom>
+          <a:solidFill>
+            <a:srgbClr val="173C35"/>
+          </a:solidFill>
+          <a:ln w="19050" cap="flat" cmpd="sng" algn="ctr">
+            <a:noFill/>
+            <a:prstDash val="solid"/>
+            <a:miter lim="800000"/>
+          </a:ln>
+          <a:effectLst/>
+          <a:extLst>
+            <a:ext uri="{91240B29-F687-4F45-9708-019B960494DF}">
+              <a14:hiddenLine xmlns:a14="http://schemas.microsoft.com/office/drawing/2010/main" w="19050" cap="flat" cmpd="sng" algn="ctr">
+                <a:solidFill>
+                  <a:schemeClr val="accent1">
+                    <a:shade val="15000"/>
+                  </a:schemeClr>
+                </a:solidFill>
+                <a:prstDash val="solid"/>
+                <a:miter lim="800000"/>
+              </a14:hiddenLine>
+            </a:ext>
+          </a:extLst>
+        </p:spPr>
+        <p:style>
+          <a:lnRef idx="2">
+            <a:schemeClr val="accent1">
+              <a:shade val="15000"/>
+            </a:schemeClr>
+          </a:lnRef>
+          <a:fillRef idx="1">
+            <a:schemeClr val="accent1"/>
+          </a:fillRef>
+          <a:effectRef idx="0">
+            <a:schemeClr val="accent1"/>
+          </a:effectRef>
+          <a:fontRef idx="minor">
+            <a:schemeClr val="lt1"/>
+          </a:fontRef>
+        </p:style>
+        <p:txBody>
+          <a:bodyPr rtlCol="0" anchor="ctr"/>
+          <a:lstStyle/>
+          <a:p>
+            <a:pPr algn="ctr"/>
+            <a:endParaRPr lang="en-US"/>
+          </a:p>
+        </p:txBody>
+      </p:sp>
+      <p:sp>
+        <p:nvSpPr>
+          <p:cNvPr id="3" name="TextBox 2">
+            <a:extLst>
+              <a:ext uri="{FF2B5EF4-FFF2-40B4-BE49-F238E27FC236}">
+                <a16:creationId xmlns:a16="http://schemas.microsoft.com/office/drawing/2014/main" id="{BC198F79-6EBE-9150-5862-F169615CB3A8}"/>
+              </a:ext>
+            </a:extLst>
+          </p:cNvPr>
+          <p:cNvSpPr txBox="1"/>
+          <p:nvPr/>
+        </p:nvSpPr>
+        <p:spPr>
+          <a:xfrm>
+            <a:off x="736600" y="546100"/>
+            <a:ext cx="10414000" cy="169277"/>
+          </a:xfrm>
+          <a:prstGeom prst="rect">
+            <a:avLst/>
+          </a:prstGeom>
+          <a:noFill/>
+        </p:spPr>
+        <p:txBody>
+          <a:bodyPr vert="horz" wrap="square" lIns="0" tIns="0" rIns="0" bIns="0" rtlCol="0">
+            <a:spAutoFit/>
+          </a:bodyPr>
+          <a:lstStyle/>
+          <a:p>
+            <a:r>
+              <a:rPr lang="en-US" sz="1100" b="1">
+                <a:solidFill>
+                  <a:srgbClr val="F2C16D"/>
+                </a:solidFill>
+                <a:latin typeface="Aptos" panose="020B0004020202020204" pitchFamily="34" charset="0"/>
+              </a:rPr>
+              <a:t>THE FIVE PROJECTS, ONE PRACTICE</a:t>
+            </a:r>
+          </a:p>
+        </p:txBody>
+      </p:sp>
+      <p:sp>
+        <p:nvSpPr>
+          <p:cNvPr id="4" name="TextBox 3">
+            <a:extLst>
+              <a:ext uri="{FF2B5EF4-FFF2-40B4-BE49-F238E27FC236}">
+                <a16:creationId xmlns:a16="http://schemas.microsoft.com/office/drawing/2014/main" id="{8C0AB4E9-FE8D-8C86-7E21-486D0B0829EC}"/>
+              </a:ext>
+            </a:extLst>
+          </p:cNvPr>
+          <p:cNvSpPr txBox="1"/>
+          <p:nvPr/>
+        </p:nvSpPr>
+        <p:spPr>
+          <a:xfrm>
+            <a:off x="736600" y="1016000"/>
+            <a:ext cx="10414000" cy="523220"/>
+          </a:xfrm>
+          <a:prstGeom prst="rect">
+            <a:avLst/>
+          </a:prstGeom>
+          <a:noFill/>
+        </p:spPr>
+        <p:txBody>
+          <a:bodyPr vert="horz" wrap="square" lIns="0" tIns="0" rIns="0" bIns="0" rtlCol="0">
+            <a:spAutoFit/>
+          </a:bodyPr>
+          <a:lstStyle/>
+          <a:p>
+            <a:r>
+              <a:rPr lang="en-US" sz="3400" b="1">
+                <a:solidFill>
+                  <a:srgbClr val="FFFDF7"/>
+                </a:solidFill>
+                <a:latin typeface="Aptos Display" panose="020B0004020202020204" pitchFamily="34" charset="0"/>
+              </a:rPr>
+              <a:t>Make every claim testable.</a:t>
+            </a:r>
+          </a:p>
+        </p:txBody>
+      </p:sp>
+      <p:sp>
+        <p:nvSpPr>
+          <p:cNvPr id="5" name="TextBox 4">
+            <a:extLst>
+              <a:ext uri="{FF2B5EF4-FFF2-40B4-BE49-F238E27FC236}">
+                <a16:creationId xmlns:a16="http://schemas.microsoft.com/office/drawing/2014/main" id="{2CFB731E-26C7-1407-E84E-71C257626893}"/>
+              </a:ext>
+            </a:extLst>
+          </p:cNvPr>
+          <p:cNvSpPr txBox="1"/>
+          <p:nvPr/>
+        </p:nvSpPr>
+        <p:spPr>
+          <a:xfrm>
+            <a:off x="736600" y="1803400"/>
+            <a:ext cx="10414000" cy="246221"/>
+          </a:xfrm>
+          <a:prstGeom prst="rect">
+            <a:avLst/>
+          </a:prstGeom>
+          <a:noFill/>
+        </p:spPr>
+        <p:txBody>
+          <a:bodyPr vert="horz" wrap="square" lIns="0" tIns="0" rIns="0" bIns="0" rtlCol="0">
+            <a:spAutoFit/>
+          </a:bodyPr>
+          <a:lstStyle/>
+          <a:p>
+            <a:r>
+              <a:rPr lang="en-US" sz="1600">
+                <a:solidFill>
+                  <a:srgbClr val="C8D8D0"/>
+                </a:solidFill>
+                <a:latin typeface="Aptos" panose="020B0004020202020204" pitchFamily="34" charset="0"/>
+              </a:rPr>
+              <a:t>The sequence moves from authored interaction to device-aware validation and collaborative review.</a:t>
+            </a:r>
+          </a:p>
+        </p:txBody>
+      </p:sp>
+      <p:sp>
+        <p:nvSpPr>
+          <p:cNvPr id="6" name="Rectangle 5">
+            <a:extLst>
+              <a:ext uri="{FF2B5EF4-FFF2-40B4-BE49-F238E27FC236}">
+                <a16:creationId xmlns:a16="http://schemas.microsoft.com/office/drawing/2014/main" id="{0165A2E7-5C2C-25D8-3242-326986C09E33}"/>
+              </a:ext>
+            </a:extLst>
+          </p:cNvPr>
+          <p:cNvSpPr/>
+          <p:nvPr/>
+        </p:nvSpPr>
+        <p:spPr>
+          <a:xfrm>
+            <a:off x="787400" y="2717800"/>
+            <a:ext cx="10566400" cy="558800"/>
+          </a:xfrm>
+          <a:prstGeom prst="rect">
+            <a:avLst/>
+          </a:prstGeom>
+          <a:solidFill>
+            <a:srgbClr val="224B42"/>
+          </a:solidFill>
+          <a:ln w="19050" cap="flat" cmpd="sng" algn="ctr">
+            <a:noFill/>
+            <a:prstDash val="solid"/>
+            <a:miter lim="800000"/>
+          </a:ln>
+          <a:effectLst/>
+          <a:extLst>
+            <a:ext uri="{91240B29-F687-4F45-9708-019B960494DF}">
+              <a14:hiddenLine xmlns:a14="http://schemas.microsoft.com/office/drawing/2010/main" w="19050" cap="flat" cmpd="sng" algn="ctr">
+                <a:solidFill>
+                  <a:schemeClr val="accent1">
+                    <a:shade val="15000"/>
+                  </a:schemeClr>
+                </a:solidFill>
+                <a:prstDash val="solid"/>
+                <a:miter lim="800000"/>
+              </a14:hiddenLine>
+            </a:ext>
+          </a:extLst>
+        </p:spPr>
+        <p:style>
+          <a:lnRef idx="2">
+            <a:schemeClr val="accent1">
+              <a:shade val="15000"/>
+            </a:schemeClr>
+          </a:lnRef>
+          <a:fillRef idx="1">
+            <a:schemeClr val="accent1"/>
+          </a:fillRef>
+          <a:effectRef idx="0">
+            <a:schemeClr val="accent1"/>
+          </a:effectRef>
+          <a:fontRef idx="minor">
+            <a:schemeClr val="lt1"/>
+          </a:fontRef>
+        </p:style>
+        <p:txBody>
+          <a:bodyPr rtlCol="0" anchor="ctr"/>
+          <a:lstStyle/>
+          <a:p>
+            <a:pPr algn="ctr"/>
+            <a:endParaRPr lang="en-US"/>
+          </a:p>
+        </p:txBody>
+      </p:sp>
+      <p:sp>
+        <p:nvSpPr>
+          <p:cNvPr id="7" name="Rectangle 6">
+            <a:extLst>
+              <a:ext uri="{FF2B5EF4-FFF2-40B4-BE49-F238E27FC236}">
+                <a16:creationId xmlns:a16="http://schemas.microsoft.com/office/drawing/2014/main" id="{5886E5CC-8A1D-DF1B-4E5B-CF4AD17076C5}"/>
+              </a:ext>
+            </a:extLst>
+          </p:cNvPr>
+          <p:cNvSpPr/>
+          <p:nvPr/>
+        </p:nvSpPr>
+        <p:spPr>
+          <a:xfrm>
+            <a:off x="787400" y="2717800"/>
+            <a:ext cx="685800" cy="558800"/>
+          </a:xfrm>
+          <a:prstGeom prst="rect">
+            <a:avLst/>
+          </a:prstGeom>
+          <a:solidFill>
+            <a:srgbClr val="E46F4F"/>
+          </a:solidFill>
+          <a:ln w="19050" cap="flat" cmpd="sng" algn="ctr">
+            <a:noFill/>
+            <a:prstDash val="solid"/>
+            <a:miter lim="800000"/>
+          </a:ln>
+          <a:effectLst/>
+          <a:extLst>
+            <a:ext uri="{91240B29-F687-4F45-9708-019B960494DF}">
+              <a14:hiddenLine xmlns:a14="http://schemas.microsoft.com/office/drawing/2010/main" w="19050" cap="flat" cmpd="sng" algn="ctr">
+                <a:solidFill>
+                  <a:schemeClr val="accent1">
+                    <a:shade val="15000"/>
+                  </a:schemeClr>
+                </a:solidFill>
+                <a:prstDash val="solid"/>
+                <a:miter lim="800000"/>
+              </a14:hiddenLine>
+            </a:ext>
+          </a:extLst>
+        </p:spPr>
+        <p:style>
+          <a:lnRef idx="2">
+            <a:schemeClr val="accent1">
+              <a:shade val="15000"/>
+            </a:schemeClr>
+          </a:lnRef>
+          <a:fillRef idx="1">
+            <a:schemeClr val="accent1"/>
+          </a:fillRef>
+          <a:effectRef idx="0">
+            <a:schemeClr val="accent1"/>
+          </a:effectRef>
+          <a:fontRef idx="minor">
+            <a:schemeClr val="lt1"/>
+          </a:fontRef>
+        </p:style>
+        <p:txBody>
+          <a:bodyPr rtlCol="0" anchor="ctr"/>
+          <a:lstStyle/>
+          <a:p>
+            <a:pPr algn="ctr"/>
+            <a:endParaRPr lang="en-US"/>
+          </a:p>
+        </p:txBody>
+      </p:sp>
+      <p:sp>
+        <p:nvSpPr>
+          <p:cNvPr id="8" name="TextBox 7">
+            <a:extLst>
+              <a:ext uri="{FF2B5EF4-FFF2-40B4-BE49-F238E27FC236}">
+                <a16:creationId xmlns:a16="http://schemas.microsoft.com/office/drawing/2014/main" id="{F68B3960-6F61-7F5F-69FC-DDDF5CE75EBC}"/>
+              </a:ext>
+            </a:extLst>
+          </p:cNvPr>
+          <p:cNvSpPr txBox="1"/>
+          <p:nvPr/>
+        </p:nvSpPr>
+        <p:spPr>
+          <a:xfrm>
+            <a:off x="965200" y="2882900"/>
+            <a:ext cx="457200" cy="184666"/>
+          </a:xfrm>
+          <a:prstGeom prst="rect">
+            <a:avLst/>
+          </a:prstGeom>
+          <a:noFill/>
+        </p:spPr>
+        <p:txBody>
+          <a:bodyPr vert="horz" wrap="square" lIns="0" tIns="0" rIns="0" bIns="0" rtlCol="0">
+            <a:spAutoFit/>
+          </a:bodyPr>
+          <a:lstStyle/>
+          <a:p>
+            <a:r>
+              <a:rPr lang="en-US" sz="1200" b="1">
+                <a:solidFill>
+                  <a:srgbClr val="FFFFFF"/>
+                </a:solidFill>
+                <a:latin typeface="Aptos" panose="020B0004020202020204" pitchFamily="34" charset="0"/>
+              </a:rPr>
+              <a:t>09</a:t>
+            </a:r>
+          </a:p>
+        </p:txBody>
+      </p:sp>
+      <p:sp>
+        <p:nvSpPr>
+          <p:cNvPr id="9" name="TextBox 8">
+            <a:extLst>
+              <a:ext uri="{FF2B5EF4-FFF2-40B4-BE49-F238E27FC236}">
+                <a16:creationId xmlns:a16="http://schemas.microsoft.com/office/drawing/2014/main" id="{A78704E9-722B-8EEC-6BE0-FC686EBE7932}"/>
+              </a:ext>
+            </a:extLst>
+          </p:cNvPr>
+          <p:cNvSpPr txBox="1"/>
+          <p:nvPr/>
+        </p:nvSpPr>
+        <p:spPr>
+          <a:xfrm>
+            <a:off x="1727200" y="2857500"/>
+            <a:ext cx="7620000" cy="246221"/>
+          </a:xfrm>
+          <a:prstGeom prst="rect">
+            <a:avLst/>
+          </a:prstGeom>
+          <a:noFill/>
+        </p:spPr>
+        <p:txBody>
+          <a:bodyPr vert="horz" wrap="square" lIns="0" tIns="0" rIns="0" bIns="0" rtlCol="0">
+            <a:spAutoFit/>
+          </a:bodyPr>
+          <a:lstStyle/>
+          <a:p>
+            <a:r>
+              <a:rPr lang="en-US" sz="1600" b="1">
+                <a:solidFill>
+                  <a:srgbClr val="FFFFFF"/>
+                </a:solidFill>
+                <a:latin typeface="Aptos" panose="020B0004020202020204" pitchFamily="34" charset="0"/>
+              </a:rPr>
+              <a:t>Input and event paths</a:t>
+            </a:r>
+          </a:p>
+        </p:txBody>
+      </p:sp>
+      <p:sp>
+        <p:nvSpPr>
+          <p:cNvPr id="10" name="Rectangle 9">
+            <a:extLst>
+              <a:ext uri="{FF2B5EF4-FFF2-40B4-BE49-F238E27FC236}">
+                <a16:creationId xmlns:a16="http://schemas.microsoft.com/office/drawing/2014/main" id="{AFCBFC2D-FE36-8EF7-3C64-DA87FA60BD8A}"/>
+              </a:ext>
+            </a:extLst>
+          </p:cNvPr>
+          <p:cNvSpPr/>
+          <p:nvPr/>
+        </p:nvSpPr>
+        <p:spPr>
+          <a:xfrm>
+            <a:off x="787400" y="3378200"/>
+            <a:ext cx="10566400" cy="558800"/>
+          </a:xfrm>
+          <a:prstGeom prst="rect">
+            <a:avLst/>
+          </a:prstGeom>
+          <a:solidFill>
+            <a:srgbClr val="224B42"/>
+          </a:solidFill>
+          <a:ln w="19050" cap="flat" cmpd="sng" algn="ctr">
+            <a:noFill/>
+            <a:prstDash val="solid"/>
+            <a:miter lim="800000"/>
+          </a:ln>
+          <a:effectLst/>
+          <a:extLst>
+            <a:ext uri="{91240B29-F687-4F45-9708-019B960494DF}">
+              <a14:hiddenLine xmlns:a14="http://schemas.microsoft.com/office/drawing/2010/main" w="19050" cap="flat" cmpd="sng" algn="ctr">
+                <a:solidFill>
+                  <a:schemeClr val="accent1">
+                    <a:shade val="15000"/>
+                  </a:schemeClr>
+                </a:solidFill>
+                <a:prstDash val="solid"/>
+                <a:miter lim="800000"/>
+              </a14:hiddenLine>
+            </a:ext>
+          </a:extLst>
+        </p:spPr>
+        <p:style>
+          <a:lnRef idx="2">
+            <a:schemeClr val="accent1">
+              <a:shade val="15000"/>
+            </a:schemeClr>
+          </a:lnRef>
+          <a:fillRef idx="1">
+            <a:schemeClr val="accent1"/>
+          </a:fillRef>
+          <a:effectRef idx="0">
+            <a:schemeClr val="accent1"/>
+          </a:effectRef>
+          <a:fontRef idx="minor">
+            <a:schemeClr val="lt1"/>
+          </a:fontRef>
+        </p:style>
+        <p:txBody>
+          <a:bodyPr rtlCol="0" anchor="ctr"/>
+          <a:lstStyle/>
+          <a:p>
+            <a:pPr algn="ctr"/>
+            <a:endParaRPr lang="en-US"/>
+          </a:p>
+        </p:txBody>
+      </p:sp>
+      <p:sp>
+        <p:nvSpPr>
+          <p:cNvPr id="11" name="Rectangle 10">
+            <a:extLst>
+              <a:ext uri="{FF2B5EF4-FFF2-40B4-BE49-F238E27FC236}">
+                <a16:creationId xmlns:a16="http://schemas.microsoft.com/office/drawing/2014/main" id="{952DEFC1-F51A-12E6-F258-F8DFE3C7A990}"/>
+              </a:ext>
+            </a:extLst>
+          </p:cNvPr>
+          <p:cNvSpPr/>
+          <p:nvPr/>
+        </p:nvSpPr>
+        <p:spPr>
+          <a:xfrm>
+            <a:off x="787400" y="3378200"/>
+            <a:ext cx="685800" cy="558800"/>
+          </a:xfrm>
+          <a:prstGeom prst="rect">
+            <a:avLst/>
+          </a:prstGeom>
+          <a:solidFill>
+            <a:srgbClr val="4C82A5"/>
+          </a:solidFill>
+          <a:ln w="19050" cap="flat" cmpd="sng" algn="ctr">
+            <a:noFill/>
+            <a:prstDash val="solid"/>
+            <a:miter lim="800000"/>
+          </a:ln>
+          <a:effectLst/>
+          <a:extLst>
+            <a:ext uri="{91240B29-F687-4F45-9708-019B960494DF}">
+              <a14:hiddenLine xmlns:a14="http://schemas.microsoft.com/office/drawing/2010/main" w="19050" cap="flat" cmpd="sng" algn="ctr">
+                <a:solidFill>
+                  <a:schemeClr val="accent1">
+                    <a:shade val="15000"/>
+                  </a:schemeClr>
+                </a:solidFill>
+                <a:prstDash val="solid"/>
+                <a:miter lim="800000"/>
+              </a14:hiddenLine>
+            </a:ext>
+          </a:extLst>
+        </p:spPr>
+        <p:style>
+          <a:lnRef idx="2">
+            <a:schemeClr val="accent1">
+              <a:shade val="15000"/>
+            </a:schemeClr>
+          </a:lnRef>
+          <a:fillRef idx="1">
+            <a:schemeClr val="accent1"/>
+          </a:fillRef>
+          <a:effectRef idx="0">
+            <a:schemeClr val="accent1"/>
+          </a:effectRef>
+          <a:fontRef idx="minor">
+            <a:schemeClr val="lt1"/>
+          </a:fontRef>
+        </p:style>
+        <p:txBody>
+          <a:bodyPr rtlCol="0" anchor="ctr"/>
+          <a:lstStyle/>
+          <a:p>
+            <a:pPr algn="ctr"/>
+            <a:endParaRPr lang="en-US"/>
+          </a:p>
+        </p:txBody>
+      </p:sp>
+      <p:sp>
+        <p:nvSpPr>
+          <p:cNvPr id="12" name="TextBox 11">
+            <a:extLst>
+              <a:ext uri="{FF2B5EF4-FFF2-40B4-BE49-F238E27FC236}">
+                <a16:creationId xmlns:a16="http://schemas.microsoft.com/office/drawing/2014/main" id="{6CF38A54-5D32-42E5-1E9C-D88F29C19C82}"/>
+              </a:ext>
+            </a:extLst>
+          </p:cNvPr>
+          <p:cNvSpPr txBox="1"/>
+          <p:nvPr/>
+        </p:nvSpPr>
+        <p:spPr>
+          <a:xfrm>
+            <a:off x="965200" y="3543300"/>
+            <a:ext cx="457200" cy="184666"/>
+          </a:xfrm>
+          <a:prstGeom prst="rect">
+            <a:avLst/>
+          </a:prstGeom>
+          <a:noFill/>
+        </p:spPr>
+        <p:txBody>
+          <a:bodyPr vert="horz" wrap="square" lIns="0" tIns="0" rIns="0" bIns="0" rtlCol="0">
+            <a:spAutoFit/>
+          </a:bodyPr>
+          <a:lstStyle/>
+          <a:p>
+            <a:r>
+              <a:rPr lang="en-US" sz="1200" b="1">
+                <a:solidFill>
+                  <a:srgbClr val="FFFFFF"/>
+                </a:solidFill>
+                <a:latin typeface="Aptos" panose="020B0004020202020204" pitchFamily="34" charset="0"/>
+              </a:rPr>
+              <a:t>10</a:t>
+            </a:r>
+          </a:p>
+        </p:txBody>
+      </p:sp>
+      <p:sp>
+        <p:nvSpPr>
+          <p:cNvPr id="13" name="TextBox 12">
+            <a:extLst>
+              <a:ext uri="{FF2B5EF4-FFF2-40B4-BE49-F238E27FC236}">
+                <a16:creationId xmlns:a16="http://schemas.microsoft.com/office/drawing/2014/main" id="{5E806FE0-FBC7-2CC5-4E36-2B7C62E7122A}"/>
+              </a:ext>
+            </a:extLst>
+          </p:cNvPr>
+          <p:cNvSpPr txBox="1"/>
+          <p:nvPr/>
+        </p:nvSpPr>
+        <p:spPr>
+          <a:xfrm>
+            <a:off x="1727200" y="3517900"/>
+            <a:ext cx="7620000" cy="246221"/>
+          </a:xfrm>
+          <a:prstGeom prst="rect">
+            <a:avLst/>
+          </a:prstGeom>
+          <a:noFill/>
+        </p:spPr>
+        <p:txBody>
+          <a:bodyPr vert="horz" wrap="square" lIns="0" tIns="0" rIns="0" bIns="0" rtlCol="0">
+            <a:spAutoFit/>
+          </a:bodyPr>
+          <a:lstStyle/>
+          <a:p>
+            <a:r>
+              <a:rPr lang="en-US" sz="1600" b="1">
+                <a:solidFill>
+                  <a:srgbClr val="FFFFFF"/>
+                </a:solidFill>
+                <a:latin typeface="Aptos" panose="020B0004020202020204" pitchFamily="34" charset="0"/>
+              </a:rPr>
+              <a:t>Placement and selection</a:t>
+            </a:r>
+          </a:p>
+        </p:txBody>
+      </p:sp>
+      <p:sp>
+        <p:nvSpPr>
+          <p:cNvPr id="14" name="Rectangle 13">
+            <a:extLst>
+              <a:ext uri="{FF2B5EF4-FFF2-40B4-BE49-F238E27FC236}">
+                <a16:creationId xmlns:a16="http://schemas.microsoft.com/office/drawing/2014/main" id="{08E21FD8-57F3-6BEE-D4AD-2C0096E3F4A7}"/>
+              </a:ext>
+            </a:extLst>
+          </p:cNvPr>
+          <p:cNvSpPr/>
+          <p:nvPr/>
+        </p:nvSpPr>
+        <p:spPr>
+          <a:xfrm>
+            <a:off x="787400" y="4038600"/>
+            <a:ext cx="10566400" cy="558800"/>
+          </a:xfrm>
+          <a:prstGeom prst="rect">
+            <a:avLst/>
+          </a:prstGeom>
+          <a:solidFill>
+            <a:srgbClr val="224B42"/>
+          </a:solidFill>
+          <a:ln w="19050" cap="flat" cmpd="sng" algn="ctr">
+            <a:noFill/>
+            <a:prstDash val="solid"/>
+            <a:miter lim="800000"/>
+          </a:ln>
+          <a:effectLst/>
+          <a:extLst>
+            <a:ext uri="{91240B29-F687-4F45-9708-019B960494DF}">
+              <a14:hiddenLine xmlns:a14="http://schemas.microsoft.com/office/drawing/2010/main" w="19050" cap="flat" cmpd="sng" algn="ctr">
+                <a:solidFill>
+                  <a:schemeClr val="accent1">
+                    <a:shade val="15000"/>
+                  </a:schemeClr>
+                </a:solidFill>
+                <a:prstDash val="solid"/>
+                <a:miter lim="800000"/>
+              </a14:hiddenLine>
+            </a:ext>
+          </a:extLst>
+        </p:spPr>
+        <p:style>
+          <a:lnRef idx="2">
+            <a:schemeClr val="accent1">
+              <a:shade val="15000"/>
+            </a:schemeClr>
+          </a:lnRef>
+          <a:fillRef idx="1">
+            <a:schemeClr val="accent1"/>
+          </a:fillRef>
+          <a:effectRef idx="0">
+            <a:schemeClr val="accent1"/>
+          </a:effectRef>
+          <a:fontRef idx="minor">
+            <a:schemeClr val="lt1"/>
+          </a:fontRef>
+        </p:style>
+        <p:txBody>
+          <a:bodyPr rtlCol="0" anchor="ctr"/>
+          <a:lstStyle/>
+          <a:p>
+            <a:pPr algn="ctr"/>
+            <a:endParaRPr lang="en-US"/>
+          </a:p>
+        </p:txBody>
+      </p:sp>
+      <p:sp>
+        <p:nvSpPr>
+          <p:cNvPr id="15" name="Rectangle 14">
+            <a:extLst>
+              <a:ext uri="{FF2B5EF4-FFF2-40B4-BE49-F238E27FC236}">
+                <a16:creationId xmlns:a16="http://schemas.microsoft.com/office/drawing/2014/main" id="{0D4DC3EF-C280-5726-1D1F-7B8EB4F94FA7}"/>
+              </a:ext>
+            </a:extLst>
+          </p:cNvPr>
+          <p:cNvSpPr/>
+          <p:nvPr/>
+        </p:nvSpPr>
+        <p:spPr>
+          <a:xfrm>
+            <a:off x="787400" y="4038600"/>
+            <a:ext cx="685800" cy="558800"/>
+          </a:xfrm>
+          <a:prstGeom prst="rect">
+            <a:avLst/>
+          </a:prstGeom>
+          <a:solidFill>
+            <a:srgbClr val="D49B2E"/>
+          </a:solidFill>
+          <a:ln w="19050" cap="flat" cmpd="sng" algn="ctr">
+            <a:noFill/>
+            <a:prstDash val="solid"/>
+            <a:miter lim="800000"/>
+          </a:ln>
+          <a:effectLst/>
+          <a:extLst>
+            <a:ext uri="{91240B29-F687-4F45-9708-019B960494DF}">
+              <a14:hiddenLine xmlns:a14="http://schemas.microsoft.com/office/drawing/2010/main" w="19050" cap="flat" cmpd="sng" algn="ctr">
+                <a:solidFill>
+                  <a:schemeClr val="accent1">
+                    <a:shade val="15000"/>
+                  </a:schemeClr>
+                </a:solidFill>
+                <a:prstDash val="solid"/>
+                <a:miter lim="800000"/>
+              </a14:hiddenLine>
+            </a:ext>
+          </a:extLst>
+        </p:spPr>
+        <p:style>
+          <a:lnRef idx="2">
+            <a:schemeClr val="accent1">
+              <a:shade val="15000"/>
+            </a:schemeClr>
+          </a:lnRef>
+          <a:fillRef idx="1">
+            <a:schemeClr val="accent1"/>
+          </a:fillRef>
+          <a:effectRef idx="0">
+            <a:schemeClr val="accent1"/>
+          </a:effectRef>
+          <a:fontRef idx="minor">
+            <a:schemeClr val="lt1"/>
+          </a:fontRef>
+        </p:style>
+        <p:txBody>
+          <a:bodyPr rtlCol="0" anchor="ctr"/>
+          <a:lstStyle/>
+          <a:p>
+            <a:pPr algn="ctr"/>
+            <a:endParaRPr lang="en-US"/>
+          </a:p>
+        </p:txBody>
+      </p:sp>
+      <p:sp>
+        <p:nvSpPr>
+          <p:cNvPr id="16" name="TextBox 15">
+            <a:extLst>
+              <a:ext uri="{FF2B5EF4-FFF2-40B4-BE49-F238E27FC236}">
+                <a16:creationId xmlns:a16="http://schemas.microsoft.com/office/drawing/2014/main" id="{810D118D-A928-45A8-057B-2E353B237A9F}"/>
+              </a:ext>
+            </a:extLst>
+          </p:cNvPr>
+          <p:cNvSpPr txBox="1"/>
+          <p:nvPr/>
+        </p:nvSpPr>
+        <p:spPr>
+          <a:xfrm>
+            <a:off x="965200" y="4203700"/>
+            <a:ext cx="457200" cy="184666"/>
+          </a:xfrm>
+          <a:prstGeom prst="rect">
+            <a:avLst/>
+          </a:prstGeom>
+          <a:noFill/>
+        </p:spPr>
+        <p:txBody>
+          <a:bodyPr vert="horz" wrap="square" lIns="0" tIns="0" rIns="0" bIns="0" rtlCol="0">
+            <a:spAutoFit/>
+          </a:bodyPr>
+          <a:lstStyle/>
+          <a:p>
+            <a:r>
+              <a:rPr lang="en-US" sz="1200" b="1">
+                <a:solidFill>
+                  <a:srgbClr val="FFFFFF"/>
+                </a:solidFill>
+                <a:latin typeface="Aptos" panose="020B0004020202020204" pitchFamily="34" charset="0"/>
+              </a:rPr>
+              <a:t>11</a:t>
+            </a:r>
+          </a:p>
+        </p:txBody>
+      </p:sp>
+      <p:sp>
+        <p:nvSpPr>
+          <p:cNvPr id="17" name="TextBox 16">
+            <a:extLst>
+              <a:ext uri="{FF2B5EF4-FFF2-40B4-BE49-F238E27FC236}">
+                <a16:creationId xmlns:a16="http://schemas.microsoft.com/office/drawing/2014/main" id="{C0BDAEF2-226D-313C-5AD3-1EB808994C21}"/>
+              </a:ext>
+            </a:extLst>
+          </p:cNvPr>
+          <p:cNvSpPr txBox="1"/>
+          <p:nvPr/>
+        </p:nvSpPr>
+        <p:spPr>
+          <a:xfrm>
+            <a:off x="1727200" y="4178300"/>
+            <a:ext cx="7620000" cy="246221"/>
+          </a:xfrm>
+          <a:prstGeom prst="rect">
+            <a:avLst/>
+          </a:prstGeom>
+          <a:noFill/>
+        </p:spPr>
+        <p:txBody>
+          <a:bodyPr vert="horz" wrap="square" lIns="0" tIns="0" rIns="0" bIns="0" rtlCol="0">
+            <a:spAutoFit/>
+          </a:bodyPr>
+          <a:lstStyle/>
+          <a:p>
+            <a:r>
+              <a:rPr lang="en-US" sz="1600" b="1">
+                <a:solidFill>
+                  <a:srgbClr val="FFFFFF"/>
+                </a:solidFill>
+                <a:latin typeface="Aptos" panose="020B0004020202020204" pitchFamily="34" charset="0"/>
+              </a:rPr>
+              <a:t>Spatial feedback</a:t>
+            </a:r>
+          </a:p>
+        </p:txBody>
+      </p:sp>
+      <p:sp>
+        <p:nvSpPr>
+          <p:cNvPr id="18" name="Rectangle 17">
+            <a:extLst>
+              <a:ext uri="{FF2B5EF4-FFF2-40B4-BE49-F238E27FC236}">
+                <a16:creationId xmlns:a16="http://schemas.microsoft.com/office/drawing/2014/main" id="{FA52DE8D-BC39-4204-82B4-C6F59A7799C4}"/>
+              </a:ext>
+            </a:extLst>
+          </p:cNvPr>
+          <p:cNvSpPr/>
+          <p:nvPr/>
+        </p:nvSpPr>
+        <p:spPr>
+          <a:xfrm>
+            <a:off x="787400" y="4699000"/>
+            <a:ext cx="10566400" cy="558800"/>
+          </a:xfrm>
+          <a:prstGeom prst="rect">
+            <a:avLst/>
+          </a:prstGeom>
+          <a:solidFill>
+            <a:srgbClr val="224B42"/>
+          </a:solidFill>
+          <a:ln w="19050" cap="flat" cmpd="sng" algn="ctr">
+            <a:noFill/>
+            <a:prstDash val="solid"/>
+            <a:miter lim="800000"/>
+          </a:ln>
+          <a:effectLst/>
+          <a:extLst>
+            <a:ext uri="{91240B29-F687-4F45-9708-019B960494DF}">
+              <a14:hiddenLine xmlns:a14="http://schemas.microsoft.com/office/drawing/2010/main" w="19050" cap="flat" cmpd="sng" algn="ctr">
+                <a:solidFill>
+                  <a:schemeClr val="accent1">
+                    <a:shade val="15000"/>
+                  </a:schemeClr>
+                </a:solidFill>
+                <a:prstDash val="solid"/>
+                <a:miter lim="800000"/>
+              </a14:hiddenLine>
+            </a:ext>
+          </a:extLst>
+        </p:spPr>
+        <p:style>
+          <a:lnRef idx="2">
+            <a:schemeClr val="accent1">
+              <a:shade val="15000"/>
+            </a:schemeClr>
+          </a:lnRef>
+          <a:fillRef idx="1">
+            <a:schemeClr val="accent1"/>
+          </a:fillRef>
+          <a:effectRef idx="0">
+            <a:schemeClr val="accent1"/>
+          </a:effectRef>
+          <a:fontRef idx="minor">
+            <a:schemeClr val="lt1"/>
+          </a:fontRef>
+        </p:style>
+        <p:txBody>
+          <a:bodyPr rtlCol="0" anchor="ctr"/>
+          <a:lstStyle/>
+          <a:p>
+            <a:pPr algn="ctr"/>
+            <a:endParaRPr lang="en-US"/>
+          </a:p>
+        </p:txBody>
+      </p:sp>
+      <p:sp>
+        <p:nvSpPr>
+          <p:cNvPr id="19" name="Rectangle 18">
+            <a:extLst>
+              <a:ext uri="{FF2B5EF4-FFF2-40B4-BE49-F238E27FC236}">
+                <a16:creationId xmlns:a16="http://schemas.microsoft.com/office/drawing/2014/main" id="{5E203E6E-B993-D7A0-B60E-FE89C21D4C5B}"/>
+              </a:ext>
+            </a:extLst>
+          </p:cNvPr>
+          <p:cNvSpPr/>
+          <p:nvPr/>
+        </p:nvSpPr>
+        <p:spPr>
+          <a:xfrm>
+            <a:off x="787400" y="4699000"/>
+            <a:ext cx="685800" cy="558800"/>
+          </a:xfrm>
+          <a:prstGeom prst="rect">
+            <a:avLst/>
+          </a:prstGeom>
+          <a:solidFill>
+            <a:srgbClr val="348775"/>
+          </a:solidFill>
+          <a:ln w="19050" cap="flat" cmpd="sng" algn="ctr">
+            <a:noFill/>
+            <a:prstDash val="solid"/>
+            <a:miter lim="800000"/>
+          </a:ln>
+          <a:effectLst/>
+          <a:extLst>
+            <a:ext uri="{91240B29-F687-4F45-9708-019B960494DF}">
+              <a14:hiddenLine xmlns:a14="http://schemas.microsoft.com/office/drawing/2010/main" w="19050" cap="flat" cmpd="sng" algn="ctr">
+                <a:solidFill>
+                  <a:schemeClr val="accent1">
+                    <a:shade val="15000"/>
+                  </a:schemeClr>
+                </a:solidFill>
+                <a:prstDash val="solid"/>
+                <a:miter lim="800000"/>
+              </a14:hiddenLine>
+            </a:ext>
+          </a:extLst>
+        </p:spPr>
+        <p:style>
+          <a:lnRef idx="2">
+            <a:schemeClr val="accent1">
+              <a:shade val="15000"/>
+            </a:schemeClr>
+          </a:lnRef>
+          <a:fillRef idx="1">
+            <a:schemeClr val="accent1"/>
+          </a:fillRef>
+          <a:effectRef idx="0">
+            <a:schemeClr val="accent1"/>
+          </a:effectRef>
+          <a:fontRef idx="minor">
+            <a:schemeClr val="lt1"/>
+          </a:fontRef>
+        </p:style>
+        <p:txBody>
+          <a:bodyPr rtlCol="0" anchor="ctr"/>
+          <a:lstStyle/>
+          <a:p>
+            <a:pPr algn="ctr"/>
+            <a:endParaRPr lang="en-US"/>
+          </a:p>
+        </p:txBody>
+      </p:sp>
+      <p:sp>
+        <p:nvSpPr>
+          <p:cNvPr id="20" name="TextBox 19">
+            <a:extLst>
+              <a:ext uri="{FF2B5EF4-FFF2-40B4-BE49-F238E27FC236}">
+                <a16:creationId xmlns:a16="http://schemas.microsoft.com/office/drawing/2014/main" id="{1158E748-9018-7E10-E230-AAEC7E299593}"/>
+              </a:ext>
+            </a:extLst>
+          </p:cNvPr>
+          <p:cNvSpPr txBox="1"/>
+          <p:nvPr/>
+        </p:nvSpPr>
+        <p:spPr>
+          <a:xfrm>
+            <a:off x="965200" y="4864100"/>
+            <a:ext cx="457200" cy="184666"/>
+          </a:xfrm>
+          <a:prstGeom prst="rect">
+            <a:avLst/>
+          </a:prstGeom>
+          <a:noFill/>
+        </p:spPr>
+        <p:txBody>
+          <a:bodyPr vert="horz" wrap="square" lIns="0" tIns="0" rIns="0" bIns="0" rtlCol="0">
+            <a:spAutoFit/>
+          </a:bodyPr>
+          <a:lstStyle/>
+          <a:p>
+            <a:r>
+              <a:rPr lang="en-US" sz="1200" b="1">
+                <a:solidFill>
+                  <a:srgbClr val="FFFFFF"/>
+                </a:solidFill>
+                <a:latin typeface="Aptos" panose="020B0004020202020204" pitchFamily="34" charset="0"/>
+              </a:rPr>
+              <a:t>12</a:t>
+            </a:r>
+          </a:p>
+        </p:txBody>
+      </p:sp>
+      <p:sp>
+        <p:nvSpPr>
+          <p:cNvPr id="21" name="TextBox 20">
+            <a:extLst>
+              <a:ext uri="{FF2B5EF4-FFF2-40B4-BE49-F238E27FC236}">
+                <a16:creationId xmlns:a16="http://schemas.microsoft.com/office/drawing/2014/main" id="{6473DD7E-6139-FABF-B078-37D93A829D5A}"/>
+              </a:ext>
+            </a:extLst>
+          </p:cNvPr>
+          <p:cNvSpPr txBox="1"/>
+          <p:nvPr/>
+        </p:nvSpPr>
+        <p:spPr>
+          <a:xfrm>
+            <a:off x="1727200" y="4838700"/>
+            <a:ext cx="7620000" cy="246221"/>
+          </a:xfrm>
+          <a:prstGeom prst="rect">
+            <a:avLst/>
+          </a:prstGeom>
+          <a:noFill/>
+        </p:spPr>
+        <p:txBody>
+          <a:bodyPr vert="horz" wrap="square" lIns="0" tIns="0" rIns="0" bIns="0" rtlCol="0">
+            <a:spAutoFit/>
+          </a:bodyPr>
+          <a:lstStyle/>
+          <a:p>
+            <a:r>
+              <a:rPr lang="en-US" sz="1600" b="1">
+                <a:solidFill>
+                  <a:srgbClr val="FFFFFF"/>
+                </a:solidFill>
+                <a:latin typeface="Aptos" panose="020B0004020202020204" pitchFamily="34" charset="0"/>
+              </a:rPr>
+              <a:t>Gaze and dwell</a:t>
+            </a:r>
+          </a:p>
+        </p:txBody>
+      </p:sp>
+      <p:sp>
+        <p:nvSpPr>
+          <p:cNvPr id="22" name="Rectangle 21">
+            <a:extLst>
+              <a:ext uri="{FF2B5EF4-FFF2-40B4-BE49-F238E27FC236}">
+                <a16:creationId xmlns:a16="http://schemas.microsoft.com/office/drawing/2014/main" id="{E78D199D-DD10-1914-7373-FE7ECAA37A5C}"/>
+              </a:ext>
+            </a:extLst>
+          </p:cNvPr>
+          <p:cNvSpPr/>
+          <p:nvPr/>
+        </p:nvSpPr>
+        <p:spPr>
+          <a:xfrm>
+            <a:off x="787400" y="5359400"/>
+            <a:ext cx="10566400" cy="558800"/>
+          </a:xfrm>
+          <a:prstGeom prst="rect">
+            <a:avLst/>
+          </a:prstGeom>
+          <a:solidFill>
+            <a:srgbClr val="224B42"/>
+          </a:solidFill>
+          <a:ln w="19050" cap="flat" cmpd="sng" algn="ctr">
+            <a:noFill/>
+            <a:prstDash val="solid"/>
+            <a:miter lim="800000"/>
+          </a:ln>
+          <a:effectLst/>
+          <a:extLst>
+            <a:ext uri="{91240B29-F687-4F45-9708-019B960494DF}">
+              <a14:hiddenLine xmlns:a14="http://schemas.microsoft.com/office/drawing/2010/main" w="19050" cap="flat" cmpd="sng" algn="ctr">
+                <a:solidFill>
+                  <a:schemeClr val="accent1">
+                    <a:shade val="15000"/>
+                  </a:schemeClr>
+                </a:solidFill>
+                <a:prstDash val="solid"/>
+                <a:miter lim="800000"/>
+              </a14:hiddenLine>
+            </a:ext>
+          </a:extLst>
+        </p:spPr>
+        <p:style>
+          <a:lnRef idx="2">
+            <a:schemeClr val="accent1">
+              <a:shade val="15000"/>
+            </a:schemeClr>
+          </a:lnRef>
+          <a:fillRef idx="1">
+            <a:schemeClr val="accent1"/>
+          </a:fillRef>
+          <a:effectRef idx="0">
+            <a:schemeClr val="accent1"/>
+          </a:effectRef>
+          <a:fontRef idx="minor">
+            <a:schemeClr val="lt1"/>
+          </a:fontRef>
+        </p:style>
+        <p:txBody>
+          <a:bodyPr rtlCol="0" anchor="ctr"/>
+          <a:lstStyle/>
+          <a:p>
+            <a:pPr algn="ctr"/>
+            <a:endParaRPr lang="en-US"/>
+          </a:p>
+        </p:txBody>
+      </p:sp>
+      <p:sp>
+        <p:nvSpPr>
+          <p:cNvPr id="23" name="Rectangle 22">
+            <a:extLst>
+              <a:ext uri="{FF2B5EF4-FFF2-40B4-BE49-F238E27FC236}">
+                <a16:creationId xmlns:a16="http://schemas.microsoft.com/office/drawing/2014/main" id="{7BF0DBFE-FF3B-1A94-CD52-6E6E85EA4A38}"/>
+              </a:ext>
+            </a:extLst>
+          </p:cNvPr>
+          <p:cNvSpPr/>
+          <p:nvPr/>
+        </p:nvSpPr>
+        <p:spPr>
+          <a:xfrm>
+            <a:off x="787400" y="5359400"/>
+            <a:ext cx="685800" cy="558800"/>
+          </a:xfrm>
+          <a:prstGeom prst="rect">
+            <a:avLst/>
+          </a:prstGeom>
+          <a:solidFill>
+            <a:srgbClr val="B28B58"/>
+          </a:solidFill>
+          <a:ln w="19050" cap="flat" cmpd="sng" algn="ctr">
+            <a:noFill/>
+            <a:prstDash val="solid"/>
+            <a:miter lim="800000"/>
+          </a:ln>
+          <a:effectLst/>
+          <a:extLst>
+            <a:ext uri="{91240B29-F687-4F45-9708-019B960494DF}">
+              <a14:hiddenLine xmlns:a14="http://schemas.microsoft.com/office/drawing/2010/main" w="19050" cap="flat" cmpd="sng" algn="ctr">
+                <a:solidFill>
+                  <a:schemeClr val="accent1">
+                    <a:shade val="15000"/>
+                  </a:schemeClr>
+                </a:solidFill>
+                <a:prstDash val="solid"/>
+                <a:miter lim="800000"/>
+              </a14:hiddenLine>
+            </a:ext>
+          </a:extLst>
+        </p:spPr>
+        <p:style>
+          <a:lnRef idx="2">
+            <a:schemeClr val="accent1">
+              <a:shade val="15000"/>
+            </a:schemeClr>
+          </a:lnRef>
+          <a:fillRef idx="1">
+            <a:schemeClr val="accent1"/>
+          </a:fillRef>
+          <a:effectRef idx="0">
+            <a:schemeClr val="accent1"/>
+          </a:effectRef>
+          <a:fontRef idx="minor">
+            <a:schemeClr val="lt1"/>
+          </a:fontRef>
+        </p:style>
+        <p:txBody>
+          <a:bodyPr rtlCol="0" anchor="ctr"/>
+          <a:lstStyle/>
+          <a:p>
+            <a:pPr algn="ctr"/>
+            <a:endParaRPr lang="en-US"/>
+          </a:p>
+        </p:txBody>
+      </p:sp>
+      <p:sp>
+        <p:nvSpPr>
+          <p:cNvPr id="24" name="TextBox 23">
+            <a:extLst>
+              <a:ext uri="{FF2B5EF4-FFF2-40B4-BE49-F238E27FC236}">
+                <a16:creationId xmlns:a16="http://schemas.microsoft.com/office/drawing/2014/main" id="{2928B849-577C-F353-38F5-EE73DB467312}"/>
+              </a:ext>
+            </a:extLst>
+          </p:cNvPr>
+          <p:cNvSpPr txBox="1"/>
+          <p:nvPr/>
+        </p:nvSpPr>
+        <p:spPr>
+          <a:xfrm>
+            <a:off x="965200" y="5524500"/>
+            <a:ext cx="457200" cy="184666"/>
+          </a:xfrm>
+          <a:prstGeom prst="rect">
+            <a:avLst/>
+          </a:prstGeom>
+          <a:noFill/>
+        </p:spPr>
+        <p:txBody>
+          <a:bodyPr vert="horz" wrap="square" lIns="0" tIns="0" rIns="0" bIns="0" rtlCol="0">
+            <a:spAutoFit/>
+          </a:bodyPr>
+          <a:lstStyle/>
+          <a:p>
+            <a:r>
+              <a:rPr lang="en-US" sz="1200" b="1">
+                <a:solidFill>
+                  <a:srgbClr val="FFFFFF"/>
+                </a:solidFill>
+                <a:latin typeface="Aptos" panose="020B0004020202020204" pitchFamily="34" charset="0"/>
+              </a:rPr>
+              <a:t>13</a:t>
+            </a:r>
+          </a:p>
+        </p:txBody>
+      </p:sp>
+      <p:sp>
+        <p:nvSpPr>
+          <p:cNvPr id="25" name="TextBox 24">
+            <a:extLst>
+              <a:ext uri="{FF2B5EF4-FFF2-40B4-BE49-F238E27FC236}">
+                <a16:creationId xmlns:a16="http://schemas.microsoft.com/office/drawing/2014/main" id="{A720E20C-EF7A-7B67-0239-D5ADE6D23062}"/>
+              </a:ext>
+            </a:extLst>
+          </p:cNvPr>
+          <p:cNvSpPr txBox="1"/>
+          <p:nvPr/>
+        </p:nvSpPr>
+        <p:spPr>
+          <a:xfrm>
+            <a:off x="1727200" y="5499100"/>
+            <a:ext cx="7620000" cy="246221"/>
+          </a:xfrm>
+          <a:prstGeom prst="rect">
+            <a:avLst/>
+          </a:prstGeom>
+          <a:noFill/>
+        </p:spPr>
+        <p:txBody>
+          <a:bodyPr vert="horz" wrap="square" lIns="0" tIns="0" rIns="0" bIns="0" rtlCol="0">
+            <a:spAutoFit/>
+          </a:bodyPr>
+          <a:lstStyle/>
+          <a:p>
+            <a:r>
+              <a:rPr lang="en-US" sz="1600" b="1">
+                <a:solidFill>
+                  <a:srgbClr val="FFFFFF"/>
+                </a:solidFill>
+                <a:latin typeface="Aptos" panose="020B0004020202020204" pitchFamily="34" charset="0"/>
+              </a:rPr>
+              <a:t>Comfort and iteration</a:t>
+            </a:r>
+          </a:p>
+        </p:txBody>
+      </p:sp>
+      <p:sp>
+        <p:nvSpPr>
+          <p:cNvPr id="26" name="TextBox 25">
+            <a:extLst>
+              <a:ext uri="{FF2B5EF4-FFF2-40B4-BE49-F238E27FC236}">
+                <a16:creationId xmlns:a16="http://schemas.microsoft.com/office/drawing/2014/main" id="{84BB245C-1AD2-89D5-D9C2-40D8382F1F5F}"/>
+              </a:ext>
+            </a:extLst>
+          </p:cNvPr>
+          <p:cNvSpPr txBox="1"/>
+          <p:nvPr/>
+        </p:nvSpPr>
+        <p:spPr>
+          <a:xfrm>
+            <a:off x="787400" y="6172200"/>
+            <a:ext cx="1219200" cy="153888"/>
+          </a:xfrm>
+          <a:prstGeom prst="rect">
+            <a:avLst/>
+          </a:prstGeom>
+          <a:noFill/>
+        </p:spPr>
+        <p:txBody>
+          <a:bodyPr vert="horz" wrap="square" lIns="0" tIns="0" rIns="0" bIns="0" rtlCol="0">
+            <a:spAutoFit/>
+          </a:bodyPr>
+          <a:lstStyle/>
+          <a:p>
+            <a:r>
+              <a:rPr lang="en-US" sz="1000" b="1">
+                <a:solidFill>
+                  <a:srgbClr val="F2C16D"/>
+                </a:solidFill>
+                <a:latin typeface="Aptos" panose="020B0004020202020204" pitchFamily="34" charset="0"/>
+              </a:rPr>
+              <a:t>START HERE</a:t>
+            </a:r>
+          </a:p>
+        </p:txBody>
+      </p:sp>
+      <p:sp>
+        <p:nvSpPr>
+          <p:cNvPr id="27" name="TextBox 26">
+            <a:extLst>
+              <a:ext uri="{FF2B5EF4-FFF2-40B4-BE49-F238E27FC236}">
+                <a16:creationId xmlns:a16="http://schemas.microsoft.com/office/drawing/2014/main" id="{5EA6CD90-0EE9-1C39-C1D5-6922B1D58E92}"/>
+              </a:ext>
+            </a:extLst>
+          </p:cNvPr>
+          <p:cNvSpPr txBox="1"/>
+          <p:nvPr/>
+        </p:nvSpPr>
+        <p:spPr>
+          <a:xfrm>
+            <a:off x="2082800" y="6121400"/>
+            <a:ext cx="9271000" cy="200055"/>
+          </a:xfrm>
+          <a:prstGeom prst="rect">
+            <a:avLst/>
+          </a:prstGeom>
+          <a:noFill/>
+        </p:spPr>
+        <p:txBody>
+          <a:bodyPr vert="horz" wrap="square" lIns="0" tIns="0" rIns="0" bIns="0" rtlCol="0">
+            <a:spAutoFit/>
+          </a:bodyPr>
+          <a:lstStyle/>
+          <a:p>
+            <a:r>
+              <a:rPr lang="en-US" sz="1300">
+                <a:solidFill>
+                  <a:srgbClr val="F7F4EC"/>
+                </a:solidFill>
+                <a:latin typeface="Aptos" panose="020B0004020202020204" pitchFamily="34" charset="0"/>
+              </a:rPr>
+              <a:t>Open a Week-09 to Week-13 folder in Unity Hub; each has a ready-made scene and a README with tests.</a:t>
+            </a:r>
+          </a:p>
+        </p:txBody>
+      </p:sp>
+    </p:spTree>
+    <p:extLst>
+      <p:ext uri="{BB962C8B-B14F-4D97-AF65-F5344CB8AC3E}">
+        <p14:creationId xmlns:p14="http://schemas.microsoft.com/office/powerpoint/2010/main" val="1809113342"/>
       </p:ext>
     </p:extLst>
   </p:cSld>
@@ -6649,7 +10260,7 @@
           <p:cNvPr id="2" name="Rectangle 1">
             <a:extLst>
               <a:ext uri="{FF2B5EF4-FFF2-40B4-BE49-F238E27FC236}">
-                <a16:creationId xmlns:a16="http://schemas.microsoft.com/office/drawing/2014/main" id="{9D4E422D-1360-7DC3-C73B-DD1E25C4DD79}"/>
+                <a16:creationId xmlns:a16="http://schemas.microsoft.com/office/drawing/2014/main" id="{F8A1830E-4A1D-F805-35DB-52E06DE63E8A}"/>
               </a:ext>
             </a:extLst>
           </p:cNvPr>
@@ -6717,7 +10328,7 @@
           <p:cNvPr id="3" name="Rectangle 2">
             <a:extLst>
               <a:ext uri="{FF2B5EF4-FFF2-40B4-BE49-F238E27FC236}">
-                <a16:creationId xmlns:a16="http://schemas.microsoft.com/office/drawing/2014/main" id="{921BFDCB-1C6B-2324-3F5B-9C7B8EE6842E}"/>
+                <a16:creationId xmlns:a16="http://schemas.microsoft.com/office/drawing/2014/main" id="{7EF5FB2C-093E-8247-84D1-59D48EE8574A}"/>
               </a:ext>
             </a:extLst>
           </p:cNvPr>
@@ -6733,7 +10344,7 @@
             <a:avLst/>
           </a:prstGeom>
           <a:solidFill>
-            <a:srgbClr val="4C82A5"/>
+            <a:srgbClr val="E46F4F"/>
           </a:solidFill>
           <a:ln w="19050" cap="flat" cmpd="sng" algn="ctr">
             <a:noFill/>
@@ -6785,7 +10396,7 @@
           <p:cNvPr id="4" name="TextBox 3">
             <a:extLst>
               <a:ext uri="{FF2B5EF4-FFF2-40B4-BE49-F238E27FC236}">
-                <a16:creationId xmlns:a16="http://schemas.microsoft.com/office/drawing/2014/main" id="{AE0B1D79-2201-F045-1DDA-E782B5F935C0}"/>
+                <a16:creationId xmlns:a16="http://schemas.microsoft.com/office/drawing/2014/main" id="{513F5933-11E3-4B8E-BFCE-7522470A0E2B}"/>
               </a:ext>
             </a:extLst>
           </p:cNvPr>
@@ -6811,11 +10422,11 @@
             <a:r>
               <a:rPr lang="en-US" sz="1100" b="1">
                 <a:solidFill>
-                  <a:srgbClr val="4C82A5"/>
+                  <a:srgbClr val="E46F4F"/>
                 </a:solidFill>
                 <a:latin typeface="Aptos" panose="020B0004020202020204" pitchFamily="34" charset="0"/>
               </a:rPr>
-              <a:t>WEEK 10  /  CHAPTER 6</a:t>
+              <a:t>WEEK 09  /  CHAPTER 5  /  IN THE SCENE</a:t>
             </a:r>
           </a:p>
         </p:txBody>
@@ -6825,7 +10436,7 @@
           <p:cNvPr id="5" name="TextBox 4">
             <a:extLst>
               <a:ext uri="{FF2B5EF4-FFF2-40B4-BE49-F238E27FC236}">
-                <a16:creationId xmlns:a16="http://schemas.microsoft.com/office/drawing/2014/main" id="{06D47F9A-F6F4-E715-9FD3-3740CA7E2911}"/>
+                <a16:creationId xmlns:a16="http://schemas.microsoft.com/office/drawing/2014/main" id="{F698C720-AC85-8EEB-BB3E-4087EEA0E267}"/>
               </a:ext>
             </a:extLst>
           </p:cNvPr>
@@ -6855,7 +10466,7 @@
                 </a:solidFill>
                 <a:latin typeface="Aptos Display" panose="020B0004020202020204" pitchFamily="34" charset="0"/>
               </a:rPr>
-              <a:t>Interactive AR</a:t>
+              <a:t>One button, one ray, two event paths</a:t>
             </a:r>
           </a:p>
         </p:txBody>
@@ -6865,7 +10476,7 @@
           <p:cNvPr id="6" name="TextBox 5">
             <a:extLst>
               <a:ext uri="{FF2B5EF4-FFF2-40B4-BE49-F238E27FC236}">
-                <a16:creationId xmlns:a16="http://schemas.microsoft.com/office/drawing/2014/main" id="{50A238E8-8D6F-7794-053C-FCD73C97FA8F}"/>
+                <a16:creationId xmlns:a16="http://schemas.microsoft.com/office/drawing/2014/main" id="{D37907FF-7DA2-3FBA-DE5C-AD529022DC7B}"/>
               </a:ext>
             </a:extLst>
           </p:cNvPr>
@@ -6895,17 +10506,17 @@
                 </a:solidFill>
                 <a:latin typeface="Aptos" panose="020B0004020202020204" pitchFamily="34" charset="0"/>
               </a:rPr>
-              <a:t>Build a tabletop placement flow with touch, C# selection, and a compact control UI.</a:t>
-            </a:r>
-          </a:p>
-        </p:txBody>
-      </p:sp>
-      <p:sp>
-        <p:nvSpPr>
-          <p:cNvPr id="7" name="Rectangle 6">
-            <a:extLst>
-              <a:ext uri="{FF2B5EF4-FFF2-40B4-BE49-F238E27FC236}">
-                <a16:creationId xmlns:a16="http://schemas.microsoft.com/office/drawing/2014/main" id="{CD21C8FD-C157-31FE-5086-38E79989010E}"/>
+              <a:t>Assets/Scenes/InteractiveVR.unity  |  4 of 4 checks passed in a Windows build (no headset)</a:t>
+            </a:r>
+          </a:p>
+        </p:txBody>
+      </p:sp>
+      <p:sp>
+        <p:nvSpPr>
+          <p:cNvPr id="15" name="Rectangle 14">
+            <a:extLst>
+              <a:ext uri="{FF2B5EF4-FFF2-40B4-BE49-F238E27FC236}">
+                <a16:creationId xmlns:a16="http://schemas.microsoft.com/office/drawing/2014/main" id="{BB6B9573-53D1-DAF5-85D0-D2CC93328362}"/>
               </a:ext>
             </a:extLst>
           </p:cNvPr>
@@ -6914,14 +10525,14 @@
         </p:nvSpPr>
         <p:spPr>
           <a:xfrm>
-            <a:off x="711200" y="2209800"/>
-            <a:ext cx="6680200" cy="3429000"/>
+            <a:off x="609600" y="6350000"/>
+            <a:ext cx="10972800" cy="12700"/>
           </a:xfrm>
           <a:prstGeom prst="rect">
             <a:avLst/>
           </a:prstGeom>
           <a:solidFill>
-            <a:srgbClr val="FFFEFA"/>
+            <a:srgbClr val="D5DCD6"/>
           </a:solidFill>
           <a:ln w="19050" cap="flat" cmpd="sng" algn="ctr">
             <a:noFill/>
@@ -6970,10 +10581,10 @@
       </p:sp>
       <p:sp>
         <p:nvSpPr>
-          <p:cNvPr id="8" name="TextBox 7">
-            <a:extLst>
-              <a:ext uri="{FF2B5EF4-FFF2-40B4-BE49-F238E27FC236}">
-                <a16:creationId xmlns:a16="http://schemas.microsoft.com/office/drawing/2014/main" id="{6D8F1193-29AA-F8C7-758E-3E01C960D979}"/>
+          <p:cNvPr id="16" name="TextBox 15">
+            <a:extLst>
+              <a:ext uri="{FF2B5EF4-FFF2-40B4-BE49-F238E27FC236}">
+                <a16:creationId xmlns:a16="http://schemas.microsoft.com/office/drawing/2014/main" id="{1CE59D22-48BF-FF23-9A42-0F116408CB32}"/>
               </a:ext>
             </a:extLst>
           </p:cNvPr>
@@ -6982,8 +10593,8 @@
         </p:nvSpPr>
         <p:spPr>
           <a:xfrm>
-            <a:off x="990600" y="2463800"/>
-            <a:ext cx="5715000" cy="153888"/>
+            <a:off x="609600" y="6489700"/>
+            <a:ext cx="8890000" cy="138499"/>
           </a:xfrm>
           <a:prstGeom prst="rect">
             <a:avLst/>
@@ -6997,23 +10608,23 @@
           <a:lstStyle/>
           <a:p>
             <a:r>
-              <a:rPr lang="en-US" sz="1000" b="1">
-                <a:solidFill>
-                  <a:srgbClr val="4C82A5"/>
+              <a:rPr lang="en-US" sz="900" b="1">
+                <a:solidFill>
+                  <a:srgbClr val="55645D"/>
                 </a:solidFill>
                 <a:latin typeface="Aptos" panose="020B0004020202020204" pitchFamily="34" charset="0"/>
               </a:rPr>
-              <a:t>STUDENTS BUILD</a:t>
-            </a:r>
-          </a:p>
-        </p:txBody>
-      </p:sp>
-      <p:sp>
-        <p:nvSpPr>
-          <p:cNvPr id="9" name="TextBox 8">
-            <a:extLst>
-              <a:ext uri="{FF2B5EF4-FFF2-40B4-BE49-F238E27FC236}">
-                <a16:creationId xmlns:a16="http://schemas.microsoft.com/office/drawing/2014/main" id="{978EBE77-A481-1526-14D0-D87DC045E97B}"/>
+              <a:t>CIST 1423  /  UNITY XR LABS</a:t>
+            </a:r>
+          </a:p>
+        </p:txBody>
+      </p:sp>
+      <p:sp>
+        <p:nvSpPr>
+          <p:cNvPr id="17" name="TextBox 16">
+            <a:extLst>
+              <a:ext uri="{FF2B5EF4-FFF2-40B4-BE49-F238E27FC236}">
+                <a16:creationId xmlns:a16="http://schemas.microsoft.com/office/drawing/2014/main" id="{B429EC23-07C4-1157-564C-A37483B231C4}"/>
               </a:ext>
             </a:extLst>
           </p:cNvPr>
@@ -7022,8 +10633,8 @@
         </p:nvSpPr>
         <p:spPr>
           <a:xfrm>
-            <a:off x="990600" y="2857500"/>
-            <a:ext cx="6032500" cy="984885"/>
+            <a:off x="10985500" y="6451600"/>
+            <a:ext cx="571500" cy="169277"/>
           </a:xfrm>
           <a:prstGeom prst="rect">
             <a:avLst/>
@@ -7037,387 +10648,6 @@
           <a:lstStyle/>
           <a:p>
             <a:r>
-              <a:rPr lang="en-US" sz="1600">
-                <a:solidFill>
-                  <a:srgbClr val="263A33"/>
-                </a:solidFill>
-                <a:latin typeface="Aptos" panose="020B0004020202020204" pitchFamily="34" charset="0"/>
-              </a:rPr>
-              <a:t>- Detect a plane and place a primitive prefab
-- Tap to select; swap, delete, reset, toggle planes
-- AR Foundation 5.1.5 with ARCore / ARKit providers
-- Editor mouse + ground-plane fallback</a:t>
-            </a:r>
-          </a:p>
-        </p:txBody>
-      </p:sp>
-      <p:sp>
-        <p:nvSpPr>
-          <p:cNvPr id="10" name="Rectangle 9">
-            <a:extLst>
-              <a:ext uri="{FF2B5EF4-FFF2-40B4-BE49-F238E27FC236}">
-                <a16:creationId xmlns:a16="http://schemas.microsoft.com/office/drawing/2014/main" id="{49A7454D-AFF5-F44D-F036-EFFF3B4EA62E}"/>
-              </a:ext>
-            </a:extLst>
-          </p:cNvPr>
-          <p:cNvSpPr/>
-          <p:nvPr/>
-        </p:nvSpPr>
-        <p:spPr>
-          <a:xfrm>
-            <a:off x="7721600" y="2209800"/>
-            <a:ext cx="3759200" cy="3581400"/>
-          </a:xfrm>
-          <a:prstGeom prst="rect">
-            <a:avLst/>
-          </a:prstGeom>
-          <a:solidFill>
-            <a:srgbClr val="1D3D35"/>
-          </a:solidFill>
-          <a:ln w="19050" cap="flat" cmpd="sng" algn="ctr">
-            <a:noFill/>
-            <a:prstDash val="solid"/>
-            <a:miter lim="800000"/>
-          </a:ln>
-          <a:effectLst/>
-          <a:extLst>
-            <a:ext uri="{91240B29-F687-4F45-9708-019B960494DF}">
-              <a14:hiddenLine xmlns:a14="http://schemas.microsoft.com/office/drawing/2010/main" w="19050" cap="flat" cmpd="sng" algn="ctr">
-                <a:solidFill>
-                  <a:schemeClr val="accent1">
-                    <a:shade val="15000"/>
-                  </a:schemeClr>
-                </a:solidFill>
-                <a:prstDash val="solid"/>
-                <a:miter lim="800000"/>
-              </a14:hiddenLine>
-            </a:ext>
-          </a:extLst>
-        </p:spPr>
-        <p:style>
-          <a:lnRef idx="2">
-            <a:schemeClr val="accent1">
-              <a:shade val="15000"/>
-            </a:schemeClr>
-          </a:lnRef>
-          <a:fillRef idx="1">
-            <a:schemeClr val="accent1"/>
-          </a:fillRef>
-          <a:effectRef idx="0">
-            <a:schemeClr val="accent1"/>
-          </a:effectRef>
-          <a:fontRef idx="minor">
-            <a:schemeClr val="lt1"/>
-          </a:fontRef>
-        </p:style>
-        <p:txBody>
-          <a:bodyPr rtlCol="0" anchor="ctr"/>
-          <a:lstStyle/>
-          <a:p>
-            <a:pPr algn="ctr"/>
-            <a:endParaRPr lang="en-US"/>
-          </a:p>
-        </p:txBody>
-      </p:sp>
-      <p:sp>
-        <p:nvSpPr>
-          <p:cNvPr id="11" name="TextBox 10">
-            <a:extLst>
-              <a:ext uri="{FF2B5EF4-FFF2-40B4-BE49-F238E27FC236}">
-                <a16:creationId xmlns:a16="http://schemas.microsoft.com/office/drawing/2014/main" id="{28740A88-F168-160F-73DE-C833D984931A}"/>
-              </a:ext>
-            </a:extLst>
-          </p:cNvPr>
-          <p:cNvSpPr txBox="1"/>
-          <p:nvPr/>
-        </p:nvSpPr>
-        <p:spPr>
-          <a:xfrm>
-            <a:off x="8001000" y="2476500"/>
-            <a:ext cx="3124200" cy="184666"/>
-          </a:xfrm>
-          <a:prstGeom prst="rect">
-            <a:avLst/>
-          </a:prstGeom>
-          <a:noFill/>
-        </p:spPr>
-        <p:txBody>
-          <a:bodyPr vert="horz" wrap="square" lIns="0" tIns="0" rIns="0" bIns="0" rtlCol="0">
-            <a:spAutoFit/>
-          </a:bodyPr>
-          <a:lstStyle/>
-          <a:p>
-            <a:r>
-              <a:rPr lang="en-US" sz="1200" b="1">
-                <a:solidFill>
-                  <a:srgbClr val="F2C16D"/>
-                </a:solidFill>
-                <a:latin typeface="Aptos" panose="020B0004020202020204" pitchFamily="34" charset="0"/>
-              </a:rPr>
-              <a:t>VERIFY THE LOOP</a:t>
-            </a:r>
-          </a:p>
-        </p:txBody>
-      </p:sp>
-      <p:sp>
-        <p:nvSpPr>
-          <p:cNvPr id="12" name="TextBox 11">
-            <a:extLst>
-              <a:ext uri="{FF2B5EF4-FFF2-40B4-BE49-F238E27FC236}">
-                <a16:creationId xmlns:a16="http://schemas.microsoft.com/office/drawing/2014/main" id="{63A2EDB5-3FC9-6A2F-AA8E-B367607BA45C}"/>
-              </a:ext>
-            </a:extLst>
-          </p:cNvPr>
-          <p:cNvSpPr txBox="1"/>
-          <p:nvPr/>
-        </p:nvSpPr>
-        <p:spPr>
-          <a:xfrm>
-            <a:off x="8001000" y="2933700"/>
-            <a:ext cx="3149600" cy="1077218"/>
-          </a:xfrm>
-          <a:prstGeom prst="rect">
-            <a:avLst/>
-          </a:prstGeom>
-          <a:noFill/>
-        </p:spPr>
-        <p:txBody>
-          <a:bodyPr vert="horz" wrap="square" lIns="0" tIns="0" rIns="0" bIns="0" rtlCol="0">
-            <a:spAutoFit/>
-          </a:bodyPr>
-          <a:lstStyle/>
-          <a:p>
-            <a:r>
-              <a:rPr lang="en-US" sz="1400">
-                <a:solidFill>
-                  <a:srgbClr val="F7F4EC"/>
-                </a:solidFill>
-                <a:latin typeface="Aptos" panose="020B0004020202020204" pitchFamily="34" charset="0"/>
-              </a:rPr>
-              <a:t>1  Scan until a plane is tracked; place a prefab.
-2  Select it and swap variants in place.
-3  Check delete, reset, and plane visibility.</a:t>
-            </a:r>
-          </a:p>
-        </p:txBody>
-      </p:sp>
-      <p:sp>
-        <p:nvSpPr>
-          <p:cNvPr id="13" name="TextBox 12">
-            <a:extLst>
-              <a:ext uri="{FF2B5EF4-FFF2-40B4-BE49-F238E27FC236}">
-                <a16:creationId xmlns:a16="http://schemas.microsoft.com/office/drawing/2014/main" id="{67B0215F-F63E-F57F-E840-7DF258FB6D04}"/>
-              </a:ext>
-            </a:extLst>
-          </p:cNvPr>
-          <p:cNvSpPr txBox="1"/>
-          <p:nvPr/>
-        </p:nvSpPr>
-        <p:spPr>
-          <a:xfrm>
-            <a:off x="8001000" y="5029200"/>
-            <a:ext cx="1270000" cy="138499"/>
-          </a:xfrm>
-          <a:prstGeom prst="rect">
-            <a:avLst/>
-          </a:prstGeom>
-          <a:noFill/>
-        </p:spPr>
-        <p:txBody>
-          <a:bodyPr vert="horz" wrap="square" lIns="0" tIns="0" rIns="0" bIns="0" rtlCol="0">
-            <a:spAutoFit/>
-          </a:bodyPr>
-          <a:lstStyle/>
-          <a:p>
-            <a:r>
-              <a:rPr lang="en-US" sz="900" b="1">
-                <a:solidFill>
-                  <a:srgbClr val="AFC7BD"/>
-                </a:solidFill>
-                <a:latin typeface="Aptos" panose="020B0004020202020204" pitchFamily="34" charset="0"/>
-              </a:rPr>
-              <a:t>TURN IN</a:t>
-            </a:r>
-          </a:p>
-        </p:txBody>
-      </p:sp>
-      <p:sp>
-        <p:nvSpPr>
-          <p:cNvPr id="14" name="TextBox 13">
-            <a:extLst>
-              <a:ext uri="{FF2B5EF4-FFF2-40B4-BE49-F238E27FC236}">
-                <a16:creationId xmlns:a16="http://schemas.microsoft.com/office/drawing/2014/main" id="{E30A5351-9A42-E604-5C0C-CC31EFD33AA2}"/>
-              </a:ext>
-            </a:extLst>
-          </p:cNvPr>
-          <p:cNvSpPr txBox="1"/>
-          <p:nvPr/>
-        </p:nvSpPr>
-        <p:spPr>
-          <a:xfrm>
-            <a:off x="8001000" y="5270500"/>
-            <a:ext cx="3149600" cy="169277"/>
-          </a:xfrm>
-          <a:prstGeom prst="rect">
-            <a:avLst/>
-          </a:prstGeom>
-          <a:noFill/>
-        </p:spPr>
-        <p:txBody>
-          <a:bodyPr vert="horz" wrap="square" lIns="0" tIns="0" rIns="0" bIns="0" rtlCol="0">
-            <a:spAutoFit/>
-          </a:bodyPr>
-          <a:lstStyle/>
-          <a:p>
-            <a:r>
-              <a:rPr lang="en-US" sz="1100" b="1">
-                <a:solidFill>
-                  <a:srgbClr val="FFFFFF"/>
-                </a:solidFill>
-                <a:latin typeface="Aptos" panose="020B0004020202020204" pitchFamily="34" charset="0"/>
-              </a:rPr>
-              <a:t>Device/Editor evidence + reflection</a:t>
-            </a:r>
-          </a:p>
-        </p:txBody>
-      </p:sp>
-      <p:sp>
-        <p:nvSpPr>
-          <p:cNvPr id="15" name="Rectangle 14">
-            <a:extLst>
-              <a:ext uri="{FF2B5EF4-FFF2-40B4-BE49-F238E27FC236}">
-                <a16:creationId xmlns:a16="http://schemas.microsoft.com/office/drawing/2014/main" id="{232D8E86-21B6-5DC1-3331-517CADF07D60}"/>
-              </a:ext>
-            </a:extLst>
-          </p:cNvPr>
-          <p:cNvSpPr/>
-          <p:nvPr/>
-        </p:nvSpPr>
-        <p:spPr>
-          <a:xfrm>
-            <a:off x="609600" y="6350000"/>
-            <a:ext cx="10972800" cy="12700"/>
-          </a:xfrm>
-          <a:prstGeom prst="rect">
-            <a:avLst/>
-          </a:prstGeom>
-          <a:solidFill>
-            <a:srgbClr val="D5DCD6"/>
-          </a:solidFill>
-          <a:ln w="19050" cap="flat" cmpd="sng" algn="ctr">
-            <a:noFill/>
-            <a:prstDash val="solid"/>
-            <a:miter lim="800000"/>
-          </a:ln>
-          <a:effectLst/>
-          <a:extLst>
-            <a:ext uri="{91240B29-F687-4F45-9708-019B960494DF}">
-              <a14:hiddenLine xmlns:a14="http://schemas.microsoft.com/office/drawing/2010/main" w="19050" cap="flat" cmpd="sng" algn="ctr">
-                <a:solidFill>
-                  <a:schemeClr val="accent1">
-                    <a:shade val="15000"/>
-                  </a:schemeClr>
-                </a:solidFill>
-                <a:prstDash val="solid"/>
-                <a:miter lim="800000"/>
-              </a14:hiddenLine>
-            </a:ext>
-          </a:extLst>
-        </p:spPr>
-        <p:style>
-          <a:lnRef idx="2">
-            <a:schemeClr val="accent1">
-              <a:shade val="15000"/>
-            </a:schemeClr>
-          </a:lnRef>
-          <a:fillRef idx="1">
-            <a:schemeClr val="accent1"/>
-          </a:fillRef>
-          <a:effectRef idx="0">
-            <a:schemeClr val="accent1"/>
-          </a:effectRef>
-          <a:fontRef idx="minor">
-            <a:schemeClr val="lt1"/>
-          </a:fontRef>
-        </p:style>
-        <p:txBody>
-          <a:bodyPr rtlCol="0" anchor="ctr"/>
-          <a:lstStyle/>
-          <a:p>
-            <a:pPr algn="ctr"/>
-            <a:endParaRPr lang="en-US"/>
-          </a:p>
-        </p:txBody>
-      </p:sp>
-      <p:sp>
-        <p:nvSpPr>
-          <p:cNvPr id="16" name="TextBox 15">
-            <a:extLst>
-              <a:ext uri="{FF2B5EF4-FFF2-40B4-BE49-F238E27FC236}">
-                <a16:creationId xmlns:a16="http://schemas.microsoft.com/office/drawing/2014/main" id="{7A9F70B9-EF49-A444-1BD7-645590D52122}"/>
-              </a:ext>
-            </a:extLst>
-          </p:cNvPr>
-          <p:cNvSpPr txBox="1"/>
-          <p:nvPr/>
-        </p:nvSpPr>
-        <p:spPr>
-          <a:xfrm>
-            <a:off x="609600" y="6489700"/>
-            <a:ext cx="8890000" cy="138499"/>
-          </a:xfrm>
-          <a:prstGeom prst="rect">
-            <a:avLst/>
-          </a:prstGeom>
-          <a:noFill/>
-        </p:spPr>
-        <p:txBody>
-          <a:bodyPr vert="horz" wrap="square" lIns="0" tIns="0" rIns="0" bIns="0" rtlCol="0">
-            <a:spAutoFit/>
-          </a:bodyPr>
-          <a:lstStyle/>
-          <a:p>
-            <a:r>
-              <a:rPr lang="en-US" sz="900" b="1">
-                <a:solidFill>
-                  <a:srgbClr val="55645D"/>
-                </a:solidFill>
-                <a:latin typeface="Aptos" panose="020B0004020202020204" pitchFamily="34" charset="0"/>
-              </a:rPr>
-              <a:t>CIST 1423  /  UNITY XR LABS</a:t>
-            </a:r>
-          </a:p>
-        </p:txBody>
-      </p:sp>
-      <p:sp>
-        <p:nvSpPr>
-          <p:cNvPr id="17" name="TextBox 16">
-            <a:extLst>
-              <a:ext uri="{FF2B5EF4-FFF2-40B4-BE49-F238E27FC236}">
-                <a16:creationId xmlns:a16="http://schemas.microsoft.com/office/drawing/2014/main" id="{F8C47F6E-0F6B-2996-76CB-86AC727D8150}"/>
-              </a:ext>
-            </a:extLst>
-          </p:cNvPr>
-          <p:cNvSpPr txBox="1"/>
-          <p:nvPr/>
-        </p:nvSpPr>
-        <p:spPr>
-          <a:xfrm>
-            <a:off x="10985500" y="6451600"/>
-            <a:ext cx="571500" cy="169277"/>
-          </a:xfrm>
-          <a:prstGeom prst="rect">
-            <a:avLst/>
-          </a:prstGeom>
-          <a:noFill/>
-        </p:spPr>
-        <p:txBody>
-          <a:bodyPr vert="horz" wrap="square" lIns="0" tIns="0" rIns="0" bIns="0" rtlCol="0">
-            <a:spAutoFit/>
-          </a:bodyPr>
-          <a:lstStyle/>
-          <a:p>
-            <a:r>
               <a:rPr lang="en-US" sz="1100" b="1">
                 <a:solidFill>
                   <a:srgbClr val="55645D"/>
@@ -7429,10 +10659,190 @@
           </a:p>
         </p:txBody>
       </p:sp>
+      <p:pic>
+        <p:nvPicPr>
+          <p:cNvPr id="19" name="Screenshot 1" descr="Screenshot 1">
+            <a:extLst>
+              <a:ext uri="{FF2B5EF4-FFF2-40B4-BE49-F238E27FC236}">
+                <a16:creationId xmlns:a16="http://schemas.microsoft.com/office/drawing/2014/main" id="{76241C8B-ABEA-E0F5-BC93-CE03C5D913F6}"/>
+              </a:ext>
+            </a:extLst>
+          </p:cNvPr>
+          <p:cNvPicPr>
+            <a:picLocks/>
+          </p:cNvPicPr>
+          <p:nvPr/>
+        </p:nvPicPr>
+        <p:blipFill>
+          <a:blip r:embed="rId2">
+            <a:extLst>
+              <a:ext uri="{28A0092B-C50C-407E-A947-70E740481C1C}">
+                <a14:useLocalDpi xmlns:a14="http://schemas.microsoft.com/office/drawing/2010/main" val="0"/>
+              </a:ext>
+            </a:extLst>
+          </a:blip>
+          <a:stretch>
+            <a:fillRect/>
+          </a:stretch>
+        </p:blipFill>
+        <p:spPr>
+          <a:xfrm>
+            <a:off x="711200" y="2133600"/>
+            <a:ext cx="5207000" cy="2928938"/>
+          </a:xfrm>
+          <a:prstGeom prst="rect">
+            <a:avLst/>
+          </a:prstGeom>
+          <a:ln w="9525">
+            <a:solidFill>
+              <a:srgbClr val="D5DCD6"/>
+            </a:solidFill>
+          </a:ln>
+        </p:spPr>
+      </p:pic>
+      <p:sp>
+        <p:nvSpPr>
+          <p:cNvPr id="20" name="Caption 1">
+            <a:extLst>
+              <a:ext uri="{FF2B5EF4-FFF2-40B4-BE49-F238E27FC236}">
+                <a16:creationId xmlns:a16="http://schemas.microsoft.com/office/drawing/2014/main" id="{C1C85409-3EDF-78F6-BF18-40D1A8C11615}"/>
+              </a:ext>
+            </a:extLst>
+          </p:cNvPr>
+          <p:cNvSpPr txBox="1"/>
+          <p:nvPr/>
+        </p:nvSpPr>
+        <p:spPr>
+          <a:xfrm>
+            <a:off x="711200" y="5189538"/>
+            <a:ext cx="5207000" cy="369332"/>
+          </a:xfrm>
+          <a:prstGeom prst="rect">
+            <a:avLst/>
+          </a:prstGeom>
+          <a:noFill/>
+        </p:spPr>
+        <p:txBody>
+          <a:bodyPr vert="horz" wrap="square" lIns="0" tIns="0" rIns="0" bIns="0" rtlCol="0">
+            <a:noAutofit/>
+          </a:bodyPr>
+          <a:lstStyle/>
+          <a:p>
+            <a:r>
+              <a:rPr lang="en-US" sz="1100" b="1">
+                <a:solidFill>
+                  <a:srgbClr val="263A33"/>
+                </a:solidFill>
+                <a:latin typeface="Aptos" panose="020B0004020202020204" pitchFamily="34" charset="0"/>
+              </a:rPr>
+              <a:t>Start.</a:t>
+            </a:r>
+            <a:r>
+              <a:rPr lang="en-US" sz="1100">
+                <a:solidFill>
+                  <a:srgbClr val="55645D"/>
+                </a:solidFill>
+                <a:latin typeface="Aptos" panose="020B0004020202020204" pitchFamily="34" charset="0"/>
+              </a:rPr>
+              <a:t> Animated Prop (cube), Color Target (sphere), and the world-space button.</a:t>
+            </a:r>
+          </a:p>
+        </p:txBody>
+      </p:sp>
+      <p:pic>
+        <p:nvPicPr>
+          <p:cNvPr id="22" name="Screenshot 2" descr="Screenshot 2">
+            <a:extLst>
+              <a:ext uri="{FF2B5EF4-FFF2-40B4-BE49-F238E27FC236}">
+                <a16:creationId xmlns:a16="http://schemas.microsoft.com/office/drawing/2014/main" id="{6DC9611A-7342-D1A6-13FF-932FF0505D0A}"/>
+              </a:ext>
+            </a:extLst>
+          </p:cNvPr>
+          <p:cNvPicPr>
+            <a:picLocks/>
+          </p:cNvPicPr>
+          <p:nvPr/>
+        </p:nvPicPr>
+        <p:blipFill>
+          <a:blip r:embed="rId3">
+            <a:extLst>
+              <a:ext uri="{28A0092B-C50C-407E-A947-70E740481C1C}">
+                <a14:useLocalDpi xmlns:a14="http://schemas.microsoft.com/office/drawing/2010/main" val="0"/>
+              </a:ext>
+            </a:extLst>
+          </a:blip>
+          <a:stretch>
+            <a:fillRect/>
+          </a:stretch>
+        </p:blipFill>
+        <p:spPr>
+          <a:xfrm>
+            <a:off x="6273800" y="2133600"/>
+            <a:ext cx="5207000" cy="2928938"/>
+          </a:xfrm>
+          <a:prstGeom prst="rect">
+            <a:avLst/>
+          </a:prstGeom>
+          <a:ln w="9525">
+            <a:solidFill>
+              <a:srgbClr val="D5DCD6"/>
+            </a:solidFill>
+          </a:ln>
+        </p:spPr>
+      </p:pic>
+      <p:sp>
+        <p:nvSpPr>
+          <p:cNvPr id="23" name="Caption 2">
+            <a:extLst>
+              <a:ext uri="{FF2B5EF4-FFF2-40B4-BE49-F238E27FC236}">
+                <a16:creationId xmlns:a16="http://schemas.microsoft.com/office/drawing/2014/main" id="{5FAE8ABE-2456-693E-A0F3-BCC017610957}"/>
+              </a:ext>
+            </a:extLst>
+          </p:cNvPr>
+          <p:cNvSpPr txBox="1"/>
+          <p:nvPr/>
+        </p:nvSpPr>
+        <p:spPr>
+          <a:xfrm>
+            <a:off x="6273800" y="5189538"/>
+            <a:ext cx="5207000" cy="369332"/>
+          </a:xfrm>
+          <a:prstGeom prst="rect">
+            <a:avLst/>
+          </a:prstGeom>
+          <a:noFill/>
+        </p:spPr>
+        <p:txBody>
+          <a:bodyPr vert="horz" wrap="square" lIns="0" tIns="0" rIns="0" bIns="0" rtlCol="0">
+            <a:noAutofit/>
+          </a:bodyPr>
+          <a:lstStyle/>
+          <a:p>
+            <a:r>
+              <a:rPr lang="en-US" sz="1100" b="1">
+                <a:solidFill>
+                  <a:srgbClr val="263A33"/>
+                </a:solidFill>
+                <a:latin typeface="Aptos" panose="020B0004020202020204" pitchFamily="34" charset="0"/>
+              </a:rPr>
+              <a:t>Both paths.</a:t>
+            </a:r>
+            <a:r>
+              <a:rPr lang="en-US" sz="1100">
+                <a:solidFill>
+                  <a:srgbClr val="55645D"/>
+                </a:solidFill>
+                <a:latin typeface="Aptos" panose="020B0004020202020204" pitchFamily="34" charset="0"/>
+              </a:rPr>
+              <a:t> The ray turned the sphere gold (C#); the button's On Click() pulsed the cube (Inspector event).</a:t>
+            </a:r>
+          </a:p>
+        </p:txBody>
+      </p:sp>
     </p:spTree>
     <p:extLst>
       <p:ext uri="{BB962C8B-B14F-4D97-AF65-F5344CB8AC3E}">
-        <p14:creationId xmlns:p14="http://schemas.microsoft.com/office/powerpoint/2010/main" val="2069334885"/>
+        <p14:creationId xmlns:p14="http://schemas.microsoft.com/office/powerpoint/2010/main" val="189402477"/>
       </p:ext>
     </p:extLst>
   </p:cSld>
@@ -7464,7 +10874,7 @@
           <p:cNvPr id="2" name="Rectangle 1">
             <a:extLst>
               <a:ext uri="{FF2B5EF4-FFF2-40B4-BE49-F238E27FC236}">
-                <a16:creationId xmlns:a16="http://schemas.microsoft.com/office/drawing/2014/main" id="{8DE566C2-80C8-C35B-D517-4AB4C639C995}"/>
+                <a16:creationId xmlns:a16="http://schemas.microsoft.com/office/drawing/2014/main" id="{9D4E422D-1360-7DC3-C73B-DD1E25C4DD79}"/>
               </a:ext>
             </a:extLst>
           </p:cNvPr>
@@ -7532,7 +10942,7 @@
           <p:cNvPr id="3" name="Rectangle 2">
             <a:extLst>
               <a:ext uri="{FF2B5EF4-FFF2-40B4-BE49-F238E27FC236}">
-                <a16:creationId xmlns:a16="http://schemas.microsoft.com/office/drawing/2014/main" id="{1CD22913-7470-FE2F-0653-DC57C543A987}"/>
+                <a16:creationId xmlns:a16="http://schemas.microsoft.com/office/drawing/2014/main" id="{921BFDCB-1C6B-2324-3F5B-9C7B8EE6842E}"/>
               </a:ext>
             </a:extLst>
           </p:cNvPr>
@@ -7548,7 +10958,7 @@
             <a:avLst/>
           </a:prstGeom>
           <a:solidFill>
-            <a:srgbClr val="D49B2E"/>
+            <a:srgbClr val="4C82A5"/>
           </a:solidFill>
           <a:ln w="19050" cap="flat" cmpd="sng" algn="ctr">
             <a:noFill/>
@@ -7600,7 +11010,7 @@
           <p:cNvPr id="4" name="TextBox 3">
             <a:extLst>
               <a:ext uri="{FF2B5EF4-FFF2-40B4-BE49-F238E27FC236}">
-                <a16:creationId xmlns:a16="http://schemas.microsoft.com/office/drawing/2014/main" id="{1FC7BB5E-FBA9-9584-09AB-67298E21B1E5}"/>
+                <a16:creationId xmlns:a16="http://schemas.microsoft.com/office/drawing/2014/main" id="{AE0B1D79-2201-F045-1DDA-E782B5F935C0}"/>
               </a:ext>
             </a:extLst>
           </p:cNvPr>
@@ -7626,11 +11036,11 @@
             <a:r>
               <a:rPr lang="en-US" sz="1100" b="1">
                 <a:solidFill>
-                  <a:srgbClr val="D49B2E"/>
+                  <a:srgbClr val="4C82A5"/>
                 </a:solidFill>
                 <a:latin typeface="Aptos" panose="020B0004020202020204" pitchFamily="34" charset="0"/>
               </a:rPr>
-              <a:t>WEEK 11  /  CHAPTER 7</a:t>
+              <a:t>WEEK 10  /  CHAPTER 6</a:t>
             </a:r>
           </a:p>
         </p:txBody>
@@ -7640,7 +11050,7 @@
           <p:cNvPr id="5" name="TextBox 4">
             <a:extLst>
               <a:ext uri="{FF2B5EF4-FFF2-40B4-BE49-F238E27FC236}">
-                <a16:creationId xmlns:a16="http://schemas.microsoft.com/office/drawing/2014/main" id="{B96E84CB-DC42-95D1-6A73-92820228C3DF}"/>
+                <a16:creationId xmlns:a16="http://schemas.microsoft.com/office/drawing/2014/main" id="{06D47F9A-F6F4-E715-9FD3-3740CA7E2911}"/>
               </a:ext>
             </a:extLst>
           </p:cNvPr>
@@ -7670,7 +11080,7 @@
                 </a:solidFill>
                 <a:latin typeface="Aptos Display" panose="020B0004020202020204" pitchFamily="34" charset="0"/>
               </a:rPr>
-              <a:t>Sound and VFX</a:t>
+              <a:t>Interactive AR</a:t>
             </a:r>
           </a:p>
         </p:txBody>
@@ -7680,7 +11090,7 @@
           <p:cNvPr id="6" name="TextBox 5">
             <a:extLst>
               <a:ext uri="{FF2B5EF4-FFF2-40B4-BE49-F238E27FC236}">
-                <a16:creationId xmlns:a16="http://schemas.microsoft.com/office/drawing/2014/main" id="{B0695FEE-52F6-5A28-0889-5207217E28EC}"/>
+                <a16:creationId xmlns:a16="http://schemas.microsoft.com/office/drawing/2014/main" id="{50A238E8-8D6F-7794-053C-FCD73C97FA8F}"/>
               </a:ext>
             </a:extLst>
           </p:cNvPr>
@@ -7710,7 +11120,7 @@
                 </a:solidFill>
                 <a:latin typeface="Aptos" panose="020B0004020202020204" pitchFamily="34" charset="0"/>
               </a:rPr>
-              <a:t>Resonance Garden turns distance and contact into spatial sound and particle feedback.</a:t>
+              <a:t>Build a tabletop placement flow with touch, C# selection, and a compact control UI.</a:t>
             </a:r>
           </a:p>
         </p:txBody>
@@ -7720,7 +11130,7 @@
           <p:cNvPr id="7" name="Rectangle 6">
             <a:extLst>
               <a:ext uri="{FF2B5EF4-FFF2-40B4-BE49-F238E27FC236}">
-                <a16:creationId xmlns:a16="http://schemas.microsoft.com/office/drawing/2014/main" id="{D869F751-C9C6-A060-BB30-C18A912955EE}"/>
+                <a16:creationId xmlns:a16="http://schemas.microsoft.com/office/drawing/2014/main" id="{CD21C8FD-C157-31FE-5086-38E79989010E}"/>
               </a:ext>
             </a:extLst>
           </p:cNvPr>
@@ -7788,7 +11198,7 @@
           <p:cNvPr id="8" name="TextBox 7">
             <a:extLst>
               <a:ext uri="{FF2B5EF4-FFF2-40B4-BE49-F238E27FC236}">
-                <a16:creationId xmlns:a16="http://schemas.microsoft.com/office/drawing/2014/main" id="{914E4D98-B890-D3D5-DD14-FF4C3374F627}"/>
+                <a16:creationId xmlns:a16="http://schemas.microsoft.com/office/drawing/2014/main" id="{6D8F1193-29AA-F8C7-758E-3E01C960D979}"/>
               </a:ext>
             </a:extLst>
           </p:cNvPr>
@@ -7814,7 +11224,7 @@
             <a:r>
               <a:rPr lang="en-US" sz="1000" b="1">
                 <a:solidFill>
-                  <a:srgbClr val="D49B2E"/>
+                  <a:srgbClr val="4C82A5"/>
                 </a:solidFill>
                 <a:latin typeface="Aptos" panose="020B0004020202020204" pitchFamily="34" charset="0"/>
               </a:rPr>
@@ -7828,7 +11238,7 @@
           <p:cNvPr id="9" name="TextBox 8">
             <a:extLst>
               <a:ext uri="{FF2B5EF4-FFF2-40B4-BE49-F238E27FC236}">
-                <a16:creationId xmlns:a16="http://schemas.microsoft.com/office/drawing/2014/main" id="{4990EA14-E3AC-0466-8264-1F2621E271DB}"/>
+                <a16:creationId xmlns:a16="http://schemas.microsoft.com/office/drawing/2014/main" id="{978EBE77-A481-1526-14D0-D87DC045E97B}"/>
               </a:ext>
             </a:extLst>
           </p:cNvPr>
@@ -7858,10 +11268,10 @@
                 </a:solidFill>
                 <a:latin typeface="Aptos" panose="020B0004020202020204" pitchFamily="34" charset="0"/>
               </a:rPr>
-              <a:t>- Three procedural tones at distinct pitches
-- AudioSources spatialized and routed to a mixer group
-- Slider controls exposed feedback level
-- Trigger entry plays a particle burst once</a:t>
+              <a:t>- Detect a plane and place a primitive prefab
+- Tap to select; swap, delete, reset, toggle planes
+- AR Foundation 5.1.5 with ARCore / ARKit providers
+- Editor mouse + ground-plane fallback</a:t>
             </a:r>
           </a:p>
         </p:txBody>
@@ -7871,7 +11281,7 @@
           <p:cNvPr id="10" name="Rectangle 9">
             <a:extLst>
               <a:ext uri="{FF2B5EF4-FFF2-40B4-BE49-F238E27FC236}">
-                <a16:creationId xmlns:a16="http://schemas.microsoft.com/office/drawing/2014/main" id="{14A42322-6F8B-9980-E515-3CFFBDFFFC16}"/>
+                <a16:creationId xmlns:a16="http://schemas.microsoft.com/office/drawing/2014/main" id="{49A7454D-AFF5-F44D-F036-EFFF3B4EA62E}"/>
               </a:ext>
             </a:extLst>
           </p:cNvPr>
@@ -7939,7 +11349,7 @@
           <p:cNvPr id="11" name="TextBox 10">
             <a:extLst>
               <a:ext uri="{FF2B5EF4-FFF2-40B4-BE49-F238E27FC236}">
-                <a16:creationId xmlns:a16="http://schemas.microsoft.com/office/drawing/2014/main" id="{8861F4F3-C1B5-4C5A-C410-2DB91743DA03}"/>
+                <a16:creationId xmlns:a16="http://schemas.microsoft.com/office/drawing/2014/main" id="{28740A88-F168-160F-73DE-C833D984931A}"/>
               </a:ext>
             </a:extLst>
           </p:cNvPr>
@@ -7969,7 +11379,7 @@
                 </a:solidFill>
                 <a:latin typeface="Aptos" panose="020B0004020202020204" pitchFamily="34" charset="0"/>
               </a:rPr>
-              <a:t>LISTEN + OBSERVE</a:t>
+              <a:t>VERIFY THE LOOP</a:t>
             </a:r>
           </a:p>
         </p:txBody>
@@ -7979,7 +11389,7 @@
           <p:cNvPr id="12" name="TextBox 11">
             <a:extLst>
               <a:ext uri="{FF2B5EF4-FFF2-40B4-BE49-F238E27FC236}">
-                <a16:creationId xmlns:a16="http://schemas.microsoft.com/office/drawing/2014/main" id="{51304AE8-6414-E707-EDD4-F5107E7C5D94}"/>
+                <a16:creationId xmlns:a16="http://schemas.microsoft.com/office/drawing/2014/main" id="{63A2EDB5-3FC9-6A2F-AA8E-B367607BA45C}"/>
               </a:ext>
             </a:extLst>
           </p:cNvPr>
@@ -8009,9 +11419,9 @@
                 </a:solidFill>
                 <a:latin typeface="Aptos" panose="020B0004020202020204" pitchFamily="34" charset="0"/>
               </a:rPr>
-              <a:t>1  Enter each beacon; compare pitch and burst.
-2  Move away; listen for distance attenuation.
-3  Lower mixer to -30 dB; compare level.</a:t>
+              <a:t>1  Scan until a plane is tracked; place a prefab.
+2  Select it and swap variants in place.
+3  Check delete, reset, and plane visibility.</a:t>
             </a:r>
           </a:p>
         </p:txBody>
@@ -8021,7 +11431,7 @@
           <p:cNvPr id="13" name="TextBox 12">
             <a:extLst>
               <a:ext uri="{FF2B5EF4-FFF2-40B4-BE49-F238E27FC236}">
-                <a16:creationId xmlns:a16="http://schemas.microsoft.com/office/drawing/2014/main" id="{0CEB0A69-877B-8CAD-FEF8-243B62499292}"/>
+                <a16:creationId xmlns:a16="http://schemas.microsoft.com/office/drawing/2014/main" id="{67B0215F-F63E-F57F-E840-7DF258FB6D04}"/>
               </a:ext>
             </a:extLst>
           </p:cNvPr>
@@ -8061,7 +11471,7 @@
           <p:cNvPr id="14" name="TextBox 13">
             <a:extLst>
               <a:ext uri="{FF2B5EF4-FFF2-40B4-BE49-F238E27FC236}">
-                <a16:creationId xmlns:a16="http://schemas.microsoft.com/office/drawing/2014/main" id="{790A0EA2-B4CA-F36F-337F-FEBA7BD12130}"/>
+                <a16:creationId xmlns:a16="http://schemas.microsoft.com/office/drawing/2014/main" id="{E30A5351-9A42-E604-5C0C-CC31EFD33AA2}"/>
               </a:ext>
             </a:extLst>
           </p:cNvPr>
@@ -8091,7 +11501,7 @@
                 </a:solidFill>
                 <a:latin typeface="Aptos" panose="020B0004020202020204" pitchFamily="34" charset="0"/>
               </a:rPr>
-              <a:t>Evidence of pitch, distance, and mix tests</a:t>
+              <a:t>Device/Editor evidence + reflection</a:t>
             </a:r>
           </a:p>
         </p:txBody>
@@ -8101,7 +11511,7 @@
           <p:cNvPr id="15" name="Rectangle 14">
             <a:extLst>
               <a:ext uri="{FF2B5EF4-FFF2-40B4-BE49-F238E27FC236}">
-                <a16:creationId xmlns:a16="http://schemas.microsoft.com/office/drawing/2014/main" id="{FA90866B-6109-D47E-DB2C-CBB930481E0B}"/>
+                <a16:creationId xmlns:a16="http://schemas.microsoft.com/office/drawing/2014/main" id="{232D8E86-21B6-5DC1-3331-517CADF07D60}"/>
               </a:ext>
             </a:extLst>
           </p:cNvPr>
@@ -8169,7 +11579,7 @@
           <p:cNvPr id="16" name="TextBox 15">
             <a:extLst>
               <a:ext uri="{FF2B5EF4-FFF2-40B4-BE49-F238E27FC236}">
-                <a16:creationId xmlns:a16="http://schemas.microsoft.com/office/drawing/2014/main" id="{FA7BA45A-FAB9-915A-D43C-4BFEE1C6EE5E}"/>
+                <a16:creationId xmlns:a16="http://schemas.microsoft.com/office/drawing/2014/main" id="{7A9F70B9-EF49-A444-1BD7-645590D52122}"/>
               </a:ext>
             </a:extLst>
           </p:cNvPr>
@@ -8209,7 +11619,7 @@
           <p:cNvPr id="17" name="TextBox 16">
             <a:extLst>
               <a:ext uri="{FF2B5EF4-FFF2-40B4-BE49-F238E27FC236}">
-                <a16:creationId xmlns:a16="http://schemas.microsoft.com/office/drawing/2014/main" id="{FAF7E50F-281F-C8C6-6B8B-B0201DC258E2}"/>
+                <a16:creationId xmlns:a16="http://schemas.microsoft.com/office/drawing/2014/main" id="{F8C47F6E-0F6B-2996-76CB-86AC727D8150}"/>
               </a:ext>
             </a:extLst>
           </p:cNvPr>
@@ -8247,7 +11657,7 @@
     </p:spTree>
     <p:extLst>
       <p:ext uri="{BB962C8B-B14F-4D97-AF65-F5344CB8AC3E}">
-        <p14:creationId xmlns:p14="http://schemas.microsoft.com/office/powerpoint/2010/main" val="907737610"/>
+        <p14:creationId xmlns:p14="http://schemas.microsoft.com/office/powerpoint/2010/main" val="2069334885"/>
       </p:ext>
     </p:extLst>
   </p:cSld>
@@ -8279,7 +11689,7 @@
           <p:cNvPr id="2" name="Rectangle 1">
             <a:extLst>
               <a:ext uri="{FF2B5EF4-FFF2-40B4-BE49-F238E27FC236}">
-                <a16:creationId xmlns:a16="http://schemas.microsoft.com/office/drawing/2014/main" id="{4C5D3F19-9B0A-4545-9C1D-EED35A663B38}"/>
+                <a16:creationId xmlns:a16="http://schemas.microsoft.com/office/drawing/2014/main" id="{9D4E422D-1360-7DC3-C73B-DD1E25C4DD79}"/>
               </a:ext>
             </a:extLst>
           </p:cNvPr>
@@ -8347,7 +11757,7 @@
           <p:cNvPr id="3" name="Rectangle 2">
             <a:extLst>
               <a:ext uri="{FF2B5EF4-FFF2-40B4-BE49-F238E27FC236}">
-                <a16:creationId xmlns:a16="http://schemas.microsoft.com/office/drawing/2014/main" id="{E12186CA-BFE5-09CA-3B4C-A8BDF00E259D}"/>
+                <a16:creationId xmlns:a16="http://schemas.microsoft.com/office/drawing/2014/main" id="{921BFDCB-1C6B-2324-3F5B-9C7B8EE6842E}"/>
               </a:ext>
             </a:extLst>
           </p:cNvPr>
@@ -8363,7 +11773,7 @@
             <a:avLst/>
           </a:prstGeom>
           <a:solidFill>
-            <a:srgbClr val="348775"/>
+            <a:srgbClr val="4C82A5"/>
           </a:solidFill>
           <a:ln w="19050" cap="flat" cmpd="sng" algn="ctr">
             <a:noFill/>
@@ -8415,7 +11825,7 @@
           <p:cNvPr id="4" name="TextBox 3">
             <a:extLst>
               <a:ext uri="{FF2B5EF4-FFF2-40B4-BE49-F238E27FC236}">
-                <a16:creationId xmlns:a16="http://schemas.microsoft.com/office/drawing/2014/main" id="{30548713-4D66-0BE0-F929-39913BF070A7}"/>
+                <a16:creationId xmlns:a16="http://schemas.microsoft.com/office/drawing/2014/main" id="{AE0B1D79-2201-F045-1DDA-E782B5F935C0}"/>
               </a:ext>
             </a:extLst>
           </p:cNvPr>
@@ -8441,11 +11851,11 @@
             <a:r>
               <a:rPr lang="en-US" sz="1100" b="1">
                 <a:solidFill>
-                  <a:srgbClr val="348775"/>
+                  <a:srgbClr val="4C82A5"/>
                 </a:solidFill>
                 <a:latin typeface="Aptos" panose="020B0004020202020204" pitchFamily="34" charset="0"/>
               </a:rPr>
-              <a:t>WEEK 12  /  CHAPTER 8</a:t>
+              <a:t>WEEK 10  /  CHAPTER 6  /  IN THE SCENE</a:t>
             </a:r>
           </a:p>
         </p:txBody>
@@ -8455,7 +11865,7 @@
           <p:cNvPr id="5" name="TextBox 4">
             <a:extLst>
               <a:ext uri="{FF2B5EF4-FFF2-40B4-BE49-F238E27FC236}">
-                <a16:creationId xmlns:a16="http://schemas.microsoft.com/office/drawing/2014/main" id="{7AEFC3D4-CBA9-98D1-AB2E-3716241CDBD2}"/>
+                <a16:creationId xmlns:a16="http://schemas.microsoft.com/office/drawing/2014/main" id="{06D47F9A-F6F4-E715-9FD3-3740CA7E2911}"/>
               </a:ext>
             </a:extLst>
           </p:cNvPr>
@@ -8485,7 +11895,7 @@
                 </a:solidFill>
                 <a:latin typeface="Aptos Display" panose="020B0004020202020204" pitchFamily="34" charset="0"/>
               </a:rPr>
-              <a:t>Advanced XR: head-gaze dwell</a:t>
+              <a:t>Place, swap, select, delete</a:t>
             </a:r>
           </a:p>
         </p:txBody>
@@ -8495,7 +11905,7 @@
           <p:cNvPr id="6" name="TextBox 5">
             <a:extLst>
               <a:ext uri="{FF2B5EF4-FFF2-40B4-BE49-F238E27FC236}">
-                <a16:creationId xmlns:a16="http://schemas.microsoft.com/office/drawing/2014/main" id="{2C45CA81-15ED-66C7-D926-DD7CCFE6966F}"/>
+                <a16:creationId xmlns:a16="http://schemas.microsoft.com/office/drawing/2014/main" id="{50A238E8-8D6F-7794-053C-FCD73C97FA8F}"/>
               </a:ext>
             </a:extLst>
           </p:cNvPr>
@@ -8525,17 +11935,17 @@
                 </a:solidFill>
                 <a:latin typeface="Aptos" panose="020B0004020202020204" pitchFamily="34" charset="0"/>
               </a:rPr>
-              <a:t>A camera ray and dwell timer create a hardware-neutral gaze interaction.</a:t>
-            </a:r>
-          </a:p>
-        </p:txBody>
-      </p:sp>
-      <p:sp>
-        <p:nvSpPr>
-          <p:cNvPr id="7" name="Rectangle 6">
-            <a:extLst>
-              <a:ext uri="{FF2B5EF4-FFF2-40B4-BE49-F238E27FC236}">
-                <a16:creationId xmlns:a16="http://schemas.microsoft.com/office/drawing/2014/main" id="{39F8A440-3502-737D-2B1C-F5BE4D5D0447}"/>
+              <a:t>Assets/Scenes/InteractiveAR_EditorFallback.unity  |  7 of 7 checks passed in a Windows build (no phone)</a:t>
+            </a:r>
+          </a:p>
+        </p:txBody>
+      </p:sp>
+      <p:sp>
+        <p:nvSpPr>
+          <p:cNvPr id="15" name="Rectangle 14">
+            <a:extLst>
+              <a:ext uri="{FF2B5EF4-FFF2-40B4-BE49-F238E27FC236}">
+                <a16:creationId xmlns:a16="http://schemas.microsoft.com/office/drawing/2014/main" id="{232D8E86-21B6-5DC1-3331-517CADF07D60}"/>
               </a:ext>
             </a:extLst>
           </p:cNvPr>
@@ -8544,14 +11954,14 @@
         </p:nvSpPr>
         <p:spPr>
           <a:xfrm>
-            <a:off x="711200" y="2209800"/>
-            <a:ext cx="6680200" cy="3429000"/>
+            <a:off x="609600" y="6350000"/>
+            <a:ext cx="10972800" cy="12700"/>
           </a:xfrm>
           <a:prstGeom prst="rect">
             <a:avLst/>
           </a:prstGeom>
           <a:solidFill>
-            <a:srgbClr val="FFFEFA"/>
+            <a:srgbClr val="D5DCD6"/>
           </a:solidFill>
           <a:ln w="19050" cap="flat" cmpd="sng" algn="ctr">
             <a:noFill/>
@@ -8600,10 +12010,10 @@
       </p:sp>
       <p:sp>
         <p:nvSpPr>
-          <p:cNvPr id="8" name="TextBox 7">
-            <a:extLst>
-              <a:ext uri="{FF2B5EF4-FFF2-40B4-BE49-F238E27FC236}">
-                <a16:creationId xmlns:a16="http://schemas.microsoft.com/office/drawing/2014/main" id="{E15B7EE7-0E63-ACF5-6140-BBF60ADB4F47}"/>
+          <p:cNvPr id="16" name="TextBox 15">
+            <a:extLst>
+              <a:ext uri="{FF2B5EF4-FFF2-40B4-BE49-F238E27FC236}">
+                <a16:creationId xmlns:a16="http://schemas.microsoft.com/office/drawing/2014/main" id="{7A9F70B9-EF49-A444-1BD7-645590D52122}"/>
               </a:ext>
             </a:extLst>
           </p:cNvPr>
@@ -8612,8 +12022,8 @@
         </p:nvSpPr>
         <p:spPr>
           <a:xfrm>
-            <a:off x="990600" y="2463800"/>
-            <a:ext cx="5715000" cy="153888"/>
+            <a:off x="609600" y="6489700"/>
+            <a:ext cx="8890000" cy="138499"/>
           </a:xfrm>
           <a:prstGeom prst="rect">
             <a:avLst/>
@@ -8627,23 +12037,23 @@
           <a:lstStyle/>
           <a:p>
             <a:r>
-              <a:rPr lang="en-US" sz="1000" b="1">
-                <a:solidFill>
-                  <a:srgbClr val="348775"/>
+              <a:rPr lang="en-US" sz="900" b="1">
+                <a:solidFill>
+                  <a:srgbClr val="55645D"/>
                 </a:solidFill>
                 <a:latin typeface="Aptos" panose="020B0004020202020204" pitchFamily="34" charset="0"/>
               </a:rPr>
-              <a:t>STUDENTS BUILD</a:t>
-            </a:r>
-          </a:p>
-        </p:txBody>
-      </p:sp>
-      <p:sp>
-        <p:nvSpPr>
-          <p:cNvPr id="9" name="TextBox 8">
-            <a:extLst>
-              <a:ext uri="{FF2B5EF4-FFF2-40B4-BE49-F238E27FC236}">
-                <a16:creationId xmlns:a16="http://schemas.microsoft.com/office/drawing/2014/main" id="{D643C0BF-8F1F-2919-5D1C-693852A79406}"/>
+              <a:t>CIST 1423  /  UNITY XR LABS</a:t>
+            </a:r>
+          </a:p>
+        </p:txBody>
+      </p:sp>
+      <p:sp>
+        <p:nvSpPr>
+          <p:cNvPr id="17" name="TextBox 16">
+            <a:extLst>
+              <a:ext uri="{FF2B5EF4-FFF2-40B4-BE49-F238E27FC236}">
+                <a16:creationId xmlns:a16="http://schemas.microsoft.com/office/drawing/2014/main" id="{F8C47F6E-0F6B-2996-76CB-86AC727D8150}"/>
               </a:ext>
             </a:extLst>
           </p:cNvPr>
@@ -8652,8 +12062,8 @@
         </p:nvSpPr>
         <p:spPr>
           <a:xfrm>
-            <a:off x="990600" y="2857500"/>
-            <a:ext cx="6032500" cy="984885"/>
+            <a:off x="10985500" y="6451600"/>
+            <a:ext cx="571500" cy="169277"/>
           </a:xfrm>
           <a:prstGeom prst="rect">
             <a:avLst/>
@@ -8667,387 +12077,6 @@
           <a:lstStyle/>
           <a:p>
             <a:r>
-              <a:rPr lang="en-US" sz="1600">
-                <a:solidFill>
-                  <a:srgbClr val="263A33"/>
-                </a:solidFill>
-                <a:latin typeface="Aptos" panose="020B0004020202020204" pitchFamily="34" charset="0"/>
-              </a:rPr>
-              <a:t>- Look at a collider target for 1.2 seconds
-- Fill indicator tracks dwell progress
-- Completion event drives selection feedback
-- Mouse-position fallback works without headset</a:t>
-            </a:r>
-          </a:p>
-        </p:txBody>
-      </p:sp>
-      <p:sp>
-        <p:nvSpPr>
-          <p:cNvPr id="10" name="Rectangle 9">
-            <a:extLst>
-              <a:ext uri="{FF2B5EF4-FFF2-40B4-BE49-F238E27FC236}">
-                <a16:creationId xmlns:a16="http://schemas.microsoft.com/office/drawing/2014/main" id="{3DB1749D-9621-5FEB-A555-D333630DC321}"/>
-              </a:ext>
-            </a:extLst>
-          </p:cNvPr>
-          <p:cNvSpPr/>
-          <p:nvPr/>
-        </p:nvSpPr>
-        <p:spPr>
-          <a:xfrm>
-            <a:off x="7721600" y="2209800"/>
-            <a:ext cx="3759200" cy="3581400"/>
-          </a:xfrm>
-          <a:prstGeom prst="rect">
-            <a:avLst/>
-          </a:prstGeom>
-          <a:solidFill>
-            <a:srgbClr val="1D3D35"/>
-          </a:solidFill>
-          <a:ln w="19050" cap="flat" cmpd="sng" algn="ctr">
-            <a:noFill/>
-            <a:prstDash val="solid"/>
-            <a:miter lim="800000"/>
-          </a:ln>
-          <a:effectLst/>
-          <a:extLst>
-            <a:ext uri="{91240B29-F687-4F45-9708-019B960494DF}">
-              <a14:hiddenLine xmlns:a14="http://schemas.microsoft.com/office/drawing/2010/main" w="19050" cap="flat" cmpd="sng" algn="ctr">
-                <a:solidFill>
-                  <a:schemeClr val="accent1">
-                    <a:shade val="15000"/>
-                  </a:schemeClr>
-                </a:solidFill>
-                <a:prstDash val="solid"/>
-                <a:miter lim="800000"/>
-              </a14:hiddenLine>
-            </a:ext>
-          </a:extLst>
-        </p:spPr>
-        <p:style>
-          <a:lnRef idx="2">
-            <a:schemeClr val="accent1">
-              <a:shade val="15000"/>
-            </a:schemeClr>
-          </a:lnRef>
-          <a:fillRef idx="1">
-            <a:schemeClr val="accent1"/>
-          </a:fillRef>
-          <a:effectRef idx="0">
-            <a:schemeClr val="accent1"/>
-          </a:effectRef>
-          <a:fontRef idx="minor">
-            <a:schemeClr val="lt1"/>
-          </a:fontRef>
-        </p:style>
-        <p:txBody>
-          <a:bodyPr rtlCol="0" anchor="ctr"/>
-          <a:lstStyle/>
-          <a:p>
-            <a:pPr algn="ctr"/>
-            <a:endParaRPr lang="en-US"/>
-          </a:p>
-        </p:txBody>
-      </p:sp>
-      <p:sp>
-        <p:nvSpPr>
-          <p:cNvPr id="11" name="TextBox 10">
-            <a:extLst>
-              <a:ext uri="{FF2B5EF4-FFF2-40B4-BE49-F238E27FC236}">
-                <a16:creationId xmlns:a16="http://schemas.microsoft.com/office/drawing/2014/main" id="{CCF90D53-3E73-D575-918C-0579F46FEF42}"/>
-              </a:ext>
-            </a:extLst>
-          </p:cNvPr>
-          <p:cNvSpPr txBox="1"/>
-          <p:nvPr/>
-        </p:nvSpPr>
-        <p:spPr>
-          <a:xfrm>
-            <a:off x="8001000" y="2476500"/>
-            <a:ext cx="3124200" cy="184666"/>
-          </a:xfrm>
-          <a:prstGeom prst="rect">
-            <a:avLst/>
-          </a:prstGeom>
-          <a:noFill/>
-        </p:spPr>
-        <p:txBody>
-          <a:bodyPr vert="horz" wrap="square" lIns="0" tIns="0" rIns="0" bIns="0" rtlCol="0">
-            <a:spAutoFit/>
-          </a:bodyPr>
-          <a:lstStyle/>
-          <a:p>
-            <a:r>
-              <a:rPr lang="en-US" sz="1200" b="1">
-                <a:solidFill>
-                  <a:srgbClr val="F2C16D"/>
-                </a:solidFill>
-                <a:latin typeface="Aptos" panose="020B0004020202020204" pitchFamily="34" charset="0"/>
-              </a:rPr>
-              <a:t>STATE THE LIMIT</a:t>
-            </a:r>
-          </a:p>
-        </p:txBody>
-      </p:sp>
-      <p:sp>
-        <p:nvSpPr>
-          <p:cNvPr id="12" name="TextBox 11">
-            <a:extLst>
-              <a:ext uri="{FF2B5EF4-FFF2-40B4-BE49-F238E27FC236}">
-                <a16:creationId xmlns:a16="http://schemas.microsoft.com/office/drawing/2014/main" id="{E509E1FB-9FB0-691A-6077-5CF39DBF7C08}"/>
-              </a:ext>
-            </a:extLst>
-          </p:cNvPr>
-          <p:cNvSpPr txBox="1"/>
-          <p:nvPr/>
-        </p:nvSpPr>
-        <p:spPr>
-          <a:xfrm>
-            <a:off x="8001000" y="2933700"/>
-            <a:ext cx="3149600" cy="1292662"/>
-          </a:xfrm>
-          <a:prstGeom prst="rect">
-            <a:avLst/>
-          </a:prstGeom>
-          <a:noFill/>
-        </p:spPr>
-        <p:txBody>
-          <a:bodyPr vert="horz" wrap="square" lIns="0" tIns="0" rIns="0" bIns="0" rtlCol="0">
-            <a:spAutoFit/>
-          </a:bodyPr>
-          <a:lstStyle/>
-          <a:p>
-            <a:r>
-              <a:rPr lang="en-US" sz="1400">
-                <a:solidFill>
-                  <a:srgbClr val="F7F4EC"/>
-                </a:solidFill>
-                <a:latin typeface="Aptos" panose="020B0004020202020204" pitchFamily="34" charset="0"/>
-              </a:rPr>
-              <a:t>1  Leave early; progress resets without selection.
-2  Hold gaze; event fires once at completion.
-3  Report device and package versions tested.</a:t>
-            </a:r>
-          </a:p>
-        </p:txBody>
-      </p:sp>
-      <p:sp>
-        <p:nvSpPr>
-          <p:cNvPr id="13" name="TextBox 12">
-            <a:extLst>
-              <a:ext uri="{FF2B5EF4-FFF2-40B4-BE49-F238E27FC236}">
-                <a16:creationId xmlns:a16="http://schemas.microsoft.com/office/drawing/2014/main" id="{E5AC243F-CBA4-CA1B-1922-8809FF401473}"/>
-              </a:ext>
-            </a:extLst>
-          </p:cNvPr>
-          <p:cNvSpPr txBox="1"/>
-          <p:nvPr/>
-        </p:nvSpPr>
-        <p:spPr>
-          <a:xfrm>
-            <a:off x="8001000" y="5029200"/>
-            <a:ext cx="1270000" cy="138499"/>
-          </a:xfrm>
-          <a:prstGeom prst="rect">
-            <a:avLst/>
-          </a:prstGeom>
-          <a:noFill/>
-        </p:spPr>
-        <p:txBody>
-          <a:bodyPr vert="horz" wrap="square" lIns="0" tIns="0" rIns="0" bIns="0" rtlCol="0">
-            <a:spAutoFit/>
-          </a:bodyPr>
-          <a:lstStyle/>
-          <a:p>
-            <a:r>
-              <a:rPr lang="en-US" sz="900" b="1">
-                <a:solidFill>
-                  <a:srgbClr val="AFC7BD"/>
-                </a:solidFill>
-                <a:latin typeface="Aptos" panose="020B0004020202020204" pitchFamily="34" charset="0"/>
-              </a:rPr>
-              <a:t>TURN IN</a:t>
-            </a:r>
-          </a:p>
-        </p:txBody>
-      </p:sp>
-      <p:sp>
-        <p:nvSpPr>
-          <p:cNvPr id="14" name="TextBox 13">
-            <a:extLst>
-              <a:ext uri="{FF2B5EF4-FFF2-40B4-BE49-F238E27FC236}">
-                <a16:creationId xmlns:a16="http://schemas.microsoft.com/office/drawing/2014/main" id="{06E05BE8-7915-1C7C-F227-2D9EA23A6F59}"/>
-              </a:ext>
-            </a:extLst>
-          </p:cNvPr>
-          <p:cNvSpPr txBox="1"/>
-          <p:nvPr/>
-        </p:nvSpPr>
-        <p:spPr>
-          <a:xfrm>
-            <a:off x="8001000" y="5270500"/>
-            <a:ext cx="3149600" cy="169277"/>
-          </a:xfrm>
-          <a:prstGeom prst="rect">
-            <a:avLst/>
-          </a:prstGeom>
-          <a:noFill/>
-        </p:spPr>
-        <p:txBody>
-          <a:bodyPr vert="horz" wrap="square" lIns="0" tIns="0" rIns="0" bIns="0" rtlCol="0">
-            <a:spAutoFit/>
-          </a:bodyPr>
-          <a:lstStyle/>
-          <a:p>
-            <a:r>
-              <a:rPr lang="en-US" sz="1100" b="1">
-                <a:solidFill>
-                  <a:srgbClr val="FFFFFF"/>
-                </a:solidFill>
-                <a:latin typeface="Aptos" panose="020B0004020202020204" pitchFamily="34" charset="0"/>
-              </a:rPr>
-              <a:t>Test checklist + limitation note (not multiplayer)</a:t>
-            </a:r>
-          </a:p>
-        </p:txBody>
-      </p:sp>
-      <p:sp>
-        <p:nvSpPr>
-          <p:cNvPr id="15" name="Rectangle 14">
-            <a:extLst>
-              <a:ext uri="{FF2B5EF4-FFF2-40B4-BE49-F238E27FC236}">
-                <a16:creationId xmlns:a16="http://schemas.microsoft.com/office/drawing/2014/main" id="{69FD3F2F-0491-0D03-E29E-C167A6A839F5}"/>
-              </a:ext>
-            </a:extLst>
-          </p:cNvPr>
-          <p:cNvSpPr/>
-          <p:nvPr/>
-        </p:nvSpPr>
-        <p:spPr>
-          <a:xfrm>
-            <a:off x="609600" y="6350000"/>
-            <a:ext cx="10972800" cy="12700"/>
-          </a:xfrm>
-          <a:prstGeom prst="rect">
-            <a:avLst/>
-          </a:prstGeom>
-          <a:solidFill>
-            <a:srgbClr val="D5DCD6"/>
-          </a:solidFill>
-          <a:ln w="19050" cap="flat" cmpd="sng" algn="ctr">
-            <a:noFill/>
-            <a:prstDash val="solid"/>
-            <a:miter lim="800000"/>
-          </a:ln>
-          <a:effectLst/>
-          <a:extLst>
-            <a:ext uri="{91240B29-F687-4F45-9708-019B960494DF}">
-              <a14:hiddenLine xmlns:a14="http://schemas.microsoft.com/office/drawing/2010/main" w="19050" cap="flat" cmpd="sng" algn="ctr">
-                <a:solidFill>
-                  <a:schemeClr val="accent1">
-                    <a:shade val="15000"/>
-                  </a:schemeClr>
-                </a:solidFill>
-                <a:prstDash val="solid"/>
-                <a:miter lim="800000"/>
-              </a14:hiddenLine>
-            </a:ext>
-          </a:extLst>
-        </p:spPr>
-        <p:style>
-          <a:lnRef idx="2">
-            <a:schemeClr val="accent1">
-              <a:shade val="15000"/>
-            </a:schemeClr>
-          </a:lnRef>
-          <a:fillRef idx="1">
-            <a:schemeClr val="accent1"/>
-          </a:fillRef>
-          <a:effectRef idx="0">
-            <a:schemeClr val="accent1"/>
-          </a:effectRef>
-          <a:fontRef idx="minor">
-            <a:schemeClr val="lt1"/>
-          </a:fontRef>
-        </p:style>
-        <p:txBody>
-          <a:bodyPr rtlCol="0" anchor="ctr"/>
-          <a:lstStyle/>
-          <a:p>
-            <a:pPr algn="ctr"/>
-            <a:endParaRPr lang="en-US"/>
-          </a:p>
-        </p:txBody>
-      </p:sp>
-      <p:sp>
-        <p:nvSpPr>
-          <p:cNvPr id="16" name="TextBox 15">
-            <a:extLst>
-              <a:ext uri="{FF2B5EF4-FFF2-40B4-BE49-F238E27FC236}">
-                <a16:creationId xmlns:a16="http://schemas.microsoft.com/office/drawing/2014/main" id="{94C30F3F-C881-8525-AC0D-8F87B7FEB138}"/>
-              </a:ext>
-            </a:extLst>
-          </p:cNvPr>
-          <p:cNvSpPr txBox="1"/>
-          <p:nvPr/>
-        </p:nvSpPr>
-        <p:spPr>
-          <a:xfrm>
-            <a:off x="609600" y="6489700"/>
-            <a:ext cx="8890000" cy="138499"/>
-          </a:xfrm>
-          <a:prstGeom prst="rect">
-            <a:avLst/>
-          </a:prstGeom>
-          <a:noFill/>
-        </p:spPr>
-        <p:txBody>
-          <a:bodyPr vert="horz" wrap="square" lIns="0" tIns="0" rIns="0" bIns="0" rtlCol="0">
-            <a:spAutoFit/>
-          </a:bodyPr>
-          <a:lstStyle/>
-          <a:p>
-            <a:r>
-              <a:rPr lang="en-US" sz="900" b="1">
-                <a:solidFill>
-                  <a:srgbClr val="55645D"/>
-                </a:solidFill>
-                <a:latin typeface="Aptos" panose="020B0004020202020204" pitchFamily="34" charset="0"/>
-              </a:rPr>
-              <a:t>CIST 1423  /  UNITY XR LABS</a:t>
-            </a:r>
-          </a:p>
-        </p:txBody>
-      </p:sp>
-      <p:sp>
-        <p:nvSpPr>
-          <p:cNvPr id="17" name="TextBox 16">
-            <a:extLst>
-              <a:ext uri="{FF2B5EF4-FFF2-40B4-BE49-F238E27FC236}">
-                <a16:creationId xmlns:a16="http://schemas.microsoft.com/office/drawing/2014/main" id="{5225ADB3-85A6-210C-8913-FBF881FF305B}"/>
-              </a:ext>
-            </a:extLst>
-          </p:cNvPr>
-          <p:cNvSpPr txBox="1"/>
-          <p:nvPr/>
-        </p:nvSpPr>
-        <p:spPr>
-          <a:xfrm>
-            <a:off x="10985500" y="6451600"/>
-            <a:ext cx="571500" cy="169277"/>
-          </a:xfrm>
-          <a:prstGeom prst="rect">
-            <a:avLst/>
-          </a:prstGeom>
-          <a:noFill/>
-        </p:spPr>
-        <p:txBody>
-          <a:bodyPr vert="horz" wrap="square" lIns="0" tIns="0" rIns="0" bIns="0" rtlCol="0">
-            <a:spAutoFit/>
-          </a:bodyPr>
-          <a:lstStyle/>
-          <a:p>
-            <a:r>
               <a:rPr lang="en-US" sz="1100" b="1">
                 <a:solidFill>
                   <a:srgbClr val="55645D"/>
@@ -9059,10 +12088,280 @@
           </a:p>
         </p:txBody>
       </p:sp>
+      <p:pic>
+        <p:nvPicPr>
+          <p:cNvPr id="19" name="Screenshot 1" descr="Screenshot 1">
+            <a:extLst>
+              <a:ext uri="{FF2B5EF4-FFF2-40B4-BE49-F238E27FC236}">
+                <a16:creationId xmlns:a16="http://schemas.microsoft.com/office/drawing/2014/main" id="{8932428F-024D-47EF-64B4-927A288FD2EF}"/>
+              </a:ext>
+            </a:extLst>
+          </p:cNvPr>
+          <p:cNvPicPr>
+            <a:picLocks/>
+          </p:cNvPicPr>
+          <p:nvPr/>
+        </p:nvPicPr>
+        <p:blipFill>
+          <a:blip r:embed="rId2">
+            <a:extLst>
+              <a:ext uri="{28A0092B-C50C-407E-A947-70E740481C1C}">
+                <a14:useLocalDpi xmlns:a14="http://schemas.microsoft.com/office/drawing/2010/main" val="0"/>
+              </a:ext>
+            </a:extLst>
+          </a:blip>
+          <a:stretch>
+            <a:fillRect/>
+          </a:stretch>
+        </p:blipFill>
+        <p:spPr>
+          <a:xfrm>
+            <a:off x="711200" y="2184400"/>
+            <a:ext cx="3454400" cy="1943100"/>
+          </a:xfrm>
+          <a:prstGeom prst="rect">
+            <a:avLst/>
+          </a:prstGeom>
+          <a:ln w="9525">
+            <a:solidFill>
+              <a:srgbClr val="D5DCD6"/>
+            </a:solidFill>
+          </a:ln>
+        </p:spPr>
+      </p:pic>
+      <p:sp>
+        <p:nvSpPr>
+          <p:cNvPr id="20" name="Caption 1">
+            <a:extLst>
+              <a:ext uri="{FF2B5EF4-FFF2-40B4-BE49-F238E27FC236}">
+                <a16:creationId xmlns:a16="http://schemas.microsoft.com/office/drawing/2014/main" id="{DF313296-9708-7750-CDA5-6063BA330830}"/>
+              </a:ext>
+            </a:extLst>
+          </p:cNvPr>
+          <p:cNvSpPr txBox="1"/>
+          <p:nvPr/>
+        </p:nvSpPr>
+        <p:spPr>
+          <a:xfrm>
+            <a:off x="711200" y="4254500"/>
+            <a:ext cx="3454400" cy="369332"/>
+          </a:xfrm>
+          <a:prstGeom prst="rect">
+            <a:avLst/>
+          </a:prstGeom>
+          <a:noFill/>
+        </p:spPr>
+        <p:txBody>
+          <a:bodyPr vert="horz" wrap="square" lIns="0" tIns="0" rIns="0" bIns="0" rtlCol="0">
+            <a:noAutofit/>
+          </a:bodyPr>
+          <a:lstStyle/>
+          <a:p>
+            <a:r>
+              <a:rPr lang="en-US" sz="1100" b="1">
+                <a:solidFill>
+                  <a:srgbClr val="263A33"/>
+                </a:solidFill>
+                <a:latin typeface="Aptos" panose="020B0004020202020204" pitchFamily="34" charset="0"/>
+              </a:rPr>
+              <a:t>Start.</a:t>
+            </a:r>
+            <a:r>
+              <a:rPr lang="en-US" sz="1100">
+                <a:solidFill>
+                  <a:srgbClr val="55645D"/>
+                </a:solidFill>
+                <a:latin typeface="Aptos" panose="020B0004020202020204" pitchFamily="34" charset="0"/>
+              </a:rPr>
+              <a:t> The status bar asks for a tap.</a:t>
+            </a:r>
+          </a:p>
+        </p:txBody>
+      </p:sp>
+      <p:pic>
+        <p:nvPicPr>
+          <p:cNvPr id="22" name="Screenshot 2" descr="Screenshot 2">
+            <a:extLst>
+              <a:ext uri="{FF2B5EF4-FFF2-40B4-BE49-F238E27FC236}">
+                <a16:creationId xmlns:a16="http://schemas.microsoft.com/office/drawing/2014/main" id="{723C9AEC-E4B3-3E7D-7CEA-48FCEE08F0F5}"/>
+              </a:ext>
+            </a:extLst>
+          </p:cNvPr>
+          <p:cNvPicPr>
+            <a:picLocks/>
+          </p:cNvPicPr>
+          <p:nvPr/>
+        </p:nvPicPr>
+        <p:blipFill>
+          <a:blip r:embed="rId3">
+            <a:extLst>
+              <a:ext uri="{28A0092B-C50C-407E-A947-70E740481C1C}">
+                <a14:useLocalDpi xmlns:a14="http://schemas.microsoft.com/office/drawing/2010/main" val="0"/>
+              </a:ext>
+            </a:extLst>
+          </a:blip>
+          <a:stretch>
+            <a:fillRect/>
+          </a:stretch>
+        </p:blipFill>
+        <p:spPr>
+          <a:xfrm>
+            <a:off x="4368800" y="2184400"/>
+            <a:ext cx="3454400" cy="1943100"/>
+          </a:xfrm>
+          <a:prstGeom prst="rect">
+            <a:avLst/>
+          </a:prstGeom>
+          <a:ln w="9525">
+            <a:solidFill>
+              <a:srgbClr val="D5DCD6"/>
+            </a:solidFill>
+          </a:ln>
+        </p:spPr>
+      </p:pic>
+      <p:sp>
+        <p:nvSpPr>
+          <p:cNvPr id="23" name="Caption 2">
+            <a:extLst>
+              <a:ext uri="{FF2B5EF4-FFF2-40B4-BE49-F238E27FC236}">
+                <a16:creationId xmlns:a16="http://schemas.microsoft.com/office/drawing/2014/main" id="{746480A7-3790-63F6-65FB-661D4841CE23}"/>
+              </a:ext>
+            </a:extLst>
+          </p:cNvPr>
+          <p:cNvSpPr txBox="1"/>
+          <p:nvPr/>
+        </p:nvSpPr>
+        <p:spPr>
+          <a:xfrm>
+            <a:off x="4368800" y="4254500"/>
+            <a:ext cx="3454400" cy="369332"/>
+          </a:xfrm>
+          <a:prstGeom prst="rect">
+            <a:avLst/>
+          </a:prstGeom>
+          <a:noFill/>
+        </p:spPr>
+        <p:txBody>
+          <a:bodyPr vert="horz" wrap="square" lIns="0" tIns="0" rIns="0" bIns="0" rtlCol="0">
+            <a:noAutofit/>
+          </a:bodyPr>
+          <a:lstStyle/>
+          <a:p>
+            <a:r>
+              <a:rPr lang="en-US" sz="1100" b="1">
+                <a:solidFill>
+                  <a:srgbClr val="263A33"/>
+                </a:solidFill>
+                <a:latin typeface="Aptos" panose="020B0004020202020204" pitchFamily="34" charset="0"/>
+              </a:rPr>
+              <a:t>Placed and swapped.</a:t>
+            </a:r>
+            <a:r>
+              <a:rPr lang="en-US" sz="1100">
+                <a:solidFill>
+                  <a:srgbClr val="55645D"/>
+                </a:solidFill>
+                <a:latin typeface="Aptos" panose="020B0004020202020204" pitchFamily="34" charset="0"/>
+              </a:rPr>
+              <a:t> Three variants; the sphere is selected (1.08x highlight).</a:t>
+            </a:r>
+          </a:p>
+        </p:txBody>
+      </p:sp>
+      <p:pic>
+        <p:nvPicPr>
+          <p:cNvPr id="25" name="Screenshot 3" descr="Screenshot 3">
+            <a:extLst>
+              <a:ext uri="{FF2B5EF4-FFF2-40B4-BE49-F238E27FC236}">
+                <a16:creationId xmlns:a16="http://schemas.microsoft.com/office/drawing/2014/main" id="{83F87789-FCB2-0F87-5368-72EB7C955953}"/>
+              </a:ext>
+            </a:extLst>
+          </p:cNvPr>
+          <p:cNvPicPr>
+            <a:picLocks/>
+          </p:cNvPicPr>
+          <p:nvPr/>
+        </p:nvPicPr>
+        <p:blipFill>
+          <a:blip r:embed="rId4">
+            <a:extLst>
+              <a:ext uri="{28A0092B-C50C-407E-A947-70E740481C1C}">
+                <a14:useLocalDpi xmlns:a14="http://schemas.microsoft.com/office/drawing/2010/main" val="0"/>
+              </a:ext>
+            </a:extLst>
+          </a:blip>
+          <a:stretch>
+            <a:fillRect/>
+          </a:stretch>
+        </p:blipFill>
+        <p:spPr>
+          <a:xfrm>
+            <a:off x="8026400" y="2184400"/>
+            <a:ext cx="3454400" cy="1943100"/>
+          </a:xfrm>
+          <a:prstGeom prst="rect">
+            <a:avLst/>
+          </a:prstGeom>
+          <a:ln w="9525">
+            <a:solidFill>
+              <a:srgbClr val="D5DCD6"/>
+            </a:solidFill>
+          </a:ln>
+        </p:spPr>
+      </p:pic>
+      <p:sp>
+        <p:nvSpPr>
+          <p:cNvPr id="26" name="Caption 3">
+            <a:extLst>
+              <a:ext uri="{FF2B5EF4-FFF2-40B4-BE49-F238E27FC236}">
+                <a16:creationId xmlns:a16="http://schemas.microsoft.com/office/drawing/2014/main" id="{05524FEB-F266-4394-D024-3A0BF475A06D}"/>
+              </a:ext>
+            </a:extLst>
+          </p:cNvPr>
+          <p:cNvSpPr txBox="1"/>
+          <p:nvPr/>
+        </p:nvSpPr>
+        <p:spPr>
+          <a:xfrm>
+            <a:off x="8026400" y="4254500"/>
+            <a:ext cx="3454400" cy="369332"/>
+          </a:xfrm>
+          <a:prstGeom prst="rect">
+            <a:avLst/>
+          </a:prstGeom>
+          <a:noFill/>
+        </p:spPr>
+        <p:txBody>
+          <a:bodyPr vert="horz" wrap="square" lIns="0" tIns="0" rIns="0" bIns="0" rtlCol="0">
+            <a:noAutofit/>
+          </a:bodyPr>
+          <a:lstStyle/>
+          <a:p>
+            <a:r>
+              <a:rPr lang="en-US" sz="1100" b="1">
+                <a:solidFill>
+                  <a:srgbClr val="263A33"/>
+                </a:solidFill>
+                <a:latin typeface="Aptos" panose="020B0004020202020204" pitchFamily="34" charset="0"/>
+              </a:rPr>
+              <a:t>After Delete.</a:t>
+            </a:r>
+            <a:r>
+              <a:rPr lang="en-US" sz="1100">
+                <a:solidFill>
+                  <a:srgbClr val="55645D"/>
+                </a:solidFill>
+                <a:latin typeface="Aptos" panose="020B0004020202020204" pitchFamily="34" charset="0"/>
+              </a:rPr>
+              <a:t> Only the selected sphere is gone. Reset returns to Cube.</a:t>
+            </a:r>
+          </a:p>
+        </p:txBody>
+      </p:sp>
     </p:spTree>
     <p:extLst>
       <p:ext uri="{BB962C8B-B14F-4D97-AF65-F5344CB8AC3E}">
-        <p14:creationId xmlns:p14="http://schemas.microsoft.com/office/powerpoint/2010/main" val="324516039"/>
+        <p14:creationId xmlns:p14="http://schemas.microsoft.com/office/powerpoint/2010/main" val="3646110745"/>
       </p:ext>
     </p:extLst>
   </p:cSld>
@@ -9094,7 +12393,7 @@
           <p:cNvPr id="2" name="Rectangle 1">
             <a:extLst>
               <a:ext uri="{FF2B5EF4-FFF2-40B4-BE49-F238E27FC236}">
-                <a16:creationId xmlns:a16="http://schemas.microsoft.com/office/drawing/2014/main" id="{6CF71C1A-7C52-4709-3584-DA2834E83ED7}"/>
+                <a16:creationId xmlns:a16="http://schemas.microsoft.com/office/drawing/2014/main" id="{8DE566C2-80C8-C35B-D517-4AB4C639C995}"/>
               </a:ext>
             </a:extLst>
           </p:cNvPr>
@@ -9162,7 +12461,7 @@
           <p:cNvPr id="3" name="Rectangle 2">
             <a:extLst>
               <a:ext uri="{FF2B5EF4-FFF2-40B4-BE49-F238E27FC236}">
-                <a16:creationId xmlns:a16="http://schemas.microsoft.com/office/drawing/2014/main" id="{4B4A3D1D-1CA3-3FE3-1CAC-FB1E7494F187}"/>
+                <a16:creationId xmlns:a16="http://schemas.microsoft.com/office/drawing/2014/main" id="{1CD22913-7470-FE2F-0653-DC57C543A987}"/>
               </a:ext>
             </a:extLst>
           </p:cNvPr>
@@ -9178,7 +12477,7 @@
             <a:avLst/>
           </a:prstGeom>
           <a:solidFill>
-            <a:srgbClr val="745C3B"/>
+            <a:srgbClr val="D49B2E"/>
           </a:solidFill>
           <a:ln w="19050" cap="flat" cmpd="sng" algn="ctr">
             <a:noFill/>
@@ -9230,7 +12529,7 @@
           <p:cNvPr id="4" name="TextBox 3">
             <a:extLst>
               <a:ext uri="{FF2B5EF4-FFF2-40B4-BE49-F238E27FC236}">
-                <a16:creationId xmlns:a16="http://schemas.microsoft.com/office/drawing/2014/main" id="{3D0D9195-D90A-25BB-4913-BE49FED81EFD}"/>
+                <a16:creationId xmlns:a16="http://schemas.microsoft.com/office/drawing/2014/main" id="{1FC7BB5E-FBA9-9584-09AB-67298E21B1E5}"/>
               </a:ext>
             </a:extLst>
           </p:cNvPr>
@@ -9256,11 +12555,11 @@
             <a:r>
               <a:rPr lang="en-US" sz="1100" b="1">
                 <a:solidFill>
-                  <a:srgbClr val="745C3B"/>
+                  <a:srgbClr val="D49B2E"/>
                 </a:solidFill>
                 <a:latin typeface="Aptos" panose="020B0004020202020204" pitchFamily="34" charset="0"/>
               </a:rPr>
-              <a:t>WEEK 13  /  CHAPTER 9</a:t>
+              <a:t>WEEK 11  /  CHAPTER 7</a:t>
             </a:r>
           </a:p>
         </p:txBody>
@@ -9270,7 +12569,7 @@
           <p:cNvPr id="5" name="TextBox 4">
             <a:extLst>
               <a:ext uri="{FF2B5EF4-FFF2-40B4-BE49-F238E27FC236}">
-                <a16:creationId xmlns:a16="http://schemas.microsoft.com/office/drawing/2014/main" id="{54B1DD26-7E89-861D-713B-1933176E2878}"/>
+                <a16:creationId xmlns:a16="http://schemas.microsoft.com/office/drawing/2014/main" id="{B96E84CB-DC42-95D1-6A73-92820228C3DF}"/>
               </a:ext>
             </a:extLst>
           </p:cNvPr>
@@ -9300,7 +12599,7 @@
                 </a:solidFill>
                 <a:latin typeface="Aptos Display" panose="020B0004020202020204" pitchFamily="34" charset="0"/>
               </a:rPr>
-              <a:t>Comfort, validation, and review</a:t>
+              <a:t>Sound and VFX</a:t>
             </a:r>
           </a:p>
         </p:txBody>
@@ -9310,7 +12609,7 @@
           <p:cNvPr id="6" name="TextBox 5">
             <a:extLst>
               <a:ext uri="{FF2B5EF4-FFF2-40B4-BE49-F238E27FC236}">
-                <a16:creationId xmlns:a16="http://schemas.microsoft.com/office/drawing/2014/main" id="{4E04C44F-3508-A5D1-D715-C61436A6E0C3}"/>
+                <a16:creationId xmlns:a16="http://schemas.microsoft.com/office/drawing/2014/main" id="{B0695FEE-52F6-5A28-0889-5207217E28EC}"/>
               </a:ext>
             </a:extLst>
           </p:cNvPr>
@@ -9340,7 +12639,7 @@
                 </a:solidFill>
                 <a:latin typeface="Aptos" panose="020B0004020202020204" pitchFamily="34" charset="0"/>
               </a:rPr>
-              <a:t>Apply lifecycle thinking to a prior project; the helper records observations, not comfort certification.</a:t>
+              <a:t>Resonance Garden turns distance and contact into spatial sound and particle feedback.</a:t>
             </a:r>
           </a:p>
         </p:txBody>
@@ -9350,7 +12649,7 @@
           <p:cNvPr id="7" name="Rectangle 6">
             <a:extLst>
               <a:ext uri="{FF2B5EF4-FFF2-40B4-BE49-F238E27FC236}">
-                <a16:creationId xmlns:a16="http://schemas.microsoft.com/office/drawing/2014/main" id="{6009743F-906F-AAAE-55BB-04AF21875773}"/>
+                <a16:creationId xmlns:a16="http://schemas.microsoft.com/office/drawing/2014/main" id="{D869F751-C9C6-A060-BB30-C18A912955EE}"/>
               </a:ext>
             </a:extLst>
           </p:cNvPr>
@@ -9418,7 +12717,7 @@
           <p:cNvPr id="8" name="TextBox 7">
             <a:extLst>
               <a:ext uri="{FF2B5EF4-FFF2-40B4-BE49-F238E27FC236}">
-                <a16:creationId xmlns:a16="http://schemas.microsoft.com/office/drawing/2014/main" id="{563A3436-E9E1-804A-318E-21406483D648}"/>
+                <a16:creationId xmlns:a16="http://schemas.microsoft.com/office/drawing/2014/main" id="{914E4D98-B890-D3D5-DD14-FF4C3374F627}"/>
               </a:ext>
             </a:extLst>
           </p:cNvPr>
@@ -9444,7 +12743,7 @@
             <a:r>
               <a:rPr lang="en-US" sz="1000" b="1">
                 <a:solidFill>
-                  <a:srgbClr val="745C3B"/>
+                  <a:srgbClr val="D49B2E"/>
                 </a:solidFill>
                 <a:latin typeface="Aptos" panose="020B0004020202020204" pitchFamily="34" charset="0"/>
               </a:rPr>
@@ -9458,7 +12757,7 @@
           <p:cNvPr id="9" name="TextBox 8">
             <a:extLst>
               <a:ext uri="{FF2B5EF4-FFF2-40B4-BE49-F238E27FC236}">
-                <a16:creationId xmlns:a16="http://schemas.microsoft.com/office/drawing/2014/main" id="{9521B6BD-973F-4350-FA90-6E20DA690802}"/>
+                <a16:creationId xmlns:a16="http://schemas.microsoft.com/office/drawing/2014/main" id="{4990EA14-E3AC-0466-8264-1F2621E271DB}"/>
               </a:ext>
             </a:extLst>
           </p:cNvPr>
@@ -9488,10 +12787,10 @@
                 </a:solidFill>
                 <a:latin typeface="Aptos" panose="020B0004020202020204" pitchFamily="34" charset="0"/>
               </a:rPr>
-              <a:t>- Review locomotion, reach, UI, access, recovery, performance
-- Write observation -&gt; impact -&gt; change -&gt; retest
-- Compare toolkits using dated primary sources
-- Make one focused change and review a peer PR</a:t>
+              <a:t>- Three procedural tones at distinct pitches
+- AudioSources spatialized and routed to a mixer group
+- Slider controls exposed feedback level
+- Trigger entry plays a particle burst once</a:t>
             </a:r>
           </a:p>
         </p:txBody>
@@ -9501,7 +12800,7 @@
           <p:cNvPr id="10" name="Rectangle 9">
             <a:extLst>
               <a:ext uri="{FF2B5EF4-FFF2-40B4-BE49-F238E27FC236}">
-                <a16:creationId xmlns:a16="http://schemas.microsoft.com/office/drawing/2014/main" id="{A7083CC1-F3B4-BA90-38D1-26001411D197}"/>
+                <a16:creationId xmlns:a16="http://schemas.microsoft.com/office/drawing/2014/main" id="{14A42322-6F8B-9980-E515-3CFFBDFFFC16}"/>
               </a:ext>
             </a:extLst>
           </p:cNvPr>
@@ -9569,7 +12868,7 @@
           <p:cNvPr id="11" name="TextBox 10">
             <a:extLst>
               <a:ext uri="{FF2B5EF4-FFF2-40B4-BE49-F238E27FC236}">
-                <a16:creationId xmlns:a16="http://schemas.microsoft.com/office/drawing/2014/main" id="{D59DFED4-1FE9-844F-1902-21DD1ADCDFBA}"/>
+                <a16:creationId xmlns:a16="http://schemas.microsoft.com/office/drawing/2014/main" id="{8861F4F3-C1B5-4C5A-C410-2DB91743DA03}"/>
               </a:ext>
             </a:extLst>
           </p:cNvPr>
@@ -9599,7 +12898,7 @@
                 </a:solidFill>
                 <a:latin typeface="Aptos" panose="020B0004020202020204" pitchFamily="34" charset="0"/>
               </a:rPr>
-              <a:t>EVIDENCE OVER CLAIMS</a:t>
+              <a:t>LISTEN + OBSERVE</a:t>
             </a:r>
           </a:p>
         </p:txBody>
@@ -9609,7 +12908,7 @@
           <p:cNvPr id="12" name="TextBox 11">
             <a:extLst>
               <a:ext uri="{FF2B5EF4-FFF2-40B4-BE49-F238E27FC236}">
-                <a16:creationId xmlns:a16="http://schemas.microsoft.com/office/drawing/2014/main" id="{67EC189F-DA4F-3594-245D-645D5C4D66B0}"/>
+                <a16:creationId xmlns:a16="http://schemas.microsoft.com/office/drawing/2014/main" id="{51304AE8-6414-E707-EDD4-F5107E7C5D94}"/>
               </a:ext>
             </a:extLst>
           </p:cNvPr>
@@ -9639,9 +12938,9 @@
                 </a:solidFill>
                 <a:latin typeface="Aptos" panose="020B0004020202020204" pitchFamily="34" charset="0"/>
               </a:rPr>
-              <a:t>1  Test common tasks on intended setup.
-2  Record before/after result and limitations.
-3  Reviewer checks evidence and regression risk.</a:t>
+              <a:t>1  Enter each beacon; compare pitch and burst.
+2  Move away; listen for distance attenuation.
+3  Lower mixer to -30 dB; compare level.</a:t>
             </a:r>
           </a:p>
         </p:txBody>
@@ -9651,7 +12950,7 @@
           <p:cNvPr id="13" name="TextBox 12">
             <a:extLst>
               <a:ext uri="{FF2B5EF4-FFF2-40B4-BE49-F238E27FC236}">
-                <a16:creationId xmlns:a16="http://schemas.microsoft.com/office/drawing/2014/main" id="{9E7FC8ED-52FB-CEA2-ADD4-06FA4813B69C}"/>
+                <a16:creationId xmlns:a16="http://schemas.microsoft.com/office/drawing/2014/main" id="{0CEB0A69-877B-8CAD-FEF8-243B62499292}"/>
               </a:ext>
             </a:extLst>
           </p:cNvPr>
@@ -9691,7 +12990,7 @@
           <p:cNvPr id="14" name="TextBox 13">
             <a:extLst>
               <a:ext uri="{FF2B5EF4-FFF2-40B4-BE49-F238E27FC236}">
-                <a16:creationId xmlns:a16="http://schemas.microsoft.com/office/drawing/2014/main" id="{C75CAA81-C5A5-B38E-CE14-D04B4BDEBB6B}"/>
+                <a16:creationId xmlns:a16="http://schemas.microsoft.com/office/drawing/2014/main" id="{790A0EA2-B4CA-F36F-337F-FEBA7BD12130}"/>
               </a:ext>
             </a:extLst>
           </p:cNvPr>
@@ -9701,7 +13000,7 @@
         <p:spPr>
           <a:xfrm>
             <a:off x="8001000" y="5270500"/>
-            <a:ext cx="3149600" cy="338554"/>
+            <a:ext cx="3149600" cy="169277"/>
           </a:xfrm>
           <a:prstGeom prst="rect">
             <a:avLst/>
@@ -9721,7 +13020,7 @@
                 </a:solidFill>
                 <a:latin typeface="Aptos" panose="020B0004020202020204" pitchFamily="34" charset="0"/>
               </a:rPr>
-              <a:t>Revised scene + report + toolkit note + peer review</a:t>
+              <a:t>Evidence of pitch, distance, and mix tests</a:t>
             </a:r>
           </a:p>
         </p:txBody>
@@ -9731,7 +13030,7 @@
           <p:cNvPr id="15" name="Rectangle 14">
             <a:extLst>
               <a:ext uri="{FF2B5EF4-FFF2-40B4-BE49-F238E27FC236}">
-                <a16:creationId xmlns:a16="http://schemas.microsoft.com/office/drawing/2014/main" id="{82072329-E1F5-21C6-2E4F-D9BA33A49AF5}"/>
+                <a16:creationId xmlns:a16="http://schemas.microsoft.com/office/drawing/2014/main" id="{FA90866B-6109-D47E-DB2C-CBB930481E0B}"/>
               </a:ext>
             </a:extLst>
           </p:cNvPr>
@@ -9799,7 +13098,7 @@
           <p:cNvPr id="16" name="TextBox 15">
             <a:extLst>
               <a:ext uri="{FF2B5EF4-FFF2-40B4-BE49-F238E27FC236}">
-                <a16:creationId xmlns:a16="http://schemas.microsoft.com/office/drawing/2014/main" id="{219A8351-6C1B-8009-F4F2-E05DAE250D59}"/>
+                <a16:creationId xmlns:a16="http://schemas.microsoft.com/office/drawing/2014/main" id="{FA7BA45A-FAB9-915A-D43C-4BFEE1C6EE5E}"/>
               </a:ext>
             </a:extLst>
           </p:cNvPr>
@@ -9839,7 +13138,7 @@
           <p:cNvPr id="17" name="TextBox 16">
             <a:extLst>
               <a:ext uri="{FF2B5EF4-FFF2-40B4-BE49-F238E27FC236}">
-                <a16:creationId xmlns:a16="http://schemas.microsoft.com/office/drawing/2014/main" id="{514EB5D0-C3DD-77D6-DF99-37EA3EA0BA50}"/>
+                <a16:creationId xmlns:a16="http://schemas.microsoft.com/office/drawing/2014/main" id="{FAF7E50F-281F-C8C6-6B8B-B0201DC258E2}"/>
               </a:ext>
             </a:extLst>
           </p:cNvPr>
@@ -9877,7 +13176,7 @@
     </p:spTree>
     <p:extLst>
       <p:ext uri="{BB962C8B-B14F-4D97-AF65-F5344CB8AC3E}">
-        <p14:creationId xmlns:p14="http://schemas.microsoft.com/office/powerpoint/2010/main" val="2672870864"/>
+        <p14:creationId xmlns:p14="http://schemas.microsoft.com/office/powerpoint/2010/main" val="907737610"/>
       </p:ext>
     </p:extLst>
   </p:cSld>
@@ -9909,7 +13208,7 @@
           <p:cNvPr id="2" name="Rectangle 1">
             <a:extLst>
               <a:ext uri="{FF2B5EF4-FFF2-40B4-BE49-F238E27FC236}">
-                <a16:creationId xmlns:a16="http://schemas.microsoft.com/office/drawing/2014/main" id="{02FB3057-8C73-2048-BA1C-AF2594F3972E}"/>
+                <a16:creationId xmlns:a16="http://schemas.microsoft.com/office/drawing/2014/main" id="{8DE566C2-80C8-C35B-D517-4AB4C639C995}"/>
               </a:ext>
             </a:extLst>
           </p:cNvPr>
@@ -9925,7 +13224,7 @@
             <a:avLst/>
           </a:prstGeom>
           <a:solidFill>
-            <a:srgbClr val="173C35"/>
+            <a:srgbClr val="F3F1E9"/>
           </a:solidFill>
           <a:ln w="19050" cap="flat" cmpd="sng" algn="ctr">
             <a:noFill/>
@@ -9974,130 +13273,10 @@
       </p:sp>
       <p:sp>
         <p:nvSpPr>
-          <p:cNvPr id="3" name="TextBox 2">
-            <a:extLst>
-              <a:ext uri="{FF2B5EF4-FFF2-40B4-BE49-F238E27FC236}">
-                <a16:creationId xmlns:a16="http://schemas.microsoft.com/office/drawing/2014/main" id="{BC198F79-6EBE-9150-5862-F169615CB3A8}"/>
-              </a:ext>
-            </a:extLst>
-          </p:cNvPr>
-          <p:cNvSpPr txBox="1"/>
-          <p:nvPr/>
-        </p:nvSpPr>
-        <p:spPr>
-          <a:xfrm>
-            <a:off x="736600" y="546100"/>
-            <a:ext cx="10414000" cy="169277"/>
-          </a:xfrm>
-          <a:prstGeom prst="rect">
-            <a:avLst/>
-          </a:prstGeom>
-          <a:noFill/>
-        </p:spPr>
-        <p:txBody>
-          <a:bodyPr vert="horz" wrap="square" lIns="0" tIns="0" rIns="0" bIns="0" rtlCol="0">
-            <a:spAutoFit/>
-          </a:bodyPr>
-          <a:lstStyle/>
-          <a:p>
-            <a:r>
-              <a:rPr lang="en-US" sz="1100" b="1">
-                <a:solidFill>
-                  <a:srgbClr val="F2C16D"/>
-                </a:solidFill>
-                <a:latin typeface="Aptos" panose="020B0004020202020204" pitchFamily="34" charset="0"/>
-              </a:rPr>
-              <a:t>THE FIVE PROJECTS, ONE PRACTICE</a:t>
-            </a:r>
-          </a:p>
-        </p:txBody>
-      </p:sp>
-      <p:sp>
-        <p:nvSpPr>
-          <p:cNvPr id="4" name="TextBox 3">
-            <a:extLst>
-              <a:ext uri="{FF2B5EF4-FFF2-40B4-BE49-F238E27FC236}">
-                <a16:creationId xmlns:a16="http://schemas.microsoft.com/office/drawing/2014/main" id="{8C0AB4E9-FE8D-8C86-7E21-486D0B0829EC}"/>
-              </a:ext>
-            </a:extLst>
-          </p:cNvPr>
-          <p:cNvSpPr txBox="1"/>
-          <p:nvPr/>
-        </p:nvSpPr>
-        <p:spPr>
-          <a:xfrm>
-            <a:off x="736600" y="1016000"/>
-            <a:ext cx="10414000" cy="523220"/>
-          </a:xfrm>
-          <a:prstGeom prst="rect">
-            <a:avLst/>
-          </a:prstGeom>
-          <a:noFill/>
-        </p:spPr>
-        <p:txBody>
-          <a:bodyPr vert="horz" wrap="square" lIns="0" tIns="0" rIns="0" bIns="0" rtlCol="0">
-            <a:spAutoFit/>
-          </a:bodyPr>
-          <a:lstStyle/>
-          <a:p>
-            <a:r>
-              <a:rPr lang="en-US" sz="3400" b="1">
-                <a:solidFill>
-                  <a:srgbClr val="FFFDF7"/>
-                </a:solidFill>
-                <a:latin typeface="Aptos Display" panose="020B0004020202020204" pitchFamily="34" charset="0"/>
-              </a:rPr>
-              <a:t>Make every claim testable.</a:t>
-            </a:r>
-          </a:p>
-        </p:txBody>
-      </p:sp>
-      <p:sp>
-        <p:nvSpPr>
-          <p:cNvPr id="5" name="TextBox 4">
-            <a:extLst>
-              <a:ext uri="{FF2B5EF4-FFF2-40B4-BE49-F238E27FC236}">
-                <a16:creationId xmlns:a16="http://schemas.microsoft.com/office/drawing/2014/main" id="{2CFB731E-26C7-1407-E84E-71C257626893}"/>
-              </a:ext>
-            </a:extLst>
-          </p:cNvPr>
-          <p:cNvSpPr txBox="1"/>
-          <p:nvPr/>
-        </p:nvSpPr>
-        <p:spPr>
-          <a:xfrm>
-            <a:off x="736600" y="1803400"/>
-            <a:ext cx="10414000" cy="246221"/>
-          </a:xfrm>
-          <a:prstGeom prst="rect">
-            <a:avLst/>
-          </a:prstGeom>
-          <a:noFill/>
-        </p:spPr>
-        <p:txBody>
-          <a:bodyPr vert="horz" wrap="square" lIns="0" tIns="0" rIns="0" bIns="0" rtlCol="0">
-            <a:spAutoFit/>
-          </a:bodyPr>
-          <a:lstStyle/>
-          <a:p>
-            <a:r>
-              <a:rPr lang="en-US" sz="1600">
-                <a:solidFill>
-                  <a:srgbClr val="C8D8D0"/>
-                </a:solidFill>
-                <a:latin typeface="Aptos" panose="020B0004020202020204" pitchFamily="34" charset="0"/>
-              </a:rPr>
-              <a:t>The sequence moves from authored interaction to device-aware validation and collaborative review.</a:t>
-            </a:r>
-          </a:p>
-        </p:txBody>
-      </p:sp>
-      <p:sp>
-        <p:nvSpPr>
-          <p:cNvPr id="6" name="Rectangle 5">
-            <a:extLst>
-              <a:ext uri="{FF2B5EF4-FFF2-40B4-BE49-F238E27FC236}">
-                <a16:creationId xmlns:a16="http://schemas.microsoft.com/office/drawing/2014/main" id="{0165A2E7-5C2C-25D8-3242-326986C09E33}"/>
+          <p:cNvPr id="3" name="Rectangle 2">
+            <a:extLst>
+              <a:ext uri="{FF2B5EF4-FFF2-40B4-BE49-F238E27FC236}">
+                <a16:creationId xmlns:a16="http://schemas.microsoft.com/office/drawing/2014/main" id="{1CD22913-7470-FE2F-0653-DC57C543A987}"/>
               </a:ext>
             </a:extLst>
           </p:cNvPr>
@@ -10106,14 +13285,14 @@
         </p:nvSpPr>
         <p:spPr>
           <a:xfrm>
-            <a:off x="787400" y="2717800"/>
-            <a:ext cx="10566400" cy="558800"/>
+            <a:off x="0" y="0"/>
+            <a:ext cx="177800" cy="6858000"/>
           </a:xfrm>
           <a:prstGeom prst="rect">
             <a:avLst/>
           </a:prstGeom>
           <a:solidFill>
-            <a:srgbClr val="224B42"/>
+            <a:srgbClr val="D49B2E"/>
           </a:solidFill>
           <a:ln w="19050" cap="flat" cmpd="sng" algn="ctr">
             <a:noFill/>
@@ -10162,10 +13341,130 @@
       </p:sp>
       <p:sp>
         <p:nvSpPr>
-          <p:cNvPr id="7" name="Rectangle 6">
-            <a:extLst>
-              <a:ext uri="{FF2B5EF4-FFF2-40B4-BE49-F238E27FC236}">
-                <a16:creationId xmlns:a16="http://schemas.microsoft.com/office/drawing/2014/main" id="{5886E5CC-8A1D-DF1B-4E5B-CF4AD17076C5}"/>
+          <p:cNvPr id="4" name="TextBox 3">
+            <a:extLst>
+              <a:ext uri="{FF2B5EF4-FFF2-40B4-BE49-F238E27FC236}">
+                <a16:creationId xmlns:a16="http://schemas.microsoft.com/office/drawing/2014/main" id="{1FC7BB5E-FBA9-9584-09AB-67298E21B1E5}"/>
+              </a:ext>
+            </a:extLst>
+          </p:cNvPr>
+          <p:cNvSpPr txBox="1"/>
+          <p:nvPr/>
+        </p:nvSpPr>
+        <p:spPr>
+          <a:xfrm>
+            <a:off x="711200" y="444500"/>
+            <a:ext cx="8890000" cy="169277"/>
+          </a:xfrm>
+          <a:prstGeom prst="rect">
+            <a:avLst/>
+          </a:prstGeom>
+          <a:noFill/>
+        </p:spPr>
+        <p:txBody>
+          <a:bodyPr vert="horz" wrap="square" lIns="0" tIns="0" rIns="0" bIns="0" rtlCol="0">
+            <a:spAutoFit/>
+          </a:bodyPr>
+          <a:lstStyle/>
+          <a:p>
+            <a:r>
+              <a:rPr lang="en-US" sz="1100" b="1">
+                <a:solidFill>
+                  <a:srgbClr val="D49B2E"/>
+                </a:solidFill>
+                <a:latin typeface="Aptos" panose="020B0004020202020204" pitchFamily="34" charset="0"/>
+              </a:rPr>
+              <a:t>WEEK 11  /  CHAPTER 7  /  IN THE SCENE</a:t>
+            </a:r>
+          </a:p>
+        </p:txBody>
+      </p:sp>
+      <p:sp>
+        <p:nvSpPr>
+          <p:cNvPr id="5" name="TextBox 4">
+            <a:extLst>
+              <a:ext uri="{FF2B5EF4-FFF2-40B4-BE49-F238E27FC236}">
+                <a16:creationId xmlns:a16="http://schemas.microsoft.com/office/drawing/2014/main" id="{B96E84CB-DC42-95D1-6A73-92820228C3DF}"/>
+              </a:ext>
+            </a:extLst>
+          </p:cNvPr>
+          <p:cNvSpPr txBox="1"/>
+          <p:nvPr/>
+        </p:nvSpPr>
+        <p:spPr>
+          <a:xfrm>
+            <a:off x="711200" y="850900"/>
+            <a:ext cx="10668000" cy="446276"/>
+          </a:xfrm>
+          <a:prstGeom prst="rect">
+            <a:avLst/>
+          </a:prstGeom>
+          <a:noFill/>
+        </p:spPr>
+        <p:txBody>
+          <a:bodyPr vert="horz" wrap="square" lIns="0" tIns="0" rIns="0" bIns="0" rtlCol="0">
+            <a:spAutoFit/>
+          </a:bodyPr>
+          <a:lstStyle/>
+          <a:p>
+            <a:r>
+              <a:rPr lang="en-US" sz="2900" b="1">
+                <a:solidFill>
+                  <a:srgbClr val="1A302A"/>
+                </a:solidFill>
+                <a:latin typeface="Aptos Display" panose="020B0004020202020204" pitchFamily="34" charset="0"/>
+              </a:rPr>
+              <a:t>Each beacon sounds, bursts, and mixes</a:t>
+            </a:r>
+          </a:p>
+        </p:txBody>
+      </p:sp>
+      <p:sp>
+        <p:nvSpPr>
+          <p:cNvPr id="6" name="TextBox 5">
+            <a:extLst>
+              <a:ext uri="{FF2B5EF4-FFF2-40B4-BE49-F238E27FC236}">
+                <a16:creationId xmlns:a16="http://schemas.microsoft.com/office/drawing/2014/main" id="{B0695FEE-52F6-5A28-0889-5207217E28EC}"/>
+              </a:ext>
+            </a:extLst>
+          </p:cNvPr>
+          <p:cNvSpPr txBox="1"/>
+          <p:nvPr/>
+        </p:nvSpPr>
+        <p:spPr>
+          <a:xfrm>
+            <a:off x="736600" y="1511300"/>
+            <a:ext cx="10414000" cy="215444"/>
+          </a:xfrm>
+          <a:prstGeom prst="rect">
+            <a:avLst/>
+          </a:prstGeom>
+          <a:noFill/>
+        </p:spPr>
+        <p:txBody>
+          <a:bodyPr vert="horz" wrap="square" lIns="0" tIns="0" rIns="0" bIns="0" rtlCol="0">
+            <a:spAutoFit/>
+          </a:bodyPr>
+          <a:lstStyle/>
+          <a:p>
+            <a:r>
+              <a:rPr lang="en-US" sz="1400">
+                <a:solidFill>
+                  <a:srgbClr val="55645D"/>
+                </a:solidFill>
+                <a:latin typeface="Aptos" panose="020B0004020202020204" pitchFamily="34" charset="0"/>
+              </a:rPr>
+              <a:t>Assets/Scenes/ResonanceGarden.unity  |  16 of 16 checks passed in a Windows build</a:t>
+            </a:r>
+          </a:p>
+        </p:txBody>
+      </p:sp>
+      <p:sp>
+        <p:nvSpPr>
+          <p:cNvPr id="15" name="Rectangle 14">
+            <a:extLst>
+              <a:ext uri="{FF2B5EF4-FFF2-40B4-BE49-F238E27FC236}">
+                <a16:creationId xmlns:a16="http://schemas.microsoft.com/office/drawing/2014/main" id="{FA90866B-6109-D47E-DB2C-CBB930481E0B}"/>
               </a:ext>
             </a:extLst>
           </p:cNvPr>
@@ -10174,14 +13473,14 @@
         </p:nvSpPr>
         <p:spPr>
           <a:xfrm>
-            <a:off x="787400" y="2717800"/>
-            <a:ext cx="685800" cy="558800"/>
+            <a:off x="609600" y="6350000"/>
+            <a:ext cx="10972800" cy="12700"/>
           </a:xfrm>
           <a:prstGeom prst="rect">
             <a:avLst/>
           </a:prstGeom>
           <a:solidFill>
-            <a:srgbClr val="E46F4F"/>
+            <a:srgbClr val="D5DCD6"/>
           </a:solidFill>
           <a:ln w="19050" cap="flat" cmpd="sng" algn="ctr">
             <a:noFill/>
@@ -10230,10 +13529,10 @@
       </p:sp>
       <p:sp>
         <p:nvSpPr>
-          <p:cNvPr id="8" name="TextBox 7">
-            <a:extLst>
-              <a:ext uri="{FF2B5EF4-FFF2-40B4-BE49-F238E27FC236}">
-                <a16:creationId xmlns:a16="http://schemas.microsoft.com/office/drawing/2014/main" id="{F68B3960-6F61-7F5F-69FC-DDDF5CE75EBC}"/>
+          <p:cNvPr id="16" name="TextBox 15">
+            <a:extLst>
+              <a:ext uri="{FF2B5EF4-FFF2-40B4-BE49-F238E27FC236}">
+                <a16:creationId xmlns:a16="http://schemas.microsoft.com/office/drawing/2014/main" id="{FA7BA45A-FAB9-915A-D43C-4BFEE1C6EE5E}"/>
               </a:ext>
             </a:extLst>
           </p:cNvPr>
@@ -10242,8 +13541,8 @@
         </p:nvSpPr>
         <p:spPr>
           <a:xfrm>
-            <a:off x="965200" y="2882900"/>
-            <a:ext cx="457200" cy="184666"/>
+            <a:off x="609600" y="6489700"/>
+            <a:ext cx="8890000" cy="138499"/>
           </a:xfrm>
           <a:prstGeom prst="rect">
             <a:avLst/>
@@ -10257,23 +13556,23 @@
           <a:lstStyle/>
           <a:p>
             <a:r>
-              <a:rPr lang="en-US" sz="1200" b="1">
-                <a:solidFill>
-                  <a:srgbClr val="FFFFFF"/>
+              <a:rPr lang="en-US" sz="900" b="1">
+                <a:solidFill>
+                  <a:srgbClr val="55645D"/>
                 </a:solidFill>
                 <a:latin typeface="Aptos" panose="020B0004020202020204" pitchFamily="34" charset="0"/>
               </a:rPr>
-              <a:t>09</a:t>
-            </a:r>
-          </a:p>
-        </p:txBody>
-      </p:sp>
-      <p:sp>
-        <p:nvSpPr>
-          <p:cNvPr id="9" name="TextBox 8">
-            <a:extLst>
-              <a:ext uri="{FF2B5EF4-FFF2-40B4-BE49-F238E27FC236}">
-                <a16:creationId xmlns:a16="http://schemas.microsoft.com/office/drawing/2014/main" id="{A78704E9-722B-8EEC-6BE0-FC686EBE7932}"/>
+              <a:t>CIST 1423  /  UNITY XR LABS</a:t>
+            </a:r>
+          </a:p>
+        </p:txBody>
+      </p:sp>
+      <p:sp>
+        <p:nvSpPr>
+          <p:cNvPr id="17" name="TextBox 16">
+            <a:extLst>
+              <a:ext uri="{FF2B5EF4-FFF2-40B4-BE49-F238E27FC236}">
+                <a16:creationId xmlns:a16="http://schemas.microsoft.com/office/drawing/2014/main" id="{FAF7E50F-281F-C8C6-6B8B-B0201DC258E2}"/>
               </a:ext>
             </a:extLst>
           </p:cNvPr>
@@ -10282,8 +13581,8 @@
         </p:nvSpPr>
         <p:spPr>
           <a:xfrm>
-            <a:off x="1727200" y="2857500"/>
-            <a:ext cx="7620000" cy="246221"/>
+            <a:off x="10985500" y="6451600"/>
+            <a:ext cx="571500" cy="169277"/>
           </a:xfrm>
           <a:prstGeom prst="rect">
             <a:avLst/>
@@ -10297,23 +13596,323 @@
           <a:lstStyle/>
           <a:p>
             <a:r>
-              <a:rPr lang="en-US" sz="1600" b="1">
-                <a:solidFill>
-                  <a:srgbClr val="FFFFFF"/>
+              <a:rPr lang="en-US" sz="1100" b="1">
+                <a:solidFill>
+                  <a:srgbClr val="55645D"/>
+                </a:solidFill>
+                <a:latin typeface="Aptos Display" panose="020B0004020202020204" pitchFamily="34" charset="0"/>
+              </a:rPr>
+              <a:t>08</a:t>
+            </a:r>
+          </a:p>
+        </p:txBody>
+      </p:sp>
+      <p:pic>
+        <p:nvPicPr>
+          <p:cNvPr id="19" name="Screenshot 1" descr="Screenshot 1">
+            <a:extLst>
+              <a:ext uri="{FF2B5EF4-FFF2-40B4-BE49-F238E27FC236}">
+                <a16:creationId xmlns:a16="http://schemas.microsoft.com/office/drawing/2014/main" id="{4734A26B-98FD-E9A9-3F8F-912DAF33BC6D}"/>
+              </a:ext>
+            </a:extLst>
+          </p:cNvPr>
+          <p:cNvPicPr>
+            <a:picLocks/>
+          </p:cNvPicPr>
+          <p:nvPr/>
+        </p:nvPicPr>
+        <p:blipFill>
+          <a:blip r:embed="rId2">
+            <a:extLst>
+              <a:ext uri="{28A0092B-C50C-407E-A947-70E740481C1C}">
+                <a14:useLocalDpi xmlns:a14="http://schemas.microsoft.com/office/drawing/2010/main" val="0"/>
+              </a:ext>
+            </a:extLst>
+          </a:blip>
+          <a:stretch>
+            <a:fillRect/>
+          </a:stretch>
+        </p:blipFill>
+        <p:spPr>
+          <a:xfrm>
+            <a:off x="711200" y="2184400"/>
+            <a:ext cx="3454400" cy="1943100"/>
+          </a:xfrm>
+          <a:prstGeom prst="rect">
+            <a:avLst/>
+          </a:prstGeom>
+          <a:ln w="9525">
+            <a:solidFill>
+              <a:srgbClr val="D5DCD6"/>
+            </a:solidFill>
+          </a:ln>
+        </p:spPr>
+      </p:pic>
+      <p:sp>
+        <p:nvSpPr>
+          <p:cNvPr id="20" name="Caption 1">
+            <a:extLst>
+              <a:ext uri="{FF2B5EF4-FFF2-40B4-BE49-F238E27FC236}">
+                <a16:creationId xmlns:a16="http://schemas.microsoft.com/office/drawing/2014/main" id="{DF5E4FF9-9921-C663-0D15-0CAC3191DAB8}"/>
+              </a:ext>
+            </a:extLst>
+          </p:cNvPr>
+          <p:cNvSpPr txBox="1"/>
+          <p:nvPr/>
+        </p:nvSpPr>
+        <p:spPr>
+          <a:xfrm>
+            <a:off x="711200" y="4254500"/>
+            <a:ext cx="3454400" cy="369332"/>
+          </a:xfrm>
+          <a:prstGeom prst="rect">
+            <a:avLst/>
+          </a:prstGeom>
+          <a:noFill/>
+        </p:spPr>
+        <p:txBody>
+          <a:bodyPr vert="horz" wrap="square" lIns="0" tIns="0" rIns="0" bIns="0" rtlCol="0">
+            <a:noAutofit/>
+          </a:bodyPr>
+          <a:lstStyle/>
+          <a:p>
+            <a:r>
+              <a:rPr lang="en-US" sz="1100" b="1">
+                <a:solidFill>
+                  <a:srgbClr val="263A33"/>
                 </a:solidFill>
                 <a:latin typeface="Aptos" panose="020B0004020202020204" pitchFamily="34" charset="0"/>
               </a:rPr>
-              <a:t>Input and event paths</a:t>
-            </a:r>
-          </a:p>
-        </p:txBody>
-      </p:sp>
-      <p:sp>
-        <p:nvSpPr>
-          <p:cNvPr id="10" name="Rectangle 9">
-            <a:extLst>
-              <a:ext uri="{FF2B5EF4-FFF2-40B4-BE49-F238E27FC236}">
-                <a16:creationId xmlns:a16="http://schemas.microsoft.com/office/drawing/2014/main" id="{AFCBFC2D-FE36-8EF7-3C64-DA87FA60BD8A}"/>
+              <a:t>Start.</a:t>
+            </a:r>
+            <a:r>
+              <a:rPr lang="en-US" sz="1100">
+                <a:solidFill>
+                  <a:srgbClr val="55645D"/>
+                </a:solidFill>
+                <a:latin typeface="Aptos" panose="020B0004020202020204" pitchFamily="34" charset="0"/>
+              </a:rPr>
+              <a:t> Three beacons tuned to C4, A4 and E5.</a:t>
+            </a:r>
+          </a:p>
+        </p:txBody>
+      </p:sp>
+      <p:pic>
+        <p:nvPicPr>
+          <p:cNvPr id="22" name="Screenshot 2" descr="Screenshot 2">
+            <a:extLst>
+              <a:ext uri="{FF2B5EF4-FFF2-40B4-BE49-F238E27FC236}">
+                <a16:creationId xmlns:a16="http://schemas.microsoft.com/office/drawing/2014/main" id="{42AD28D9-6CDD-1EC0-5ED9-65C4E865B09F}"/>
+              </a:ext>
+            </a:extLst>
+          </p:cNvPr>
+          <p:cNvPicPr>
+            <a:picLocks/>
+          </p:cNvPicPr>
+          <p:nvPr/>
+        </p:nvPicPr>
+        <p:blipFill>
+          <a:blip r:embed="rId3">
+            <a:extLst>
+              <a:ext uri="{28A0092B-C50C-407E-A947-70E740481C1C}">
+                <a14:useLocalDpi xmlns:a14="http://schemas.microsoft.com/office/drawing/2010/main" val="0"/>
+              </a:ext>
+            </a:extLst>
+          </a:blip>
+          <a:stretch>
+            <a:fillRect/>
+          </a:stretch>
+        </p:blipFill>
+        <p:spPr>
+          <a:xfrm>
+            <a:off x="4368800" y="2184400"/>
+            <a:ext cx="3454400" cy="1943100"/>
+          </a:xfrm>
+          <a:prstGeom prst="rect">
+            <a:avLst/>
+          </a:prstGeom>
+          <a:ln w="9525">
+            <a:solidFill>
+              <a:srgbClr val="D5DCD6"/>
+            </a:solidFill>
+          </a:ln>
+        </p:spPr>
+      </p:pic>
+      <p:sp>
+        <p:nvSpPr>
+          <p:cNvPr id="23" name="Caption 2">
+            <a:extLst>
+              <a:ext uri="{FF2B5EF4-FFF2-40B4-BE49-F238E27FC236}">
+                <a16:creationId xmlns:a16="http://schemas.microsoft.com/office/drawing/2014/main" id="{3600BD33-36E7-8A24-BEFC-99789EB7EC79}"/>
+              </a:ext>
+            </a:extLst>
+          </p:cNvPr>
+          <p:cNvSpPr txBox="1"/>
+          <p:nvPr/>
+        </p:nvSpPr>
+        <p:spPr>
+          <a:xfrm>
+            <a:off x="4368800" y="4254500"/>
+            <a:ext cx="3454400" cy="369332"/>
+          </a:xfrm>
+          <a:prstGeom prst="rect">
+            <a:avLst/>
+          </a:prstGeom>
+          <a:noFill/>
+        </p:spPr>
+        <p:txBody>
+          <a:bodyPr vert="horz" wrap="square" lIns="0" tIns="0" rIns="0" bIns="0" rtlCol="0">
+            <a:noAutofit/>
+          </a:bodyPr>
+          <a:lstStyle/>
+          <a:p>
+            <a:r>
+              <a:rPr lang="en-US" sz="1100" b="1">
+                <a:solidFill>
+                  <a:srgbClr val="263A33"/>
+                </a:solidFill>
+                <a:latin typeface="Aptos" panose="020B0004020202020204" pitchFamily="34" charset="0"/>
+              </a:rPr>
+              <a:t>Entering BeaconLow.</a:t>
+            </a:r>
+            <a:r>
+              <a:rPr lang="en-US" sz="1100">
+                <a:solidFill>
+                  <a:srgbClr val="55645D"/>
+                </a:solidFill>
+                <a:latin typeface="Aptos" panose="020B0004020202020204" pitchFamily="34" charset="0"/>
+              </a:rPr>
+              <a:t> One burst and one tone (heard at 270 Hz). No retrigger inside.</a:t>
+            </a:r>
+          </a:p>
+        </p:txBody>
+      </p:sp>
+      <p:pic>
+        <p:nvPicPr>
+          <p:cNvPr id="25" name="Screenshot 3" descr="Screenshot 3">
+            <a:extLst>
+              <a:ext uri="{FF2B5EF4-FFF2-40B4-BE49-F238E27FC236}">
+                <a16:creationId xmlns:a16="http://schemas.microsoft.com/office/drawing/2014/main" id="{68A491CF-2BED-3126-0FAD-1E3FA8605742}"/>
+              </a:ext>
+            </a:extLst>
+          </p:cNvPr>
+          <p:cNvPicPr>
+            <a:picLocks/>
+          </p:cNvPicPr>
+          <p:nvPr/>
+        </p:nvPicPr>
+        <p:blipFill>
+          <a:blip r:embed="rId4">
+            <a:extLst>
+              <a:ext uri="{28A0092B-C50C-407E-A947-70E740481C1C}">
+                <a14:useLocalDpi xmlns:a14="http://schemas.microsoft.com/office/drawing/2010/main" val="0"/>
+              </a:ext>
+            </a:extLst>
+          </a:blip>
+          <a:stretch>
+            <a:fillRect/>
+          </a:stretch>
+        </p:blipFill>
+        <p:spPr>
+          <a:xfrm>
+            <a:off x="8026400" y="2184400"/>
+            <a:ext cx="3454400" cy="1943100"/>
+          </a:xfrm>
+          <a:prstGeom prst="rect">
+            <a:avLst/>
+          </a:prstGeom>
+          <a:ln w="9525">
+            <a:solidFill>
+              <a:srgbClr val="D5DCD6"/>
+            </a:solidFill>
+          </a:ln>
+        </p:spPr>
+      </p:pic>
+      <p:sp>
+        <p:nvSpPr>
+          <p:cNvPr id="26" name="Caption 3">
+            <a:extLst>
+              <a:ext uri="{FF2B5EF4-FFF2-40B4-BE49-F238E27FC236}">
+                <a16:creationId xmlns:a16="http://schemas.microsoft.com/office/drawing/2014/main" id="{8AC7B977-F3CF-7F4E-3795-5CBD5EE6B68E}"/>
+              </a:ext>
+            </a:extLst>
+          </p:cNvPr>
+          <p:cNvSpPr txBox="1"/>
+          <p:nvPr/>
+        </p:nvSpPr>
+        <p:spPr>
+          <a:xfrm>
+            <a:off x="8026400" y="4254500"/>
+            <a:ext cx="3454400" cy="369332"/>
+          </a:xfrm>
+          <a:prstGeom prst="rect">
+            <a:avLst/>
+          </a:prstGeom>
+          <a:noFill/>
+        </p:spPr>
+        <p:txBody>
+          <a:bodyPr vert="horz" wrap="square" lIns="0" tIns="0" rIns="0" bIns="0" rtlCol="0">
+            <a:noAutofit/>
+          </a:bodyPr>
+          <a:lstStyle/>
+          <a:p>
+            <a:r>
+              <a:rPr lang="en-US" sz="1100" b="1">
+                <a:solidFill>
+                  <a:srgbClr val="263A33"/>
+                </a:solidFill>
+                <a:latin typeface="Aptos" panose="020B0004020202020204" pitchFamily="34" charset="0"/>
+              </a:rPr>
+              <a:t>Slider at -30 dB.</a:t>
+            </a:r>
+            <a:r>
+              <a:rPr lang="en-US" sz="1100">
+                <a:solidFill>
+                  <a:srgbClr val="55645D"/>
+                </a:solidFill>
+                <a:latin typeface="Aptos" panose="020B0004020202020204" pitchFamily="34" charset="0"/>
+              </a:rPr>
+              <a:t> Burst still plays; tone is 32.5 dB quieter at the same pitch.</a:t>
+            </a:r>
+          </a:p>
+        </p:txBody>
+      </p:sp>
+    </p:spTree>
+    <p:extLst>
+      <p:ext uri="{BB962C8B-B14F-4D97-AF65-F5344CB8AC3E}">
+        <p14:creationId xmlns:p14="http://schemas.microsoft.com/office/powerpoint/2010/main" val="1068119374"/>
+      </p:ext>
+    </p:extLst>
+  </p:cSld>
+  <p:clrMapOvr>
+    <a:masterClrMapping/>
+  </p:clrMapOvr>
+</p:sld>
+</file>
+
+<file path=ppt/slides/slide9.xml><?xml version="1.0" encoding="utf-8"?>
+<p:sld xmlns:a="http://schemas.openxmlformats.org/drawingml/2006/main" xmlns:r="http://schemas.openxmlformats.org/officeDocument/2006/relationships" xmlns:p="http://schemas.openxmlformats.org/presentationml/2006/main">
+  <p:cSld>
+    <p:spTree>
+      <p:nvGrpSpPr>
+        <p:cNvPr id="1" name=""/>
+        <p:cNvGrpSpPr/>
+        <p:nvPr/>
+      </p:nvGrpSpPr>
+      <p:grpSpPr>
+        <a:xfrm>
+          <a:off x="0" y="0"/>
+          <a:ext cx="0" cy="0"/>
+          <a:chOff x="0" y="0"/>
+          <a:chExt cx="0" cy="0"/>
+        </a:xfrm>
+      </p:grpSpPr>
+      <p:sp>
+        <p:nvSpPr>
+          <p:cNvPr id="2" name="Rectangle 1">
+            <a:extLst>
+              <a:ext uri="{FF2B5EF4-FFF2-40B4-BE49-F238E27FC236}">
+                <a16:creationId xmlns:a16="http://schemas.microsoft.com/office/drawing/2014/main" id="{4C5D3F19-9B0A-4545-9C1D-EED35A663B38}"/>
               </a:ext>
             </a:extLst>
           </p:cNvPr>
@@ -10322,14 +13921,14 @@
         </p:nvSpPr>
         <p:spPr>
           <a:xfrm>
-            <a:off x="787400" y="3378200"/>
-            <a:ext cx="10566400" cy="558800"/>
+            <a:off x="0" y="0"/>
+            <a:ext cx="12192000" cy="6858000"/>
           </a:xfrm>
           <a:prstGeom prst="rect">
             <a:avLst/>
           </a:prstGeom>
           <a:solidFill>
-            <a:srgbClr val="224B42"/>
+            <a:srgbClr val="F3F1E9"/>
           </a:solidFill>
           <a:ln w="19050" cap="flat" cmpd="sng" algn="ctr">
             <a:noFill/>
@@ -10378,10 +13977,10 @@
       </p:sp>
       <p:sp>
         <p:nvSpPr>
-          <p:cNvPr id="11" name="Rectangle 10">
-            <a:extLst>
-              <a:ext uri="{FF2B5EF4-FFF2-40B4-BE49-F238E27FC236}">
-                <a16:creationId xmlns:a16="http://schemas.microsoft.com/office/drawing/2014/main" id="{952DEFC1-F51A-12E6-F258-F8DFE3C7A990}"/>
+          <p:cNvPr id="3" name="Rectangle 2">
+            <a:extLst>
+              <a:ext uri="{FF2B5EF4-FFF2-40B4-BE49-F238E27FC236}">
+                <a16:creationId xmlns:a16="http://schemas.microsoft.com/office/drawing/2014/main" id="{E12186CA-BFE5-09CA-3B4C-A8BDF00E259D}"/>
               </a:ext>
             </a:extLst>
           </p:cNvPr>
@@ -10390,14 +13989,14 @@
         </p:nvSpPr>
         <p:spPr>
           <a:xfrm>
-            <a:off x="787400" y="3378200"/>
-            <a:ext cx="685800" cy="558800"/>
+            <a:off x="0" y="0"/>
+            <a:ext cx="177800" cy="6858000"/>
           </a:xfrm>
           <a:prstGeom prst="rect">
             <a:avLst/>
           </a:prstGeom>
           <a:solidFill>
-            <a:srgbClr val="4C82A5"/>
+            <a:srgbClr val="348775"/>
           </a:solidFill>
           <a:ln w="19050" cap="flat" cmpd="sng" algn="ctr">
             <a:noFill/>
@@ -10446,10 +14045,10 @@
       </p:sp>
       <p:sp>
         <p:nvSpPr>
-          <p:cNvPr id="12" name="TextBox 11">
-            <a:extLst>
-              <a:ext uri="{FF2B5EF4-FFF2-40B4-BE49-F238E27FC236}">
-                <a16:creationId xmlns:a16="http://schemas.microsoft.com/office/drawing/2014/main" id="{6CF38A54-5D32-42E5-1E9C-D88F29C19C82}"/>
+          <p:cNvPr id="4" name="TextBox 3">
+            <a:extLst>
+              <a:ext uri="{FF2B5EF4-FFF2-40B4-BE49-F238E27FC236}">
+                <a16:creationId xmlns:a16="http://schemas.microsoft.com/office/drawing/2014/main" id="{30548713-4D66-0BE0-F929-39913BF070A7}"/>
               </a:ext>
             </a:extLst>
           </p:cNvPr>
@@ -10458,8 +14057,8 @@
         </p:nvSpPr>
         <p:spPr>
           <a:xfrm>
-            <a:off x="965200" y="3543300"/>
-            <a:ext cx="457200" cy="184666"/>
+            <a:off x="711200" y="444500"/>
+            <a:ext cx="8890000" cy="169277"/>
           </a:xfrm>
           <a:prstGeom prst="rect">
             <a:avLst/>
@@ -10473,23 +14072,23 @@
           <a:lstStyle/>
           <a:p>
             <a:r>
-              <a:rPr lang="en-US" sz="1200" b="1">
-                <a:solidFill>
-                  <a:srgbClr val="FFFFFF"/>
+              <a:rPr lang="en-US" sz="1100" b="1">
+                <a:solidFill>
+                  <a:srgbClr val="348775"/>
                 </a:solidFill>
                 <a:latin typeface="Aptos" panose="020B0004020202020204" pitchFamily="34" charset="0"/>
               </a:rPr>
-              <a:t>10</a:t>
-            </a:r>
-          </a:p>
-        </p:txBody>
-      </p:sp>
-      <p:sp>
-        <p:nvSpPr>
-          <p:cNvPr id="13" name="TextBox 12">
-            <a:extLst>
-              <a:ext uri="{FF2B5EF4-FFF2-40B4-BE49-F238E27FC236}">
-                <a16:creationId xmlns:a16="http://schemas.microsoft.com/office/drawing/2014/main" id="{5E806FE0-FBC7-2CC5-4E36-2B7C62E7122A}"/>
+              <a:t>WEEK 12  /  CHAPTER 8</a:t>
+            </a:r>
+          </a:p>
+        </p:txBody>
+      </p:sp>
+      <p:sp>
+        <p:nvSpPr>
+          <p:cNvPr id="5" name="TextBox 4">
+            <a:extLst>
+              <a:ext uri="{FF2B5EF4-FFF2-40B4-BE49-F238E27FC236}">
+                <a16:creationId xmlns:a16="http://schemas.microsoft.com/office/drawing/2014/main" id="{7AEFC3D4-CBA9-98D1-AB2E-3716241CDBD2}"/>
               </a:ext>
             </a:extLst>
           </p:cNvPr>
@@ -10498,8 +14097,8 @@
         </p:nvSpPr>
         <p:spPr>
           <a:xfrm>
-            <a:off x="1727200" y="3517900"/>
-            <a:ext cx="7620000" cy="246221"/>
+            <a:off x="711200" y="850900"/>
+            <a:ext cx="10668000" cy="446276"/>
           </a:xfrm>
           <a:prstGeom prst="rect">
             <a:avLst/>
@@ -10513,23 +14112,63 @@
           <a:lstStyle/>
           <a:p>
             <a:r>
-              <a:rPr lang="en-US" sz="1600" b="1">
-                <a:solidFill>
-                  <a:srgbClr val="FFFFFF"/>
+              <a:rPr lang="en-US" sz="2900" b="1">
+                <a:solidFill>
+                  <a:srgbClr val="1A302A"/>
+                </a:solidFill>
+                <a:latin typeface="Aptos Display" panose="020B0004020202020204" pitchFamily="34" charset="0"/>
+              </a:rPr>
+              <a:t>Advanced XR: head-gaze dwell</a:t>
+            </a:r>
+          </a:p>
+        </p:txBody>
+      </p:sp>
+      <p:sp>
+        <p:nvSpPr>
+          <p:cNvPr id="6" name="TextBox 5">
+            <a:extLst>
+              <a:ext uri="{FF2B5EF4-FFF2-40B4-BE49-F238E27FC236}">
+                <a16:creationId xmlns:a16="http://schemas.microsoft.com/office/drawing/2014/main" id="{2C45CA81-15ED-66C7-D926-DD7CCFE6966F}"/>
+              </a:ext>
+            </a:extLst>
+          </p:cNvPr>
+          <p:cNvSpPr txBox="1"/>
+          <p:nvPr/>
+        </p:nvSpPr>
+        <p:spPr>
+          <a:xfrm>
+            <a:off x="736600" y="1511300"/>
+            <a:ext cx="10414000" cy="215444"/>
+          </a:xfrm>
+          <a:prstGeom prst="rect">
+            <a:avLst/>
+          </a:prstGeom>
+          <a:noFill/>
+        </p:spPr>
+        <p:txBody>
+          <a:bodyPr vert="horz" wrap="square" lIns="0" tIns="0" rIns="0" bIns="0" rtlCol="0">
+            <a:spAutoFit/>
+          </a:bodyPr>
+          <a:lstStyle/>
+          <a:p>
+            <a:r>
+              <a:rPr lang="en-US" sz="1400">
+                <a:solidFill>
+                  <a:srgbClr val="55645D"/>
                 </a:solidFill>
                 <a:latin typeface="Aptos" panose="020B0004020202020204" pitchFamily="34" charset="0"/>
               </a:rPr>
-              <a:t>Placement and selection</a:t>
-            </a:r>
-          </a:p>
-        </p:txBody>
-      </p:sp>
-      <p:sp>
-        <p:nvSpPr>
-          <p:cNvPr id="14" name="Rectangle 13">
-            <a:extLst>
-              <a:ext uri="{FF2B5EF4-FFF2-40B4-BE49-F238E27FC236}">
-                <a16:creationId xmlns:a16="http://schemas.microsoft.com/office/drawing/2014/main" id="{08E21FD8-57F3-6BEE-D4AD-2C0096E3F4A7}"/>
+              <a:t>A camera ray and dwell timer create a hardware-neutral gaze interaction.</a:t>
+            </a:r>
+          </a:p>
+        </p:txBody>
+      </p:sp>
+      <p:sp>
+        <p:nvSpPr>
+          <p:cNvPr id="7" name="Rectangle 6">
+            <a:extLst>
+              <a:ext uri="{FF2B5EF4-FFF2-40B4-BE49-F238E27FC236}">
+                <a16:creationId xmlns:a16="http://schemas.microsoft.com/office/drawing/2014/main" id="{39F8A440-3502-737D-2B1C-F5BE4D5D0447}"/>
               </a:ext>
             </a:extLst>
           </p:cNvPr>
@@ -10538,14 +14177,14 @@
         </p:nvSpPr>
         <p:spPr>
           <a:xfrm>
-            <a:off x="787400" y="4038600"/>
-            <a:ext cx="10566400" cy="558800"/>
+            <a:off x="711200" y="2209800"/>
+            <a:ext cx="6680200" cy="3429000"/>
           </a:xfrm>
           <a:prstGeom prst="rect">
             <a:avLst/>
           </a:prstGeom>
           <a:solidFill>
-            <a:srgbClr val="224B42"/>
+            <a:srgbClr val="FFFEFA"/>
           </a:solidFill>
           <a:ln w="19050" cap="flat" cmpd="sng" algn="ctr">
             <a:noFill/>
@@ -10594,10 +14233,93 @@
       </p:sp>
       <p:sp>
         <p:nvSpPr>
-          <p:cNvPr id="15" name="Rectangle 14">
-            <a:extLst>
-              <a:ext uri="{FF2B5EF4-FFF2-40B4-BE49-F238E27FC236}">
-                <a16:creationId xmlns:a16="http://schemas.microsoft.com/office/drawing/2014/main" id="{0D4DC3EF-C280-5726-1D1F-7B8EB4F94FA7}"/>
+          <p:cNvPr id="8" name="TextBox 7">
+            <a:extLst>
+              <a:ext uri="{FF2B5EF4-FFF2-40B4-BE49-F238E27FC236}">
+                <a16:creationId xmlns:a16="http://schemas.microsoft.com/office/drawing/2014/main" id="{E15B7EE7-0E63-ACF5-6140-BBF60ADB4F47}"/>
+              </a:ext>
+            </a:extLst>
+          </p:cNvPr>
+          <p:cNvSpPr txBox="1"/>
+          <p:nvPr/>
+        </p:nvSpPr>
+        <p:spPr>
+          <a:xfrm>
+            <a:off x="990600" y="2463800"/>
+            <a:ext cx="5715000" cy="153888"/>
+          </a:xfrm>
+          <a:prstGeom prst="rect">
+            <a:avLst/>
+          </a:prstGeom>
+          <a:noFill/>
+        </p:spPr>
+        <p:txBody>
+          <a:bodyPr vert="horz" wrap="square" lIns="0" tIns="0" rIns="0" bIns="0" rtlCol="0">
+            <a:spAutoFit/>
+          </a:bodyPr>
+          <a:lstStyle/>
+          <a:p>
+            <a:r>
+              <a:rPr lang="en-US" sz="1000" b="1">
+                <a:solidFill>
+                  <a:srgbClr val="348775"/>
+                </a:solidFill>
+                <a:latin typeface="Aptos" panose="020B0004020202020204" pitchFamily="34" charset="0"/>
+              </a:rPr>
+              <a:t>STUDENTS BUILD</a:t>
+            </a:r>
+          </a:p>
+        </p:txBody>
+      </p:sp>
+      <p:sp>
+        <p:nvSpPr>
+          <p:cNvPr id="9" name="TextBox 8">
+            <a:extLst>
+              <a:ext uri="{FF2B5EF4-FFF2-40B4-BE49-F238E27FC236}">
+                <a16:creationId xmlns:a16="http://schemas.microsoft.com/office/drawing/2014/main" id="{D643C0BF-8F1F-2919-5D1C-693852A79406}"/>
+              </a:ext>
+            </a:extLst>
+          </p:cNvPr>
+          <p:cNvSpPr txBox="1"/>
+          <p:nvPr/>
+        </p:nvSpPr>
+        <p:spPr>
+          <a:xfrm>
+            <a:off x="990600" y="2857500"/>
+            <a:ext cx="6032500" cy="984885"/>
+          </a:xfrm>
+          <a:prstGeom prst="rect">
+            <a:avLst/>
+          </a:prstGeom>
+          <a:noFill/>
+        </p:spPr>
+        <p:txBody>
+          <a:bodyPr vert="horz" wrap="square" lIns="0" tIns="0" rIns="0" bIns="0" rtlCol="0">
+            <a:spAutoFit/>
+          </a:bodyPr>
+          <a:lstStyle/>
+          <a:p>
+            <a:r>
+              <a:rPr lang="en-US" sz="1600">
+                <a:solidFill>
+                  <a:srgbClr val="263A33"/>
+                </a:solidFill>
+                <a:latin typeface="Aptos" panose="020B0004020202020204" pitchFamily="34" charset="0"/>
+              </a:rPr>
+              <a:t>- Look at a collider target for 1.2 seconds
+- Fill indicator tracks dwell progress
+- Completion event drives selection feedback
+- Mouse-position fallback works without headset</a:t>
+            </a:r>
+          </a:p>
+        </p:txBody>
+      </p:sp>
+      <p:sp>
+        <p:nvSpPr>
+          <p:cNvPr id="10" name="Rectangle 9">
+            <a:extLst>
+              <a:ext uri="{FF2B5EF4-FFF2-40B4-BE49-F238E27FC236}">
+                <a16:creationId xmlns:a16="http://schemas.microsoft.com/office/drawing/2014/main" id="{3DB1749D-9621-5FEB-A555-D333630DC321}"/>
               </a:ext>
             </a:extLst>
           </p:cNvPr>
@@ -10606,14 +14328,14 @@
         </p:nvSpPr>
         <p:spPr>
           <a:xfrm>
-            <a:off x="787400" y="4038600"/>
-            <a:ext cx="685800" cy="558800"/>
+            <a:off x="7721600" y="2209800"/>
+            <a:ext cx="3759200" cy="3581400"/>
           </a:xfrm>
           <a:prstGeom prst="rect">
             <a:avLst/>
           </a:prstGeom>
           <a:solidFill>
-            <a:srgbClr val="D49B2E"/>
+            <a:srgbClr val="1D3D35"/>
           </a:solidFill>
           <a:ln w="19050" cap="flat" cmpd="sng" algn="ctr">
             <a:noFill/>
@@ -10662,10 +14384,10 @@
       </p:sp>
       <p:sp>
         <p:nvSpPr>
-          <p:cNvPr id="16" name="TextBox 15">
-            <a:extLst>
-              <a:ext uri="{FF2B5EF4-FFF2-40B4-BE49-F238E27FC236}">
-                <a16:creationId xmlns:a16="http://schemas.microsoft.com/office/drawing/2014/main" id="{810D118D-A928-45A8-057B-2E353B237A9F}"/>
+          <p:cNvPr id="11" name="TextBox 10">
+            <a:extLst>
+              <a:ext uri="{FF2B5EF4-FFF2-40B4-BE49-F238E27FC236}">
+                <a16:creationId xmlns:a16="http://schemas.microsoft.com/office/drawing/2014/main" id="{CCF90D53-3E73-D575-918C-0579F46FEF42}"/>
               </a:ext>
             </a:extLst>
           </p:cNvPr>
@@ -10674,8 +14396,8 @@
         </p:nvSpPr>
         <p:spPr>
           <a:xfrm>
-            <a:off x="965200" y="4203700"/>
-            <a:ext cx="457200" cy="184666"/>
+            <a:off x="8001000" y="2476500"/>
+            <a:ext cx="3124200" cy="184666"/>
           </a:xfrm>
           <a:prstGeom prst="rect">
             <a:avLst/>
@@ -10691,21 +14413,21 @@
             <a:r>
               <a:rPr lang="en-US" sz="1200" b="1">
                 <a:solidFill>
-                  <a:srgbClr val="FFFFFF"/>
+                  <a:srgbClr val="F2C16D"/>
                 </a:solidFill>
                 <a:latin typeface="Aptos" panose="020B0004020202020204" pitchFamily="34" charset="0"/>
               </a:rPr>
-              <a:t>11</a:t>
-            </a:r>
-          </a:p>
-        </p:txBody>
-      </p:sp>
-      <p:sp>
-        <p:nvSpPr>
-          <p:cNvPr id="17" name="TextBox 16">
-            <a:extLst>
-              <a:ext uri="{FF2B5EF4-FFF2-40B4-BE49-F238E27FC236}">
-                <a16:creationId xmlns:a16="http://schemas.microsoft.com/office/drawing/2014/main" id="{C0BDAEF2-226D-313C-5AD3-1EB808994C21}"/>
+              <a:t>STATE THE LIMIT</a:t>
+            </a:r>
+          </a:p>
+        </p:txBody>
+      </p:sp>
+      <p:sp>
+        <p:nvSpPr>
+          <p:cNvPr id="12" name="TextBox 11">
+            <a:extLst>
+              <a:ext uri="{FF2B5EF4-FFF2-40B4-BE49-F238E27FC236}">
+                <a16:creationId xmlns:a16="http://schemas.microsoft.com/office/drawing/2014/main" id="{E509E1FB-9FB0-691A-6077-5CF39DBF7C08}"/>
               </a:ext>
             </a:extLst>
           </p:cNvPr>
@@ -10714,8 +14436,8 @@
         </p:nvSpPr>
         <p:spPr>
           <a:xfrm>
-            <a:off x="1727200" y="4178300"/>
-            <a:ext cx="7620000" cy="246221"/>
+            <a:off x="8001000" y="2933700"/>
+            <a:ext cx="3149600" cy="1292662"/>
           </a:xfrm>
           <a:prstGeom prst="rect">
             <a:avLst/>
@@ -10729,23 +14451,105 @@
           <a:lstStyle/>
           <a:p>
             <a:r>
-              <a:rPr lang="en-US" sz="1600" b="1">
-                <a:solidFill>
-                  <a:srgbClr val="FFFFFF"/>
+              <a:rPr lang="en-US" sz="1400">
+                <a:solidFill>
+                  <a:srgbClr val="F7F4EC"/>
                 </a:solidFill>
                 <a:latin typeface="Aptos" panose="020B0004020202020204" pitchFamily="34" charset="0"/>
               </a:rPr>
-              <a:t>Spatial feedback</a:t>
-            </a:r>
-          </a:p>
-        </p:txBody>
-      </p:sp>
-      <p:sp>
-        <p:nvSpPr>
-          <p:cNvPr id="18" name="Rectangle 17">
-            <a:extLst>
-              <a:ext uri="{FF2B5EF4-FFF2-40B4-BE49-F238E27FC236}">
-                <a16:creationId xmlns:a16="http://schemas.microsoft.com/office/drawing/2014/main" id="{FA52DE8D-BC39-4204-82B4-C6F59A7799C4}"/>
+              <a:t>1  Leave early; progress resets without selection.
+2  Hold gaze; event fires once at completion.
+3  Report device and package versions tested.</a:t>
+            </a:r>
+          </a:p>
+        </p:txBody>
+      </p:sp>
+      <p:sp>
+        <p:nvSpPr>
+          <p:cNvPr id="13" name="TextBox 12">
+            <a:extLst>
+              <a:ext uri="{FF2B5EF4-FFF2-40B4-BE49-F238E27FC236}">
+                <a16:creationId xmlns:a16="http://schemas.microsoft.com/office/drawing/2014/main" id="{E5AC243F-CBA4-CA1B-1922-8809FF401473}"/>
+              </a:ext>
+            </a:extLst>
+          </p:cNvPr>
+          <p:cNvSpPr txBox="1"/>
+          <p:nvPr/>
+        </p:nvSpPr>
+        <p:spPr>
+          <a:xfrm>
+            <a:off x="8001000" y="5029200"/>
+            <a:ext cx="1270000" cy="138499"/>
+          </a:xfrm>
+          <a:prstGeom prst="rect">
+            <a:avLst/>
+          </a:prstGeom>
+          <a:noFill/>
+        </p:spPr>
+        <p:txBody>
+          <a:bodyPr vert="horz" wrap="square" lIns="0" tIns="0" rIns="0" bIns="0" rtlCol="0">
+            <a:spAutoFit/>
+          </a:bodyPr>
+          <a:lstStyle/>
+          <a:p>
+            <a:r>
+              <a:rPr lang="en-US" sz="900" b="1">
+                <a:solidFill>
+                  <a:srgbClr val="AFC7BD"/>
+                </a:solidFill>
+                <a:latin typeface="Aptos" panose="020B0004020202020204" pitchFamily="34" charset="0"/>
+              </a:rPr>
+              <a:t>TURN IN</a:t>
+            </a:r>
+          </a:p>
+        </p:txBody>
+      </p:sp>
+      <p:sp>
+        <p:nvSpPr>
+          <p:cNvPr id="14" name="TextBox 13">
+            <a:extLst>
+              <a:ext uri="{FF2B5EF4-FFF2-40B4-BE49-F238E27FC236}">
+                <a16:creationId xmlns:a16="http://schemas.microsoft.com/office/drawing/2014/main" id="{06E05BE8-7915-1C7C-F227-2D9EA23A6F59}"/>
+              </a:ext>
+            </a:extLst>
+          </p:cNvPr>
+          <p:cNvSpPr txBox="1"/>
+          <p:nvPr/>
+        </p:nvSpPr>
+        <p:spPr>
+          <a:xfrm>
+            <a:off x="8001000" y="5270500"/>
+            <a:ext cx="3149600" cy="169277"/>
+          </a:xfrm>
+          <a:prstGeom prst="rect">
+            <a:avLst/>
+          </a:prstGeom>
+          <a:noFill/>
+        </p:spPr>
+        <p:txBody>
+          <a:bodyPr vert="horz" wrap="square" lIns="0" tIns="0" rIns="0" bIns="0" rtlCol="0">
+            <a:spAutoFit/>
+          </a:bodyPr>
+          <a:lstStyle/>
+          <a:p>
+            <a:r>
+              <a:rPr lang="en-US" sz="1100" b="1">
+                <a:solidFill>
+                  <a:srgbClr val="FFFFFF"/>
+                </a:solidFill>
+                <a:latin typeface="Aptos" panose="020B0004020202020204" pitchFamily="34" charset="0"/>
+              </a:rPr>
+              <a:t>Test checklist + limitation note (not multiplayer)</a:t>
+            </a:r>
+          </a:p>
+        </p:txBody>
+      </p:sp>
+      <p:sp>
+        <p:nvSpPr>
+          <p:cNvPr id="15" name="Rectangle 14">
+            <a:extLst>
+              <a:ext uri="{FF2B5EF4-FFF2-40B4-BE49-F238E27FC236}">
+                <a16:creationId xmlns:a16="http://schemas.microsoft.com/office/drawing/2014/main" id="{69FD3F2F-0491-0D03-E29E-C167A6A839F5}"/>
               </a:ext>
             </a:extLst>
           </p:cNvPr>
@@ -10754,14 +14558,14 @@
         </p:nvSpPr>
         <p:spPr>
           <a:xfrm>
-            <a:off x="787400" y="4699000"/>
-            <a:ext cx="10566400" cy="558800"/>
+            <a:off x="609600" y="6350000"/>
+            <a:ext cx="10972800" cy="12700"/>
           </a:xfrm>
           <a:prstGeom prst="rect">
             <a:avLst/>
           </a:prstGeom>
           <a:solidFill>
-            <a:srgbClr val="224B42"/>
+            <a:srgbClr val="D5DCD6"/>
           </a:solidFill>
           <a:ln w="19050" cap="flat" cmpd="sng" algn="ctr">
             <a:noFill/>
@@ -10810,78 +14614,10 @@
       </p:sp>
       <p:sp>
         <p:nvSpPr>
-          <p:cNvPr id="19" name="Rectangle 18">
-            <a:extLst>
-              <a:ext uri="{FF2B5EF4-FFF2-40B4-BE49-F238E27FC236}">
-                <a16:creationId xmlns:a16="http://schemas.microsoft.com/office/drawing/2014/main" id="{5E203E6E-B993-D7A0-B60E-FE89C21D4C5B}"/>
-              </a:ext>
-            </a:extLst>
-          </p:cNvPr>
-          <p:cNvSpPr/>
-          <p:nvPr/>
-        </p:nvSpPr>
-        <p:spPr>
-          <a:xfrm>
-            <a:off x="787400" y="4699000"/>
-            <a:ext cx="685800" cy="558800"/>
-          </a:xfrm>
-          <a:prstGeom prst="rect">
-            <a:avLst/>
-          </a:prstGeom>
-          <a:solidFill>
-            <a:srgbClr val="348775"/>
-          </a:solidFill>
-          <a:ln w="19050" cap="flat" cmpd="sng" algn="ctr">
-            <a:noFill/>
-            <a:prstDash val="solid"/>
-            <a:miter lim="800000"/>
-          </a:ln>
-          <a:effectLst/>
-          <a:extLst>
-            <a:ext uri="{91240B29-F687-4F45-9708-019B960494DF}">
-              <a14:hiddenLine xmlns:a14="http://schemas.microsoft.com/office/drawing/2010/main" w="19050" cap="flat" cmpd="sng" algn="ctr">
-                <a:solidFill>
-                  <a:schemeClr val="accent1">
-                    <a:shade val="15000"/>
-                  </a:schemeClr>
-                </a:solidFill>
-                <a:prstDash val="solid"/>
-                <a:miter lim="800000"/>
-              </a14:hiddenLine>
-            </a:ext>
-          </a:extLst>
-        </p:spPr>
-        <p:style>
-          <a:lnRef idx="2">
-            <a:schemeClr val="accent1">
-              <a:shade val="15000"/>
-            </a:schemeClr>
-          </a:lnRef>
-          <a:fillRef idx="1">
-            <a:schemeClr val="accent1"/>
-          </a:fillRef>
-          <a:effectRef idx="0">
-            <a:schemeClr val="accent1"/>
-          </a:effectRef>
-          <a:fontRef idx="minor">
-            <a:schemeClr val="lt1"/>
-          </a:fontRef>
-        </p:style>
-        <p:txBody>
-          <a:bodyPr rtlCol="0" anchor="ctr"/>
-          <a:lstStyle/>
-          <a:p>
-            <a:pPr algn="ctr"/>
-            <a:endParaRPr lang="en-US"/>
-          </a:p>
-        </p:txBody>
-      </p:sp>
-      <p:sp>
-        <p:nvSpPr>
-          <p:cNvPr id="20" name="TextBox 19">
-            <a:extLst>
-              <a:ext uri="{FF2B5EF4-FFF2-40B4-BE49-F238E27FC236}">
-                <a16:creationId xmlns:a16="http://schemas.microsoft.com/office/drawing/2014/main" id="{1158E748-9018-7E10-E230-AAEC7E299593}"/>
+          <p:cNvPr id="16" name="TextBox 15">
+            <a:extLst>
+              <a:ext uri="{FF2B5EF4-FFF2-40B4-BE49-F238E27FC236}">
+                <a16:creationId xmlns:a16="http://schemas.microsoft.com/office/drawing/2014/main" id="{94C30F3F-C881-8525-AC0D-8F87B7FEB138}"/>
               </a:ext>
             </a:extLst>
           </p:cNvPr>
@@ -10890,8 +14626,8 @@
         </p:nvSpPr>
         <p:spPr>
           <a:xfrm>
-            <a:off x="965200" y="4864100"/>
-            <a:ext cx="457200" cy="184666"/>
+            <a:off x="609600" y="6489700"/>
+            <a:ext cx="8890000" cy="138499"/>
           </a:xfrm>
           <a:prstGeom prst="rect">
             <a:avLst/>
@@ -10905,23 +14641,23 @@
           <a:lstStyle/>
           <a:p>
             <a:r>
-              <a:rPr lang="en-US" sz="1200" b="1">
-                <a:solidFill>
-                  <a:srgbClr val="FFFFFF"/>
+              <a:rPr lang="en-US" sz="900" b="1">
+                <a:solidFill>
+                  <a:srgbClr val="55645D"/>
                 </a:solidFill>
                 <a:latin typeface="Aptos" panose="020B0004020202020204" pitchFamily="34" charset="0"/>
               </a:rPr>
-              <a:t>12</a:t>
-            </a:r>
-          </a:p>
-        </p:txBody>
-      </p:sp>
-      <p:sp>
-        <p:nvSpPr>
-          <p:cNvPr id="21" name="TextBox 20">
-            <a:extLst>
-              <a:ext uri="{FF2B5EF4-FFF2-40B4-BE49-F238E27FC236}">
-                <a16:creationId xmlns:a16="http://schemas.microsoft.com/office/drawing/2014/main" id="{6473DD7E-6139-FABF-B078-37D93A829D5A}"/>
+              <a:t>CIST 1423  /  UNITY XR LABS</a:t>
+            </a:r>
+          </a:p>
+        </p:txBody>
+      </p:sp>
+      <p:sp>
+        <p:nvSpPr>
+          <p:cNvPr id="17" name="TextBox 16">
+            <a:extLst>
+              <a:ext uri="{FF2B5EF4-FFF2-40B4-BE49-F238E27FC236}">
+                <a16:creationId xmlns:a16="http://schemas.microsoft.com/office/drawing/2014/main" id="{5225ADB3-85A6-210C-8913-FBF881FF305B}"/>
               </a:ext>
             </a:extLst>
           </p:cNvPr>
@@ -10930,8 +14666,8 @@
         </p:nvSpPr>
         <p:spPr>
           <a:xfrm>
-            <a:off x="1727200" y="4838700"/>
-            <a:ext cx="7620000" cy="246221"/>
+            <a:off x="10985500" y="6451600"/>
+            <a:ext cx="571500" cy="169277"/>
           </a:xfrm>
           <a:prstGeom prst="rect">
             <a:avLst/>
@@ -10945,309 +14681,13 @@
           <a:lstStyle/>
           <a:p>
             <a:r>
-              <a:rPr lang="en-US" sz="1600" b="1">
-                <a:solidFill>
-                  <a:srgbClr val="FFFFFF"/>
-                </a:solidFill>
-                <a:latin typeface="Aptos" panose="020B0004020202020204" pitchFamily="34" charset="0"/>
+              <a:rPr lang="en-US" sz="1100" b="1">
+                <a:solidFill>
+                  <a:srgbClr val="55645D"/>
+                </a:solidFill>
+                <a:latin typeface="Aptos Display" panose="020B0004020202020204" pitchFamily="34" charset="0"/>
               </a:rPr>
-              <a:t>Gaze and dwell</a:t>
-            </a:r>
-          </a:p>
-        </p:txBody>
-      </p:sp>
-      <p:sp>
-        <p:nvSpPr>
-          <p:cNvPr id="22" name="Rectangle 21">
-            <a:extLst>
-              <a:ext uri="{FF2B5EF4-FFF2-40B4-BE49-F238E27FC236}">
-                <a16:creationId xmlns:a16="http://schemas.microsoft.com/office/drawing/2014/main" id="{E78D199D-DD10-1914-7373-FE7ECAA37A5C}"/>
-              </a:ext>
-            </a:extLst>
-          </p:cNvPr>
-          <p:cNvSpPr/>
-          <p:nvPr/>
-        </p:nvSpPr>
-        <p:spPr>
-          <a:xfrm>
-            <a:off x="787400" y="5359400"/>
-            <a:ext cx="10566400" cy="558800"/>
-          </a:xfrm>
-          <a:prstGeom prst="rect">
-            <a:avLst/>
-          </a:prstGeom>
-          <a:solidFill>
-            <a:srgbClr val="224B42"/>
-          </a:solidFill>
-          <a:ln w="19050" cap="flat" cmpd="sng" algn="ctr">
-            <a:noFill/>
-            <a:prstDash val="solid"/>
-            <a:miter lim="800000"/>
-          </a:ln>
-          <a:effectLst/>
-          <a:extLst>
-            <a:ext uri="{91240B29-F687-4F45-9708-019B960494DF}">
-              <a14:hiddenLine xmlns:a14="http://schemas.microsoft.com/office/drawing/2010/main" w="19050" cap="flat" cmpd="sng" algn="ctr">
-                <a:solidFill>
-                  <a:schemeClr val="accent1">
-                    <a:shade val="15000"/>
-                  </a:schemeClr>
-                </a:solidFill>
-                <a:prstDash val="solid"/>
-                <a:miter lim="800000"/>
-              </a14:hiddenLine>
-            </a:ext>
-          </a:extLst>
-        </p:spPr>
-        <p:style>
-          <a:lnRef idx="2">
-            <a:schemeClr val="accent1">
-              <a:shade val="15000"/>
-            </a:schemeClr>
-          </a:lnRef>
-          <a:fillRef idx="1">
-            <a:schemeClr val="accent1"/>
-          </a:fillRef>
-          <a:effectRef idx="0">
-            <a:schemeClr val="accent1"/>
-          </a:effectRef>
-          <a:fontRef idx="minor">
-            <a:schemeClr val="lt1"/>
-          </a:fontRef>
-        </p:style>
-        <p:txBody>
-          <a:bodyPr rtlCol="0" anchor="ctr"/>
-          <a:lstStyle/>
-          <a:p>
-            <a:pPr algn="ctr"/>
-            <a:endParaRPr lang="en-US"/>
-          </a:p>
-        </p:txBody>
-      </p:sp>
-      <p:sp>
-        <p:nvSpPr>
-          <p:cNvPr id="23" name="Rectangle 22">
-            <a:extLst>
-              <a:ext uri="{FF2B5EF4-FFF2-40B4-BE49-F238E27FC236}">
-                <a16:creationId xmlns:a16="http://schemas.microsoft.com/office/drawing/2014/main" id="{7BF0DBFE-FF3B-1A94-CD52-6E6E85EA4A38}"/>
-              </a:ext>
-            </a:extLst>
-          </p:cNvPr>
-          <p:cNvSpPr/>
-          <p:nvPr/>
-        </p:nvSpPr>
-        <p:spPr>
-          <a:xfrm>
-            <a:off x="787400" y="5359400"/>
-            <a:ext cx="685800" cy="558800"/>
-          </a:xfrm>
-          <a:prstGeom prst="rect">
-            <a:avLst/>
-          </a:prstGeom>
-          <a:solidFill>
-            <a:srgbClr val="B28B58"/>
-          </a:solidFill>
-          <a:ln w="19050" cap="flat" cmpd="sng" algn="ctr">
-            <a:noFill/>
-            <a:prstDash val="solid"/>
-            <a:miter lim="800000"/>
-          </a:ln>
-          <a:effectLst/>
-          <a:extLst>
-            <a:ext uri="{91240B29-F687-4F45-9708-019B960494DF}">
-              <a14:hiddenLine xmlns:a14="http://schemas.microsoft.com/office/drawing/2010/main" w="19050" cap="flat" cmpd="sng" algn="ctr">
-                <a:solidFill>
-                  <a:schemeClr val="accent1">
-                    <a:shade val="15000"/>
-                  </a:schemeClr>
-                </a:solidFill>
-                <a:prstDash val="solid"/>
-                <a:miter lim="800000"/>
-              </a14:hiddenLine>
-            </a:ext>
-          </a:extLst>
-        </p:spPr>
-        <p:style>
-          <a:lnRef idx="2">
-            <a:schemeClr val="accent1">
-              <a:shade val="15000"/>
-            </a:schemeClr>
-          </a:lnRef>
-          <a:fillRef idx="1">
-            <a:schemeClr val="accent1"/>
-          </a:fillRef>
-          <a:effectRef idx="0">
-            <a:schemeClr val="accent1"/>
-          </a:effectRef>
-          <a:fontRef idx="minor">
-            <a:schemeClr val="lt1"/>
-          </a:fontRef>
-        </p:style>
-        <p:txBody>
-          <a:bodyPr rtlCol="0" anchor="ctr"/>
-          <a:lstStyle/>
-          <a:p>
-            <a:pPr algn="ctr"/>
-            <a:endParaRPr lang="en-US"/>
-          </a:p>
-        </p:txBody>
-      </p:sp>
-      <p:sp>
-        <p:nvSpPr>
-          <p:cNvPr id="24" name="TextBox 23">
-            <a:extLst>
-              <a:ext uri="{FF2B5EF4-FFF2-40B4-BE49-F238E27FC236}">
-                <a16:creationId xmlns:a16="http://schemas.microsoft.com/office/drawing/2014/main" id="{2928B849-577C-F353-38F5-EE73DB467312}"/>
-              </a:ext>
-            </a:extLst>
-          </p:cNvPr>
-          <p:cNvSpPr txBox="1"/>
-          <p:nvPr/>
-        </p:nvSpPr>
-        <p:spPr>
-          <a:xfrm>
-            <a:off x="965200" y="5524500"/>
-            <a:ext cx="457200" cy="184666"/>
-          </a:xfrm>
-          <a:prstGeom prst="rect">
-            <a:avLst/>
-          </a:prstGeom>
-          <a:noFill/>
-        </p:spPr>
-        <p:txBody>
-          <a:bodyPr vert="horz" wrap="square" lIns="0" tIns="0" rIns="0" bIns="0" rtlCol="0">
-            <a:spAutoFit/>
-          </a:bodyPr>
-          <a:lstStyle/>
-          <a:p>
-            <a:r>
-              <a:rPr lang="en-US" sz="1200" b="1">
-                <a:solidFill>
-                  <a:srgbClr val="FFFFFF"/>
-                </a:solidFill>
-                <a:latin typeface="Aptos" panose="020B0004020202020204" pitchFamily="34" charset="0"/>
-              </a:rPr>
-              <a:t>13</a:t>
-            </a:r>
-          </a:p>
-        </p:txBody>
-      </p:sp>
-      <p:sp>
-        <p:nvSpPr>
-          <p:cNvPr id="25" name="TextBox 24">
-            <a:extLst>
-              <a:ext uri="{FF2B5EF4-FFF2-40B4-BE49-F238E27FC236}">
-                <a16:creationId xmlns:a16="http://schemas.microsoft.com/office/drawing/2014/main" id="{A720E20C-EF7A-7B67-0239-D5ADE6D23062}"/>
-              </a:ext>
-            </a:extLst>
-          </p:cNvPr>
-          <p:cNvSpPr txBox="1"/>
-          <p:nvPr/>
-        </p:nvSpPr>
-        <p:spPr>
-          <a:xfrm>
-            <a:off x="1727200" y="5499100"/>
-            <a:ext cx="7620000" cy="246221"/>
-          </a:xfrm>
-          <a:prstGeom prst="rect">
-            <a:avLst/>
-          </a:prstGeom>
-          <a:noFill/>
-        </p:spPr>
-        <p:txBody>
-          <a:bodyPr vert="horz" wrap="square" lIns="0" tIns="0" rIns="0" bIns="0" rtlCol="0">
-            <a:spAutoFit/>
-          </a:bodyPr>
-          <a:lstStyle/>
-          <a:p>
-            <a:r>
-              <a:rPr lang="en-US" sz="1600" b="1">
-                <a:solidFill>
-                  <a:srgbClr val="FFFFFF"/>
-                </a:solidFill>
-                <a:latin typeface="Aptos" panose="020B0004020202020204" pitchFamily="34" charset="0"/>
-              </a:rPr>
-              <a:t>Comfort and iteration</a:t>
-            </a:r>
-          </a:p>
-        </p:txBody>
-      </p:sp>
-      <p:sp>
-        <p:nvSpPr>
-          <p:cNvPr id="26" name="TextBox 25">
-            <a:extLst>
-              <a:ext uri="{FF2B5EF4-FFF2-40B4-BE49-F238E27FC236}">
-                <a16:creationId xmlns:a16="http://schemas.microsoft.com/office/drawing/2014/main" id="{84BB245C-1AD2-89D5-D9C2-40D8382F1F5F}"/>
-              </a:ext>
-            </a:extLst>
-          </p:cNvPr>
-          <p:cNvSpPr txBox="1"/>
-          <p:nvPr/>
-        </p:nvSpPr>
-        <p:spPr>
-          <a:xfrm>
-            <a:off x="787400" y="6172200"/>
-            <a:ext cx="1219200" cy="153888"/>
-          </a:xfrm>
-          <a:prstGeom prst="rect">
-            <a:avLst/>
-          </a:prstGeom>
-          <a:noFill/>
-        </p:spPr>
-        <p:txBody>
-          <a:bodyPr vert="horz" wrap="square" lIns="0" tIns="0" rIns="0" bIns="0" rtlCol="0">
-            <a:spAutoFit/>
-          </a:bodyPr>
-          <a:lstStyle/>
-          <a:p>
-            <a:r>
-              <a:rPr lang="en-US" sz="1000" b="1">
-                <a:solidFill>
-                  <a:srgbClr val="F2C16D"/>
-                </a:solidFill>
-                <a:latin typeface="Aptos" panose="020B0004020202020204" pitchFamily="34" charset="0"/>
-              </a:rPr>
-              <a:t>START HERE</a:t>
-            </a:r>
-          </a:p>
-        </p:txBody>
-      </p:sp>
-      <p:sp>
-        <p:nvSpPr>
-          <p:cNvPr id="27" name="TextBox 26">
-            <a:extLst>
-              <a:ext uri="{FF2B5EF4-FFF2-40B4-BE49-F238E27FC236}">
-                <a16:creationId xmlns:a16="http://schemas.microsoft.com/office/drawing/2014/main" id="{5EA6CD90-0EE9-1C39-C1D5-6922B1D58E92}"/>
-              </a:ext>
-            </a:extLst>
-          </p:cNvPr>
-          <p:cNvSpPr txBox="1"/>
-          <p:nvPr/>
-        </p:nvSpPr>
-        <p:spPr>
-          <a:xfrm>
-            <a:off x="2082800" y="6121400"/>
-            <a:ext cx="9271000" cy="200055"/>
-          </a:xfrm>
-          <a:prstGeom prst="rect">
-            <a:avLst/>
-          </a:prstGeom>
-          <a:noFill/>
-        </p:spPr>
-        <p:txBody>
-          <a:bodyPr vert="horz" wrap="square" lIns="0" tIns="0" rIns="0" bIns="0" rtlCol="0">
-            <a:spAutoFit/>
-          </a:bodyPr>
-          <a:lstStyle/>
-          <a:p>
-            <a:r>
-              <a:rPr lang="en-US" sz="1300">
-                <a:solidFill>
-                  <a:srgbClr val="F7F4EC"/>
-                </a:solidFill>
-                <a:latin typeface="Aptos" panose="020B0004020202020204" pitchFamily="34" charset="0"/>
-              </a:rPr>
-              <a:t>Open Week-09 through Week-13 folders; each README includes setup, tests, and submission evidence.</a:t>
+              <a:t>09</a:t>
             </a:r>
           </a:p>
         </p:txBody>
@@ -11255,7 +14695,7 @@
     </p:spTree>
     <p:extLst>
       <p:ext uri="{BB962C8B-B14F-4D97-AF65-F5344CB8AC3E}">
-        <p14:creationId xmlns:p14="http://schemas.microsoft.com/office/powerpoint/2010/main" val="1809113342"/>
+        <p14:creationId xmlns:p14="http://schemas.microsoft.com/office/powerpoint/2010/main" val="324516039"/>
       </p:ext>
     </p:extLst>
   </p:cSld>
